--- a/Sengo_2025_Impact_Report.pptx
+++ b/Sengo_2025_Impact_Report.pptx
@@ -121,6 +121,130 @@
 
 <file path=ppt/charts/chart1.xml><?xml version="1.0" encoding="utf-8"?>
 <c:chartSpace xmlns:c="http://schemas.openxmlformats.org/drawingml/2006/chart" xmlns:a="http://schemas.openxmlformats.org/drawingml/2006/main" xmlns:r="http://schemas.openxmlformats.org/officeDocument/2006/relationships">
+  <c:chart>
+    <c:title>
+      <c:tx>
+        <c:rich>
+          <a:bodyPr/>
+          <a:lstStyle/>
+          <a:p>
+            <a:pPr>
+              <a:defRPr sz="1400" b="1">
+                <a:solidFill>
+                  <a:srgbClr val="FFFFFF"/>
+                </a:solidFill>
+              </a:defRPr>
+            </a:pPr>
+            <a:r>
+              <a:t>Grant Deployment Breakdown</a:t>
+            </a:r>
+          </a:p>
+        </c:rich>
+      </c:tx>
+      <c:layout/>
+      <c:overlay val="0"/>
+    </c:title>
+    <c:autoTitleDeleted val="0"/>
+    <c:plotArea>
+      <c:pieChart>
+        <c:varyColors val="1"/>
+        <c:ser>
+          <c:idx val="0"/>
+          <c:order val="0"/>
+          <c:tx>
+            <c:strRef>
+              <c:f>Sheet1!$B$1</c:f>
+              <c:strCache>
+                <c:ptCount val="1"/>
+                <c:pt idx="0">
+                  <c:v>Grant Deployment</c:v>
+                </c:pt>
+              </c:strCache>
+            </c:strRef>
+          </c:tx>
+          <c:dPt>
+            <c:idx val="0"/>
+            <c:spPr>
+              <a:solidFill>
+                <a:srgbClr val="D57028"/>
+              </a:solidFill>
+            </c:spPr>
+          </c:dPt>
+          <c:dPt>
+            <c:idx val="1"/>
+            <c:spPr>
+              <a:solidFill>
+                <a:srgbClr val="717E36"/>
+              </a:solidFill>
+            </c:spPr>
+          </c:dPt>
+          <c:dPt>
+            <c:idx val="2"/>
+            <c:spPr>
+              <a:solidFill>
+                <a:srgbClr val="AF8145"/>
+              </a:solidFill>
+            </c:spPr>
+          </c:dPt>
+          <c:cat>
+            <c:strRef>
+              <c:f>Sheet1!$A$2:$A$4</c:f>
+              <c:strCache>
+                <c:ptCount val="3"/>
+                <c:pt idx="0">
+                  <c:v>Standard Grants (76.8%)</c:v>
+                </c:pt>
+                <c:pt idx="1">
+                  <c:v>Pitch Competition Awards (12.0%)</c:v>
+                </c:pt>
+                <c:pt idx="2">
+                  <c:v>Micro / Mini Grants (11.2%)</c:v>
+                </c:pt>
+              </c:strCache>
+            </c:strRef>
+          </c:cat>
+          <c:val>
+            <c:numRef>
+              <c:f>Sheet1!$B$2:$B$4</c:f>
+              <c:numCache>
+                <c:formatCode>General</c:formatCode>
+                <c:ptCount val="3"/>
+                <c:pt idx="0">
+                  <c:v>76.8</c:v>
+                </c:pt>
+                <c:pt idx="1">
+                  <c:v>12.0</c:v>
+                </c:pt>
+                <c:pt idx="2">
+                  <c:v>11.2</c:v>
+                </c:pt>
+              </c:numCache>
+            </c:numRef>
+          </c:val>
+        </c:ser>
+      </c:pieChart>
+    </c:plotArea>
+    <c:legend/>
+    <c:dispBlanksAs val="gap"/>
+  </c:chart>
+  <c:txPr>
+    <a:bodyPr/>
+    <a:lstStyle/>
+    <a:p>
+      <a:pPr>
+        <a:defRPr sz="1800"/>
+      </a:pPr>
+      <a:endParaRPr lang="en-US"/>
+    </a:p>
+  </c:txPr>
+  <c:externalData r:id="rId1">
+    <c:autoUpdate val="0"/>
+  </c:externalData>
+</c:chartSpace>
+</file>
+
+<file path=ppt/charts/chart2.xml><?xml version="1.0" encoding="utf-8"?>
+<c:chartSpace xmlns:c="http://schemas.openxmlformats.org/drawingml/2006/chart" xmlns:a="http://schemas.openxmlformats.org/drawingml/2006/main" xmlns:r="http://schemas.openxmlformats.org/officeDocument/2006/relationships">
   <c:date1904 val="0"/>
   <c:chart>
     <c:title>
@@ -137,7 +261,7 @@
               </a:defRPr>
             </a:pPr>
             <a:r>
-              <a:t>Membership Growth (2025)</a:t>
+              <a:t>Programming Mix (%)</a:t>
             </a:r>
           </a:p>
         </c:rich>
@@ -159,7 +283,7 @@
               <c:strCache>
                 <c:ptCount val="1"/>
                 <c:pt idx="0">
-                  <c:v>Members</c:v>
+                  <c:v>Programming Mix</c:v>
                 </c:pt>
               </c:strCache>
             </c:strRef>
@@ -171,41 +295,29 @@
           </c:spPr>
           <c:cat>
             <c:strRef>
-              <c:f>Sheet1!$A$2:$A$5</c:f>
+              <c:f>Sheet1!$A$2:$A$3</c:f>
               <c:strCache>
-                <c:ptCount val="4"/>
+                <c:ptCount val="2"/>
                 <c:pt idx="0">
-                  <c:v>Q1</c:v>
+                  <c:v>In-Person</c:v>
                 </c:pt>
                 <c:pt idx="1">
-                  <c:v>Q2</c:v>
-                </c:pt>
-                <c:pt idx="2">
-                  <c:v>Q3</c:v>
-                </c:pt>
-                <c:pt idx="3">
-                  <c:v>Q4</c:v>
+                  <c:v>Virtual</c:v>
                 </c:pt>
               </c:strCache>
             </c:strRef>
           </c:cat>
           <c:val>
             <c:numRef>
-              <c:f>Sheet1!$B$2:$B$5</c:f>
+              <c:f>Sheet1!$B$2:$B$3</c:f>
               <c:numCache>
                 <c:formatCode>General</c:formatCode>
-                <c:ptCount val="4"/>
+                <c:ptCount val="2"/>
                 <c:pt idx="0">
-                  <c:v>150</c:v>
+                  <c:v>51.85</c:v>
                 </c:pt>
                 <c:pt idx="1">
-                  <c:v>300</c:v>
-                </c:pt>
-                <c:pt idx="2">
-                  <c:v>450</c:v>
-                </c:pt>
-                <c:pt idx="3">
-                  <c:v>600</c:v>
+                  <c:v>48.15</c:v>
                 </c:pt>
               </c:numCache>
             </c:numRef>
@@ -244,144 +356,6 @@
         <c:crosses val="autoZero"/>
       </c:valAx>
     </c:plotArea>
-    <c:dispBlanksAs val="gap"/>
-  </c:chart>
-  <c:txPr>
-    <a:bodyPr/>
-    <a:lstStyle/>
-    <a:p>
-      <a:pPr>
-        <a:defRPr sz="1800"/>
-      </a:pPr>
-      <a:endParaRPr lang="en-US"/>
-    </a:p>
-  </c:txPr>
-  <c:externalData r:id="rId1">
-    <c:autoUpdate val="0"/>
-  </c:externalData>
-</c:chartSpace>
-</file>
-
-<file path=ppt/charts/chart2.xml><?xml version="1.0" encoding="utf-8"?>
-<c:chartSpace xmlns:c="http://schemas.openxmlformats.org/drawingml/2006/chart" xmlns:a="http://schemas.openxmlformats.org/drawingml/2006/main" xmlns:r="http://schemas.openxmlformats.org/officeDocument/2006/relationships">
-  <c:chart>
-    <c:title>
-      <c:tx>
-        <c:rich>
-          <a:bodyPr/>
-          <a:lstStyle/>
-          <a:p>
-            <a:pPr>
-              <a:defRPr sz="1400" b="1">
-                <a:solidFill>
-                  <a:srgbClr val="FFFFFF"/>
-                </a:solidFill>
-              </a:defRPr>
-            </a:pPr>
-            <a:r>
-              <a:t>Capital Raised by Stage</a:t>
-            </a:r>
-          </a:p>
-        </c:rich>
-      </c:tx>
-      <c:layout/>
-      <c:overlay val="0"/>
-    </c:title>
-    <c:autoTitleDeleted val="0"/>
-    <c:plotArea>
-      <c:pieChart>
-        <c:varyColors val="1"/>
-        <c:ser>
-          <c:idx val="0"/>
-          <c:order val="0"/>
-          <c:tx>
-            <c:strRef>
-              <c:f>Sheet1!$B$1</c:f>
-              <c:strCache>
-                <c:ptCount val="1"/>
-                <c:pt idx="0">
-                  <c:v>Allocation</c:v>
-                </c:pt>
-              </c:strCache>
-            </c:strRef>
-          </c:tx>
-          <c:dPt>
-            <c:idx val="0"/>
-            <c:spPr>
-              <a:solidFill>
-                <a:srgbClr val="D57028"/>
-              </a:solidFill>
-            </c:spPr>
-          </c:dPt>
-          <c:dPt>
-            <c:idx val="1"/>
-            <c:spPr>
-              <a:solidFill>
-                <a:srgbClr val="717E36"/>
-              </a:solidFill>
-            </c:spPr>
-          </c:dPt>
-          <c:dPt>
-            <c:idx val="2"/>
-            <c:spPr>
-              <a:solidFill>
-                <a:srgbClr val="AF8145"/>
-              </a:solidFill>
-            </c:spPr>
-          </c:dPt>
-          <c:dPt>
-            <c:idx val="3"/>
-            <c:spPr>
-              <a:solidFill>
-                <a:srgbClr val="244A47"/>
-              </a:solidFill>
-            </c:spPr>
-          </c:dPt>
-          <c:cat>
-            <c:strRef>
-              <c:f>Sheet1!$A$2:$A$5</c:f>
-              <c:strCache>
-                <c:ptCount val="4"/>
-                <c:pt idx="0">
-                  <c:v>Pre-Seed</c:v>
-                </c:pt>
-                <c:pt idx="1">
-                  <c:v>Seed</c:v>
-                </c:pt>
-                <c:pt idx="2">
-                  <c:v>Series A</c:v>
-                </c:pt>
-                <c:pt idx="3">
-                  <c:v>Grants</c:v>
-                </c:pt>
-              </c:strCache>
-            </c:strRef>
-          </c:cat>
-          <c:val>
-            <c:numRef>
-              <c:f>Sheet1!$B$2:$B$5</c:f>
-              <c:numCache>
-                <c:formatCode>General</c:formatCode>
-                <c:ptCount val="4"/>
-                <c:pt idx="0">
-                  <c:v>25</c:v>
-                </c:pt>
-                <c:pt idx="1">
-                  <c:v>35</c:v>
-                </c:pt>
-                <c:pt idx="2">
-                  <c:v>20</c:v>
-                </c:pt>
-                <c:pt idx="3">
-                  <c:v>20</c:v>
-                </c:pt>
-              </c:numCache>
-            </c:numRef>
-          </c:val>
-        </c:ser>
-      </c:pieChart>
-    </c:plotArea>
-    <c:legend/>
     <c:dispBlanksAs val="gap"/>
   </c:chart>
   <c:txPr>
@@ -3476,7 +3450,7 @@
         </p:nvSpPr>
         <p:spPr>
           <a:xfrm>
-            <a:off x="1371600" y="2011680"/>
+            <a:off x="1371600" y="1920240"/>
             <a:ext cx="9144000" cy="1188720"/>
           </a:xfrm>
           <a:prstGeom prst="rect">
@@ -3491,7 +3465,7 @@
           <a:lstStyle/>
           <a:p>
             <a:pPr algn="ctr">
-              <a:defRPr sz="5600" b="1">
+              <a:defRPr sz="5400" b="1">
                 <a:solidFill>
                   <a:srgbClr val="FFFFFF"/>
                 </a:solidFill>
@@ -3499,7 +3473,7 @@
               </a:defRPr>
             </a:pPr>
             <a:r>
-              <a:t>2025 Impact Report</a:t>
+              <a:t>Impact Report 2025</a:t>
             </a:r>
           </a:p>
         </p:txBody>
@@ -3512,7 +3486,7 @@
         </p:nvSpPr>
         <p:spPr>
           <a:xfrm>
-            <a:off x="5029200" y="3291840"/>
+            <a:off x="5029200" y="3200400"/>
             <a:ext cx="2103120" cy="50800"/>
           </a:xfrm>
           <a:prstGeom prst="rect">
@@ -3555,7 +3529,7 @@
         </p:nvSpPr>
         <p:spPr>
           <a:xfrm>
-            <a:off x="1828800" y="3657600"/>
+            <a:off x="1828800" y="3566160"/>
             <a:ext cx="8229600" cy="731520"/>
           </a:xfrm>
           <a:prstGeom prst="rect">
@@ -3570,7 +3544,7 @@
           <a:lstStyle/>
           <a:p>
             <a:pPr algn="ctr">
-              <a:defRPr sz="2200" b="0">
+              <a:defRPr sz="2400" b="1">
                 <a:solidFill>
                   <a:srgbClr val="F3EDE7"/>
                 </a:solidFill>
@@ -3578,11 +3552,7 @@
               </a:defRPr>
             </a:pPr>
             <a:r>
-              <a:t>A Year of Building Equitable Access to Funding,</a:t>
-            </a:r>
-            <a:br/>
-            <a:r>
-              <a:t>Education, and Private Markets</a:t>
+              <a:t>Turning Community Into Capital — Through Readiness</a:t>
             </a:r>
           </a:p>
         </p:txBody>
@@ -3595,8 +3565,8 @@
         </p:nvSpPr>
         <p:spPr>
           <a:xfrm>
-            <a:off x="1828800" y="4663440"/>
-            <a:ext cx="8229600" cy="548640"/>
+            <a:off x="1828800" y="4389120"/>
+            <a:ext cx="8229600" cy="640080"/>
           </a:xfrm>
           <a:prstGeom prst="rect">
             <a:avLst/>
@@ -3618,7 +3588,7 @@
               </a:defRPr>
             </a:pPr>
             <a:r>
-              <a:t>From Proof of Concept to Scalable Ecosystem</a:t>
+              <a:t>Building informed founders, prepared funders, and durable ecosystems</a:t>
             </a:r>
           </a:p>
         </p:txBody>
@@ -3646,7 +3616,7 @@
           <a:lstStyle/>
           <a:p>
             <a:pPr algn="ctr">
-              <a:defRPr sz="1100" b="0">
+              <a:defRPr sz="1200" b="0">
                 <a:solidFill>
                   <a:srgbClr val="AF8145"/>
                 </a:solidFill>
@@ -3654,7 +3624,7 @@
               </a:defRPr>
             </a:pPr>
             <a:r>
-              <a:t>For Community Members  ·  Partners  ·  Funders  ·  Press  ·  Ecosystem Allies</a:t>
+              <a:t>Founded by Ila B. Corcoran  |  2025 Year in Review</a:t>
             </a:r>
           </a:p>
         </p:txBody>
@@ -3711,6 +3681,945 @@
 </file>
 
 <file path=ppt/slides/slide10.xml><?xml version="1.0" encoding="utf-8"?>
+<p:sld xmlns:a="http://schemas.openxmlformats.org/drawingml/2006/main" xmlns:p="http://schemas.openxmlformats.org/presentationml/2006/main" xmlns:r="http://schemas.openxmlformats.org/officeDocument/2006/relationships">
+  <p:cSld>
+    <p:bg>
+      <p:bgPr>
+        <a:solidFill>
+          <a:srgbClr val="F3EDE7"/>
+        </a:solidFill>
+        <a:effectLst/>
+      </p:bgPr>
+    </p:bg>
+    <p:spTree>
+      <p:nvGrpSpPr>
+        <p:cNvPr id="1" name=""/>
+        <p:cNvGrpSpPr/>
+        <p:nvPr/>
+      </p:nvGrpSpPr>
+      <p:grpSpPr/>
+      <p:sp>
+        <p:nvSpPr>
+          <p:cNvPr id="2" name="Rectangle 1"/>
+          <p:cNvSpPr/>
+          <p:nvPr/>
+        </p:nvSpPr>
+        <p:spPr>
+          <a:xfrm>
+            <a:off x="0" y="0"/>
+            <a:ext cx="12191695" cy="63500"/>
+          </a:xfrm>
+          <a:prstGeom prst="rect">
+            <a:avLst/>
+          </a:prstGeom>
+          <a:solidFill>
+            <a:srgbClr val="D57028"/>
+          </a:solidFill>
+          <a:ln>
+            <a:noFill/>
+          </a:ln>
+        </p:spPr>
+        <p:style>
+          <a:lnRef idx="1">
+            <a:schemeClr val="accent1"/>
+          </a:lnRef>
+          <a:fillRef idx="3">
+            <a:schemeClr val="accent1"/>
+          </a:fillRef>
+          <a:effectRef idx="2">
+            <a:schemeClr val="accent1"/>
+          </a:effectRef>
+          <a:fontRef idx="minor">
+            <a:schemeClr val="lt1"/>
+          </a:fontRef>
+        </p:style>
+        <p:txBody>
+          <a:bodyPr rtlCol="0" anchor="ctr"/>
+          <a:lstStyle/>
+          <a:p>
+            <a:pPr algn="ctr"/>
+          </a:p>
+        </p:txBody>
+      </p:sp>
+      <p:sp>
+        <p:nvSpPr>
+          <p:cNvPr id="3" name="TextBox 2"/>
+          <p:cNvSpPr txBox="1"/>
+          <p:nvPr/>
+        </p:nvSpPr>
+        <p:spPr>
+          <a:xfrm>
+            <a:off x="914400" y="457200"/>
+            <a:ext cx="10058400" cy="457200"/>
+          </a:xfrm>
+          <a:prstGeom prst="rect">
+            <a:avLst/>
+          </a:prstGeom>
+          <a:noFill/>
+        </p:spPr>
+        <p:txBody>
+          <a:bodyPr wrap="square">
+            <a:spAutoFit/>
+          </a:bodyPr>
+          <a:lstStyle/>
+          <a:p>
+            <a:pPr algn="ctr">
+              <a:defRPr sz="1300" b="1">
+                <a:solidFill>
+                  <a:srgbClr val="D57028"/>
+                </a:solidFill>
+                <a:latin typeface="Arial"/>
+              </a:defRPr>
+            </a:pPr>
+            <a:r>
+              <a:t>WHAT WE RUN TODAY</a:t>
+            </a:r>
+          </a:p>
+        </p:txBody>
+      </p:sp>
+      <p:sp>
+        <p:nvSpPr>
+          <p:cNvPr id="4" name="TextBox 3"/>
+          <p:cNvSpPr txBox="1"/>
+          <p:nvPr/>
+        </p:nvSpPr>
+        <p:spPr>
+          <a:xfrm>
+            <a:off x="914400" y="914400"/>
+            <a:ext cx="10058400" cy="914400"/>
+          </a:xfrm>
+          <a:prstGeom prst="rect">
+            <a:avLst/>
+          </a:prstGeom>
+          <a:noFill/>
+        </p:spPr>
+        <p:txBody>
+          <a:bodyPr wrap="square">
+            <a:spAutoFit/>
+          </a:bodyPr>
+          <a:lstStyle/>
+          <a:p>
+            <a:pPr algn="ctr">
+              <a:defRPr sz="4000" b="1">
+                <a:solidFill>
+                  <a:srgbClr val="1B3533"/>
+                </a:solidFill>
+                <a:latin typeface="Arial"/>
+              </a:defRPr>
+            </a:pPr>
+            <a:r>
+              <a:t>Core Programs</a:t>
+            </a:r>
+          </a:p>
+        </p:txBody>
+      </p:sp>
+      <p:sp>
+        <p:nvSpPr>
+          <p:cNvPr id="5" name="Rectangle 4"/>
+          <p:cNvSpPr/>
+          <p:nvPr/>
+        </p:nvSpPr>
+        <p:spPr>
+          <a:xfrm>
+            <a:off x="5029200" y="1828800"/>
+            <a:ext cx="2103120" cy="50800"/>
+          </a:xfrm>
+          <a:prstGeom prst="rect">
+            <a:avLst/>
+          </a:prstGeom>
+          <a:solidFill>
+            <a:srgbClr val="D57028"/>
+          </a:solidFill>
+          <a:ln>
+            <a:noFill/>
+          </a:ln>
+        </p:spPr>
+        <p:style>
+          <a:lnRef idx="1">
+            <a:schemeClr val="accent1"/>
+          </a:lnRef>
+          <a:fillRef idx="3">
+            <a:schemeClr val="accent1"/>
+          </a:fillRef>
+          <a:effectRef idx="2">
+            <a:schemeClr val="accent1"/>
+          </a:effectRef>
+          <a:fontRef idx="minor">
+            <a:schemeClr val="lt1"/>
+          </a:fontRef>
+        </p:style>
+        <p:txBody>
+          <a:bodyPr rtlCol="0" anchor="ctr"/>
+          <a:lstStyle/>
+          <a:p>
+            <a:pPr algn="ctr"/>
+          </a:p>
+        </p:txBody>
+      </p:sp>
+      <p:sp>
+        <p:nvSpPr>
+          <p:cNvPr id="6" name="Rounded Rectangle 5"/>
+          <p:cNvSpPr/>
+          <p:nvPr/>
+        </p:nvSpPr>
+        <p:spPr>
+          <a:xfrm>
+            <a:off x="1371600" y="2286000"/>
+            <a:ext cx="5029200" cy="822960"/>
+          </a:xfrm>
+          <a:prstGeom prst="roundRect">
+            <a:avLst/>
+          </a:prstGeom>
+          <a:solidFill>
+            <a:srgbClr val="1B3533"/>
+          </a:solidFill>
+          <a:ln>
+            <a:noFill/>
+          </a:ln>
+        </p:spPr>
+        <p:style>
+          <a:lnRef idx="1">
+            <a:schemeClr val="accent1"/>
+          </a:lnRef>
+          <a:fillRef idx="3">
+            <a:schemeClr val="accent1"/>
+          </a:fillRef>
+          <a:effectRef idx="2">
+            <a:schemeClr val="accent1"/>
+          </a:effectRef>
+          <a:fontRef idx="minor">
+            <a:schemeClr val="lt1"/>
+          </a:fontRef>
+        </p:style>
+        <p:txBody>
+          <a:bodyPr rtlCol="0" anchor="ctr"/>
+          <a:lstStyle/>
+          <a:p>
+            <a:pPr algn="ctr"/>
+          </a:p>
+        </p:txBody>
+      </p:sp>
+      <p:sp>
+        <p:nvSpPr>
+          <p:cNvPr id="7" name="TextBox 6"/>
+          <p:cNvSpPr txBox="1"/>
+          <p:nvPr/>
+        </p:nvSpPr>
+        <p:spPr>
+          <a:xfrm>
+            <a:off x="1645920" y="2359152"/>
+            <a:ext cx="457200" cy="365760"/>
+          </a:xfrm>
+          <a:prstGeom prst="rect">
+            <a:avLst/>
+          </a:prstGeom>
+          <a:noFill/>
+        </p:spPr>
+        <p:txBody>
+          <a:bodyPr wrap="square">
+            <a:spAutoFit/>
+          </a:bodyPr>
+          <a:lstStyle/>
+          <a:p>
+            <a:pPr algn="l">
+              <a:defRPr sz="2400" b="1">
+                <a:solidFill>
+                  <a:srgbClr val="D57028"/>
+                </a:solidFill>
+                <a:latin typeface="Arial"/>
+              </a:defRPr>
+            </a:pPr>
+            <a:r>
+              <a:t>01</a:t>
+            </a:r>
+          </a:p>
+        </p:txBody>
+      </p:sp>
+      <p:sp>
+        <p:nvSpPr>
+          <p:cNvPr id="8" name="TextBox 7"/>
+          <p:cNvSpPr txBox="1"/>
+          <p:nvPr/>
+        </p:nvSpPr>
+        <p:spPr>
+          <a:xfrm>
+            <a:off x="2286000" y="2359152"/>
+            <a:ext cx="2560320" cy="320040"/>
+          </a:xfrm>
+          <a:prstGeom prst="rect">
+            <a:avLst/>
+          </a:prstGeom>
+          <a:noFill/>
+        </p:spPr>
+        <p:txBody>
+          <a:bodyPr wrap="square">
+            <a:spAutoFit/>
+          </a:bodyPr>
+          <a:lstStyle/>
+          <a:p>
+            <a:pPr algn="l">
+              <a:defRPr sz="1600" b="1">
+                <a:solidFill>
+                  <a:srgbClr val="FFFFFF"/>
+                </a:solidFill>
+                <a:latin typeface="Arial"/>
+              </a:defRPr>
+            </a:pPr>
+            <a:r>
+              <a:t>Fundraise Readiness Score</a:t>
+            </a:r>
+          </a:p>
+        </p:txBody>
+      </p:sp>
+      <p:sp>
+        <p:nvSpPr>
+          <p:cNvPr id="9" name="TextBox 8"/>
+          <p:cNvSpPr txBox="1"/>
+          <p:nvPr/>
+        </p:nvSpPr>
+        <p:spPr>
+          <a:xfrm>
+            <a:off x="2286000" y="2697480"/>
+            <a:ext cx="3840480" cy="365760"/>
+          </a:xfrm>
+          <a:prstGeom prst="rect">
+            <a:avLst/>
+          </a:prstGeom>
+          <a:noFill/>
+        </p:spPr>
+        <p:txBody>
+          <a:bodyPr wrap="square">
+            <a:spAutoFit/>
+          </a:bodyPr>
+          <a:lstStyle/>
+          <a:p>
+            <a:pPr algn="l">
+              <a:defRPr sz="1200" b="0">
+                <a:solidFill>
+                  <a:srgbClr val="F3EDE7"/>
+                </a:solidFill>
+                <a:latin typeface="Arial"/>
+              </a:defRPr>
+            </a:pPr>
+            <a:r>
+              <a:t>A self-guided assessment to evaluate preparedness</a:t>
+            </a:r>
+          </a:p>
+        </p:txBody>
+      </p:sp>
+      <p:sp>
+        <p:nvSpPr>
+          <p:cNvPr id="10" name="Rounded Rectangle 9"/>
+          <p:cNvSpPr/>
+          <p:nvPr/>
+        </p:nvSpPr>
+        <p:spPr>
+          <a:xfrm>
+            <a:off x="5790895" y="3246120"/>
+            <a:ext cx="5029200" cy="822960"/>
+          </a:xfrm>
+          <a:prstGeom prst="roundRect">
+            <a:avLst/>
+          </a:prstGeom>
+          <a:solidFill>
+            <a:srgbClr val="1B3533"/>
+          </a:solidFill>
+          <a:ln>
+            <a:noFill/>
+          </a:ln>
+        </p:spPr>
+        <p:style>
+          <a:lnRef idx="1">
+            <a:schemeClr val="accent1"/>
+          </a:lnRef>
+          <a:fillRef idx="3">
+            <a:schemeClr val="accent1"/>
+          </a:fillRef>
+          <a:effectRef idx="2">
+            <a:schemeClr val="accent1"/>
+          </a:effectRef>
+          <a:fontRef idx="minor">
+            <a:schemeClr val="lt1"/>
+          </a:fontRef>
+        </p:style>
+        <p:txBody>
+          <a:bodyPr rtlCol="0" anchor="ctr"/>
+          <a:lstStyle/>
+          <a:p>
+            <a:pPr algn="ctr"/>
+          </a:p>
+        </p:txBody>
+      </p:sp>
+      <p:sp>
+        <p:nvSpPr>
+          <p:cNvPr id="11" name="TextBox 10"/>
+          <p:cNvSpPr txBox="1"/>
+          <p:nvPr/>
+        </p:nvSpPr>
+        <p:spPr>
+          <a:xfrm>
+            <a:off x="6065215" y="3319272"/>
+            <a:ext cx="457200" cy="365760"/>
+          </a:xfrm>
+          <a:prstGeom prst="rect">
+            <a:avLst/>
+          </a:prstGeom>
+          <a:noFill/>
+        </p:spPr>
+        <p:txBody>
+          <a:bodyPr wrap="square">
+            <a:spAutoFit/>
+          </a:bodyPr>
+          <a:lstStyle/>
+          <a:p>
+            <a:pPr algn="l">
+              <a:defRPr sz="2400" b="1">
+                <a:solidFill>
+                  <a:srgbClr val="D57028"/>
+                </a:solidFill>
+                <a:latin typeface="Arial"/>
+              </a:defRPr>
+            </a:pPr>
+            <a:r>
+              <a:t>02</a:t>
+            </a:r>
+          </a:p>
+        </p:txBody>
+      </p:sp>
+      <p:sp>
+        <p:nvSpPr>
+          <p:cNvPr id="12" name="TextBox 11"/>
+          <p:cNvSpPr txBox="1"/>
+          <p:nvPr/>
+        </p:nvSpPr>
+        <p:spPr>
+          <a:xfrm>
+            <a:off x="6705295" y="3319272"/>
+            <a:ext cx="2560320" cy="320040"/>
+          </a:xfrm>
+          <a:prstGeom prst="rect">
+            <a:avLst/>
+          </a:prstGeom>
+          <a:noFill/>
+        </p:spPr>
+        <p:txBody>
+          <a:bodyPr wrap="square">
+            <a:spAutoFit/>
+          </a:bodyPr>
+          <a:lstStyle/>
+          <a:p>
+            <a:pPr algn="l">
+              <a:defRPr sz="1600" b="1">
+                <a:solidFill>
+                  <a:srgbClr val="FFFFFF"/>
+                </a:solidFill>
+                <a:latin typeface="Arial"/>
+              </a:defRPr>
+            </a:pPr>
+            <a:r>
+              <a:t>Fundraise Roadmap (1:1)</a:t>
+            </a:r>
+          </a:p>
+        </p:txBody>
+      </p:sp>
+      <p:sp>
+        <p:nvSpPr>
+          <p:cNvPr id="13" name="TextBox 12"/>
+          <p:cNvSpPr txBox="1"/>
+          <p:nvPr/>
+        </p:nvSpPr>
+        <p:spPr>
+          <a:xfrm>
+            <a:off x="6705295" y="3657600"/>
+            <a:ext cx="3840480" cy="365760"/>
+          </a:xfrm>
+          <a:prstGeom prst="rect">
+            <a:avLst/>
+          </a:prstGeom>
+          <a:noFill/>
+        </p:spPr>
+        <p:txBody>
+          <a:bodyPr wrap="square">
+            <a:spAutoFit/>
+          </a:bodyPr>
+          <a:lstStyle/>
+          <a:p>
+            <a:pPr algn="l">
+              <a:defRPr sz="1200" b="0">
+                <a:solidFill>
+                  <a:srgbClr val="F3EDE7"/>
+                </a:solidFill>
+                <a:latin typeface="Arial"/>
+              </a:defRPr>
+            </a:pPr>
+            <a:r>
+              <a:t>Customized plans based on stage, goals, and gaps</a:t>
+            </a:r>
+          </a:p>
+        </p:txBody>
+      </p:sp>
+      <p:sp>
+        <p:nvSpPr>
+          <p:cNvPr id="14" name="Rounded Rectangle 13"/>
+          <p:cNvSpPr/>
+          <p:nvPr/>
+        </p:nvSpPr>
+        <p:spPr>
+          <a:xfrm>
+            <a:off x="1371600" y="4206240"/>
+            <a:ext cx="5029200" cy="822960"/>
+          </a:xfrm>
+          <a:prstGeom prst="roundRect">
+            <a:avLst/>
+          </a:prstGeom>
+          <a:solidFill>
+            <a:srgbClr val="1B3533"/>
+          </a:solidFill>
+          <a:ln>
+            <a:noFill/>
+          </a:ln>
+        </p:spPr>
+        <p:style>
+          <a:lnRef idx="1">
+            <a:schemeClr val="accent1"/>
+          </a:lnRef>
+          <a:fillRef idx="3">
+            <a:schemeClr val="accent1"/>
+          </a:fillRef>
+          <a:effectRef idx="2">
+            <a:schemeClr val="accent1"/>
+          </a:effectRef>
+          <a:fontRef idx="minor">
+            <a:schemeClr val="lt1"/>
+          </a:fontRef>
+        </p:style>
+        <p:txBody>
+          <a:bodyPr rtlCol="0" anchor="ctr"/>
+          <a:lstStyle/>
+          <a:p>
+            <a:pPr algn="ctr"/>
+          </a:p>
+        </p:txBody>
+      </p:sp>
+      <p:sp>
+        <p:nvSpPr>
+          <p:cNvPr id="15" name="TextBox 14"/>
+          <p:cNvSpPr txBox="1"/>
+          <p:nvPr/>
+        </p:nvSpPr>
+        <p:spPr>
+          <a:xfrm>
+            <a:off x="1645920" y="4279392"/>
+            <a:ext cx="457200" cy="365760"/>
+          </a:xfrm>
+          <a:prstGeom prst="rect">
+            <a:avLst/>
+          </a:prstGeom>
+          <a:noFill/>
+        </p:spPr>
+        <p:txBody>
+          <a:bodyPr wrap="square">
+            <a:spAutoFit/>
+          </a:bodyPr>
+          <a:lstStyle/>
+          <a:p>
+            <a:pPr algn="l">
+              <a:defRPr sz="2400" b="1">
+                <a:solidFill>
+                  <a:srgbClr val="D57028"/>
+                </a:solidFill>
+                <a:latin typeface="Arial"/>
+              </a:defRPr>
+            </a:pPr>
+            <a:r>
+              <a:t>03</a:t>
+            </a:r>
+          </a:p>
+        </p:txBody>
+      </p:sp>
+      <p:sp>
+        <p:nvSpPr>
+          <p:cNvPr id="16" name="TextBox 15"/>
+          <p:cNvSpPr txBox="1"/>
+          <p:nvPr/>
+        </p:nvSpPr>
+        <p:spPr>
+          <a:xfrm>
+            <a:off x="2286000" y="4279392"/>
+            <a:ext cx="2560320" cy="320040"/>
+          </a:xfrm>
+          <a:prstGeom prst="rect">
+            <a:avLst/>
+          </a:prstGeom>
+          <a:noFill/>
+        </p:spPr>
+        <p:txBody>
+          <a:bodyPr wrap="square">
+            <a:spAutoFit/>
+          </a:bodyPr>
+          <a:lstStyle/>
+          <a:p>
+            <a:pPr algn="l">
+              <a:defRPr sz="1600" b="1">
+                <a:solidFill>
+                  <a:srgbClr val="FFFFFF"/>
+                </a:solidFill>
+                <a:latin typeface="Arial"/>
+              </a:defRPr>
+            </a:pPr>
+            <a:r>
+              <a:t>Membership Platform</a:t>
+            </a:r>
+          </a:p>
+        </p:txBody>
+      </p:sp>
+      <p:sp>
+        <p:nvSpPr>
+          <p:cNvPr id="17" name="TextBox 16"/>
+          <p:cNvSpPr txBox="1"/>
+          <p:nvPr/>
+        </p:nvSpPr>
+        <p:spPr>
+          <a:xfrm>
+            <a:off x="2286000" y="4617720"/>
+            <a:ext cx="3840480" cy="365760"/>
+          </a:xfrm>
+          <a:prstGeom prst="rect">
+            <a:avLst/>
+          </a:prstGeom>
+          <a:noFill/>
+        </p:spPr>
+        <p:txBody>
+          <a:bodyPr wrap="square">
+            <a:spAutoFit/>
+          </a:bodyPr>
+          <a:lstStyle/>
+          <a:p>
+            <a:pPr algn="l">
+              <a:defRPr sz="1200" b="0">
+                <a:solidFill>
+                  <a:srgbClr val="F3EDE7"/>
+                </a:solidFill>
+                <a:latin typeface="Arial"/>
+              </a:defRPr>
+            </a:pPr>
+            <a:r>
+              <a:t>Education, tools, and community access</a:t>
+            </a:r>
+          </a:p>
+        </p:txBody>
+      </p:sp>
+      <p:sp>
+        <p:nvSpPr>
+          <p:cNvPr id="18" name="Rounded Rectangle 17"/>
+          <p:cNvSpPr/>
+          <p:nvPr/>
+        </p:nvSpPr>
+        <p:spPr>
+          <a:xfrm>
+            <a:off x="5790895" y="5166360"/>
+            <a:ext cx="5029200" cy="822960"/>
+          </a:xfrm>
+          <a:prstGeom prst="roundRect">
+            <a:avLst/>
+          </a:prstGeom>
+          <a:solidFill>
+            <a:srgbClr val="1B3533"/>
+          </a:solidFill>
+          <a:ln>
+            <a:noFill/>
+          </a:ln>
+        </p:spPr>
+        <p:style>
+          <a:lnRef idx="1">
+            <a:schemeClr val="accent1"/>
+          </a:lnRef>
+          <a:fillRef idx="3">
+            <a:schemeClr val="accent1"/>
+          </a:fillRef>
+          <a:effectRef idx="2">
+            <a:schemeClr val="accent1"/>
+          </a:effectRef>
+          <a:fontRef idx="minor">
+            <a:schemeClr val="lt1"/>
+          </a:fontRef>
+        </p:style>
+        <p:txBody>
+          <a:bodyPr rtlCol="0" anchor="ctr"/>
+          <a:lstStyle/>
+          <a:p>
+            <a:pPr algn="ctr"/>
+          </a:p>
+        </p:txBody>
+      </p:sp>
+      <p:sp>
+        <p:nvSpPr>
+          <p:cNvPr id="19" name="TextBox 18"/>
+          <p:cNvSpPr txBox="1"/>
+          <p:nvPr/>
+        </p:nvSpPr>
+        <p:spPr>
+          <a:xfrm>
+            <a:off x="6065215" y="5239512"/>
+            <a:ext cx="457200" cy="365760"/>
+          </a:xfrm>
+          <a:prstGeom prst="rect">
+            <a:avLst/>
+          </a:prstGeom>
+          <a:noFill/>
+        </p:spPr>
+        <p:txBody>
+          <a:bodyPr wrap="square">
+            <a:spAutoFit/>
+          </a:bodyPr>
+          <a:lstStyle/>
+          <a:p>
+            <a:pPr algn="l">
+              <a:defRPr sz="2400" b="1">
+                <a:solidFill>
+                  <a:srgbClr val="D57028"/>
+                </a:solidFill>
+                <a:latin typeface="Arial"/>
+              </a:defRPr>
+            </a:pPr>
+            <a:r>
+              <a:t>04</a:t>
+            </a:r>
+          </a:p>
+        </p:txBody>
+      </p:sp>
+      <p:sp>
+        <p:nvSpPr>
+          <p:cNvPr id="20" name="TextBox 19"/>
+          <p:cNvSpPr txBox="1"/>
+          <p:nvPr/>
+        </p:nvSpPr>
+        <p:spPr>
+          <a:xfrm>
+            <a:off x="6705295" y="5239512"/>
+            <a:ext cx="2560320" cy="320040"/>
+          </a:xfrm>
+          <a:prstGeom prst="rect">
+            <a:avLst/>
+          </a:prstGeom>
+          <a:noFill/>
+        </p:spPr>
+        <p:txBody>
+          <a:bodyPr wrap="square">
+            <a:spAutoFit/>
+          </a:bodyPr>
+          <a:lstStyle/>
+          <a:p>
+            <a:pPr algn="l">
+              <a:defRPr sz="1600" b="1">
+                <a:solidFill>
+                  <a:srgbClr val="FFFFFF"/>
+                </a:solidFill>
+                <a:latin typeface="Arial"/>
+              </a:defRPr>
+            </a:pPr>
+            <a:r>
+              <a:t>Events &amp; Third Spaces</a:t>
+            </a:r>
+          </a:p>
+        </p:txBody>
+      </p:sp>
+      <p:sp>
+        <p:nvSpPr>
+          <p:cNvPr id="21" name="TextBox 20"/>
+          <p:cNvSpPr txBox="1"/>
+          <p:nvPr/>
+        </p:nvSpPr>
+        <p:spPr>
+          <a:xfrm>
+            <a:off x="6705295" y="5577840"/>
+            <a:ext cx="3840480" cy="365760"/>
+          </a:xfrm>
+          <a:prstGeom prst="rect">
+            <a:avLst/>
+          </a:prstGeom>
+          <a:noFill/>
+        </p:spPr>
+        <p:txBody>
+          <a:bodyPr wrap="square">
+            <a:spAutoFit/>
+          </a:bodyPr>
+          <a:lstStyle/>
+          <a:p>
+            <a:pPr algn="l">
+              <a:defRPr sz="1200" b="0">
+                <a:solidFill>
+                  <a:srgbClr val="F3EDE7"/>
+                </a:solidFill>
+                <a:latin typeface="Arial"/>
+              </a:defRPr>
+            </a:pPr>
+            <a:r>
+              <a:t>Structured learning + relationship-building</a:t>
+            </a:r>
+          </a:p>
+        </p:txBody>
+      </p:sp>
+      <p:sp>
+        <p:nvSpPr>
+          <p:cNvPr id="22" name="Rounded Rectangle 21"/>
+          <p:cNvSpPr/>
+          <p:nvPr/>
+        </p:nvSpPr>
+        <p:spPr>
+          <a:xfrm>
+            <a:off x="1371600" y="6126480"/>
+            <a:ext cx="5029200" cy="822960"/>
+          </a:xfrm>
+          <a:prstGeom prst="roundRect">
+            <a:avLst/>
+          </a:prstGeom>
+          <a:solidFill>
+            <a:srgbClr val="1B3533"/>
+          </a:solidFill>
+          <a:ln>
+            <a:noFill/>
+          </a:ln>
+        </p:spPr>
+        <p:style>
+          <a:lnRef idx="1">
+            <a:schemeClr val="accent1"/>
+          </a:lnRef>
+          <a:fillRef idx="3">
+            <a:schemeClr val="accent1"/>
+          </a:fillRef>
+          <a:effectRef idx="2">
+            <a:schemeClr val="accent1"/>
+          </a:effectRef>
+          <a:fontRef idx="minor">
+            <a:schemeClr val="lt1"/>
+          </a:fontRef>
+        </p:style>
+        <p:txBody>
+          <a:bodyPr rtlCol="0" anchor="ctr"/>
+          <a:lstStyle/>
+          <a:p>
+            <a:pPr algn="ctr"/>
+          </a:p>
+        </p:txBody>
+      </p:sp>
+      <p:sp>
+        <p:nvSpPr>
+          <p:cNvPr id="23" name="TextBox 22"/>
+          <p:cNvSpPr txBox="1"/>
+          <p:nvPr/>
+        </p:nvSpPr>
+        <p:spPr>
+          <a:xfrm>
+            <a:off x="1645920" y="6199632"/>
+            <a:ext cx="457200" cy="365760"/>
+          </a:xfrm>
+          <a:prstGeom prst="rect">
+            <a:avLst/>
+          </a:prstGeom>
+          <a:noFill/>
+        </p:spPr>
+        <p:txBody>
+          <a:bodyPr wrap="square">
+            <a:spAutoFit/>
+          </a:bodyPr>
+          <a:lstStyle/>
+          <a:p>
+            <a:pPr algn="l">
+              <a:defRPr sz="2400" b="1">
+                <a:solidFill>
+                  <a:srgbClr val="D57028"/>
+                </a:solidFill>
+                <a:latin typeface="Arial"/>
+              </a:defRPr>
+            </a:pPr>
+            <a:r>
+              <a:t>05</a:t>
+            </a:r>
+          </a:p>
+        </p:txBody>
+      </p:sp>
+      <p:sp>
+        <p:nvSpPr>
+          <p:cNvPr id="24" name="TextBox 23"/>
+          <p:cNvSpPr txBox="1"/>
+          <p:nvPr/>
+        </p:nvSpPr>
+        <p:spPr>
+          <a:xfrm>
+            <a:off x="2286000" y="6199632"/>
+            <a:ext cx="2560320" cy="320040"/>
+          </a:xfrm>
+          <a:prstGeom prst="rect">
+            <a:avLst/>
+          </a:prstGeom>
+          <a:noFill/>
+        </p:spPr>
+        <p:txBody>
+          <a:bodyPr wrap="square">
+            <a:spAutoFit/>
+          </a:bodyPr>
+          <a:lstStyle/>
+          <a:p>
+            <a:pPr algn="l">
+              <a:defRPr sz="1600" b="1">
+                <a:solidFill>
+                  <a:srgbClr val="FFFFFF"/>
+                </a:solidFill>
+                <a:latin typeface="Arial"/>
+              </a:defRPr>
+            </a:pPr>
+            <a:r>
+              <a:t>Grant Programs</a:t>
+            </a:r>
+          </a:p>
+        </p:txBody>
+      </p:sp>
+      <p:sp>
+        <p:nvSpPr>
+          <p:cNvPr id="25" name="TextBox 24"/>
+          <p:cNvSpPr txBox="1"/>
+          <p:nvPr/>
+        </p:nvSpPr>
+        <p:spPr>
+          <a:xfrm>
+            <a:off x="2286000" y="6537960"/>
+            <a:ext cx="3840480" cy="365760"/>
+          </a:xfrm>
+          <a:prstGeom prst="rect">
+            <a:avLst/>
+          </a:prstGeom>
+          <a:noFill/>
+        </p:spPr>
+        <p:txBody>
+          <a:bodyPr wrap="square">
+            <a:spAutoFit/>
+          </a:bodyPr>
+          <a:lstStyle/>
+          <a:p>
+            <a:pPr algn="l">
+              <a:defRPr sz="1200" b="0">
+                <a:solidFill>
+                  <a:srgbClr val="F3EDE7"/>
+                </a:solidFill>
+                <a:latin typeface="Arial"/>
+              </a:defRPr>
+            </a:pPr>
+            <a:r>
+              <a:t>Flexible, non-dilutive capital to support readiness</a:t>
+            </a:r>
+          </a:p>
+        </p:txBody>
+      </p:sp>
+    </p:spTree>
+  </p:cSld>
+  <p:clrMapOvr>
+    <a:masterClrMapping/>
+  </p:clrMapOvr>
+</p:sld>
+</file>
+
+<file path=ppt/slides/slide11.xml><?xml version="1.0" encoding="utf-8"?>
 <p:sld xmlns:a="http://schemas.openxmlformats.org/drawingml/2006/main" xmlns:p="http://schemas.openxmlformats.org/presentationml/2006/main" xmlns:r="http://schemas.openxmlformats.org/officeDocument/2006/relationships">
   <p:cSld>
     <p:bg>
@@ -3838,7 +4747,7 @@
               </a:defRPr>
             </a:pPr>
             <a:r>
-              <a:t>Key Learnings</a:t>
+              <a:t>What 2025 Taught Us</a:t>
             </a:r>
           </a:p>
         </p:txBody>
@@ -3888,14 +4797,50 @@
       </p:sp>
       <p:sp>
         <p:nvSpPr>
-          <p:cNvPr id="6" name="Rounded Rectangle 5"/>
+          <p:cNvPr id="6" name="TextBox 5"/>
+          <p:cNvSpPr txBox="1"/>
+          <p:nvPr/>
+        </p:nvSpPr>
+        <p:spPr>
+          <a:xfrm>
+            <a:off x="731520" y="2286000"/>
+            <a:ext cx="5029200" cy="365760"/>
+          </a:xfrm>
+          <a:prstGeom prst="rect">
+            <a:avLst/>
+          </a:prstGeom>
+          <a:noFill/>
+        </p:spPr>
+        <p:txBody>
+          <a:bodyPr wrap="square">
+            <a:spAutoFit/>
+          </a:bodyPr>
+          <a:lstStyle/>
+          <a:p>
+            <a:pPr algn="l">
+              <a:defRPr sz="1800" b="1">
+                <a:solidFill>
+                  <a:srgbClr val="D57028"/>
+                </a:solidFill>
+                <a:latin typeface="Arial"/>
+              </a:defRPr>
+            </a:pPr>
+            <a:r>
+              <a:t>What We Learned:</a:t>
+            </a:r>
+          </a:p>
+        </p:txBody>
+      </p:sp>
+      <p:sp>
+        <p:nvSpPr>
+          <p:cNvPr id="7" name="Rounded Rectangle 6"/>
           <p:cNvSpPr/>
           <p:nvPr/>
         </p:nvSpPr>
         <p:spPr>
           <a:xfrm>
-            <a:off x="1523847" y="2286000"/>
-            <a:ext cx="9144000" cy="685800"/>
+            <a:off x="731520" y="2834640"/>
+            <a:ext cx="5029200" cy="502920"/>
           </a:xfrm>
           <a:prstGeom prst="roundRect">
             <a:avLst/>
@@ -3931,14 +4876,14 @@
       </p:sp>
       <p:sp>
         <p:nvSpPr>
-          <p:cNvPr id="7" name="TextBox 6"/>
+          <p:cNvPr id="8" name="TextBox 7"/>
           <p:cNvSpPr txBox="1"/>
           <p:nvPr/>
         </p:nvSpPr>
         <p:spPr>
           <a:xfrm>
-            <a:off x="1798167" y="2377440"/>
-            <a:ext cx="457200" cy="502920"/>
+            <a:off x="1005840" y="2907792"/>
+            <a:ext cx="365760" cy="365760"/>
           </a:xfrm>
           <a:prstGeom prst="rect">
             <a:avLst/>
@@ -3952,7 +4897,7 @@
           <a:lstStyle/>
           <a:p>
             <a:pPr algn="l">
-              <a:defRPr sz="2000" b="1">
+              <a:defRPr sz="1800" b="1">
                 <a:solidFill>
                   <a:srgbClr val="D57028"/>
                 </a:solidFill>
@@ -3967,14 +4912,14 @@
       </p:sp>
       <p:sp>
         <p:nvSpPr>
-          <p:cNvPr id="8" name="TextBox 7"/>
+          <p:cNvPr id="9" name="TextBox 8"/>
           <p:cNvSpPr txBox="1"/>
           <p:nvPr/>
         </p:nvSpPr>
         <p:spPr>
           <a:xfrm>
-            <a:off x="2346807" y="2395728"/>
-            <a:ext cx="8046720" cy="502920"/>
+            <a:off x="1463040" y="2926080"/>
+            <a:ext cx="4114800" cy="365760"/>
           </a:xfrm>
           <a:prstGeom prst="rect">
             <a:avLst/>
@@ -3988,7 +4933,7 @@
           <a:lstStyle/>
           <a:p>
             <a:pPr algn="l">
-              <a:defRPr sz="1400" b="0">
+              <a:defRPr sz="1300" b="0">
                 <a:solidFill>
                   <a:srgbClr val="F3EDE7"/>
                 </a:solidFill>
@@ -3996,21 +4941,21 @@
               </a:defRPr>
             </a:pPr>
             <a:r>
-              <a:t>Community is currency — authentic relationships drive better outcomes than transactional networking.</a:t>
-            </a:r>
-          </a:p>
-        </p:txBody>
-      </p:sp>
-      <p:sp>
-        <p:nvSpPr>
-          <p:cNvPr id="9" name="Rounded Rectangle 8"/>
+              <a:t>Readiness beats access</a:t>
+            </a:r>
+          </a:p>
+        </p:txBody>
+      </p:sp>
+      <p:sp>
+        <p:nvSpPr>
+          <p:cNvPr id="10" name="Rounded Rectangle 9"/>
           <p:cNvSpPr/>
           <p:nvPr/>
         </p:nvSpPr>
         <p:spPr>
           <a:xfrm>
-            <a:off x="1523847" y="3108960"/>
-            <a:ext cx="9144000" cy="685800"/>
+            <a:off x="731520" y="3429000"/>
+            <a:ext cx="5029200" cy="502920"/>
           </a:xfrm>
           <a:prstGeom prst="roundRect">
             <a:avLst/>
@@ -4046,14 +4991,14 @@
       </p:sp>
       <p:sp>
         <p:nvSpPr>
-          <p:cNvPr id="10" name="TextBox 9"/>
+          <p:cNvPr id="11" name="TextBox 10"/>
           <p:cNvSpPr txBox="1"/>
           <p:nvPr/>
         </p:nvSpPr>
         <p:spPr>
           <a:xfrm>
-            <a:off x="1798167" y="3200400"/>
-            <a:ext cx="457200" cy="502920"/>
+            <a:off x="1005840" y="3502152"/>
+            <a:ext cx="365760" cy="365760"/>
           </a:xfrm>
           <a:prstGeom prst="rect">
             <a:avLst/>
@@ -4067,7 +5012,7 @@
           <a:lstStyle/>
           <a:p>
             <a:pPr algn="l">
-              <a:defRPr sz="2000" b="1">
+              <a:defRPr sz="1800" b="1">
                 <a:solidFill>
                   <a:srgbClr val="D57028"/>
                 </a:solidFill>
@@ -4082,14 +5027,14 @@
       </p:sp>
       <p:sp>
         <p:nvSpPr>
-          <p:cNvPr id="11" name="TextBox 10"/>
+          <p:cNvPr id="12" name="TextBox 11"/>
           <p:cNvSpPr txBox="1"/>
           <p:nvPr/>
         </p:nvSpPr>
         <p:spPr>
           <a:xfrm>
-            <a:off x="2346807" y="3218688"/>
-            <a:ext cx="8046720" cy="502920"/>
+            <a:off x="1463040" y="3520440"/>
+            <a:ext cx="4114800" cy="365760"/>
           </a:xfrm>
           <a:prstGeom prst="rect">
             <a:avLst/>
@@ -4103,7 +5048,7 @@
           <a:lstStyle/>
           <a:p>
             <a:pPr algn="l">
-              <a:defRPr sz="1400" b="0">
+              <a:defRPr sz="1300" b="0">
                 <a:solidFill>
                   <a:srgbClr val="F3EDE7"/>
                 </a:solidFill>
@@ -4111,21 +5056,21 @@
               </a:defRPr>
             </a:pPr>
             <a:r>
-              <a:t>Education-first approach works — founders who complete our programs raise capital faster and more effectively.</a:t>
-            </a:r>
-          </a:p>
-        </p:txBody>
-      </p:sp>
-      <p:sp>
-        <p:nvSpPr>
-          <p:cNvPr id="12" name="Rounded Rectangle 11"/>
+              <a:t>Events without follow-through create noise</a:t>
+            </a:r>
+          </a:p>
+        </p:txBody>
+      </p:sp>
+      <p:sp>
+        <p:nvSpPr>
+          <p:cNvPr id="13" name="Rounded Rectangle 12"/>
           <p:cNvSpPr/>
           <p:nvPr/>
         </p:nvSpPr>
         <p:spPr>
           <a:xfrm>
-            <a:off x="1523847" y="3931920"/>
-            <a:ext cx="9144000" cy="685800"/>
+            <a:off x="731520" y="4023360"/>
+            <a:ext cx="5029200" cy="502920"/>
           </a:xfrm>
           <a:prstGeom prst="roundRect">
             <a:avLst/>
@@ -4161,14 +5106,14 @@
       </p:sp>
       <p:sp>
         <p:nvSpPr>
-          <p:cNvPr id="13" name="TextBox 12"/>
+          <p:cNvPr id="14" name="TextBox 13"/>
           <p:cNvSpPr txBox="1"/>
           <p:nvPr/>
         </p:nvSpPr>
         <p:spPr>
           <a:xfrm>
-            <a:off x="1798167" y="4023360"/>
-            <a:ext cx="457200" cy="502920"/>
+            <a:off x="1005840" y="4096512"/>
+            <a:ext cx="365760" cy="365760"/>
           </a:xfrm>
           <a:prstGeom prst="rect">
             <a:avLst/>
@@ -4182,7 +5127,7 @@
           <a:lstStyle/>
           <a:p>
             <a:pPr algn="l">
-              <a:defRPr sz="2000" b="1">
+              <a:defRPr sz="1800" b="1">
                 <a:solidFill>
                   <a:srgbClr val="D57028"/>
                 </a:solidFill>
@@ -4197,14 +5142,14 @@
       </p:sp>
       <p:sp>
         <p:nvSpPr>
-          <p:cNvPr id="14" name="TextBox 13"/>
+          <p:cNvPr id="15" name="TextBox 14"/>
           <p:cNvSpPr txBox="1"/>
           <p:nvPr/>
         </p:nvSpPr>
         <p:spPr>
           <a:xfrm>
-            <a:off x="2346807" y="4041648"/>
-            <a:ext cx="8046720" cy="502920"/>
+            <a:off x="1463040" y="4114800"/>
+            <a:ext cx="4114800" cy="365760"/>
           </a:xfrm>
           <a:prstGeom prst="rect">
             <a:avLst/>
@@ -4218,7 +5163,7 @@
           <a:lstStyle/>
           <a:p>
             <a:pPr algn="l">
-              <a:defRPr sz="1400" b="0">
+              <a:defRPr sz="1300" b="0">
                 <a:solidFill>
                   <a:srgbClr val="F3EDE7"/>
                 </a:solidFill>
@@ -4226,21 +5171,21 @@
               </a:defRPr>
             </a:pPr>
             <a:r>
-              <a:t>Non-dilutive capital matters — combining grants with education creates outsized impact (167X return).</a:t>
-            </a:r>
-          </a:p>
-        </p:txBody>
-      </p:sp>
-      <p:sp>
-        <p:nvSpPr>
-          <p:cNvPr id="15" name="Rounded Rectangle 14"/>
+              <a:t>Founders value clarity over volume</a:t>
+            </a:r>
+          </a:p>
+        </p:txBody>
+      </p:sp>
+      <p:sp>
+        <p:nvSpPr>
+          <p:cNvPr id="16" name="Rounded Rectangle 15"/>
           <p:cNvSpPr/>
           <p:nvPr/>
         </p:nvSpPr>
         <p:spPr>
           <a:xfrm>
-            <a:off x="1523847" y="4754880"/>
-            <a:ext cx="9144000" cy="685800"/>
+            <a:off x="731520" y="4617720"/>
+            <a:ext cx="5029200" cy="502920"/>
           </a:xfrm>
           <a:prstGeom prst="roundRect">
             <a:avLst/>
@@ -4276,14 +5221,14 @@
       </p:sp>
       <p:sp>
         <p:nvSpPr>
-          <p:cNvPr id="16" name="TextBox 15"/>
+          <p:cNvPr id="17" name="TextBox 16"/>
           <p:cNvSpPr txBox="1"/>
           <p:nvPr/>
         </p:nvSpPr>
         <p:spPr>
           <a:xfrm>
-            <a:off x="1798167" y="4846320"/>
-            <a:ext cx="457200" cy="502920"/>
+            <a:off x="1005840" y="4690872"/>
+            <a:ext cx="365760" cy="365760"/>
           </a:xfrm>
           <a:prstGeom prst="rect">
             <a:avLst/>
@@ -4297,7 +5242,7 @@
           <a:lstStyle/>
           <a:p>
             <a:pPr algn="l">
-              <a:defRPr sz="2000" b="1">
+              <a:defRPr sz="1800" b="1">
                 <a:solidFill>
                   <a:srgbClr val="D57028"/>
                 </a:solidFill>
@@ -4312,14 +5257,14 @@
       </p:sp>
       <p:sp>
         <p:nvSpPr>
-          <p:cNvPr id="17" name="TextBox 16"/>
+          <p:cNvPr id="18" name="TextBox 17"/>
           <p:cNvSpPr txBox="1"/>
           <p:nvPr/>
         </p:nvSpPr>
         <p:spPr>
           <a:xfrm>
-            <a:off x="2346807" y="4864608"/>
-            <a:ext cx="8046720" cy="502920"/>
+            <a:off x="1463040" y="4709160"/>
+            <a:ext cx="4114800" cy="365760"/>
           </a:xfrm>
           <a:prstGeom prst="rect">
             <a:avLst/>
@@ -4333,7 +5278,7 @@
           <a:lstStyle/>
           <a:p>
             <a:pPr algn="l">
-              <a:defRPr sz="1400" b="0">
+              <a:defRPr sz="1300" b="0">
                 <a:solidFill>
                   <a:srgbClr val="F3EDE7"/>
                 </a:solidFill>
@@ -4341,21 +5286,21 @@
               </a:defRPr>
             </a:pPr>
             <a:r>
-              <a:t>Access is the biggest barrier — when we remove structural barriers, underrepresented founders thrive.</a:t>
-            </a:r>
-          </a:p>
-        </p:txBody>
-      </p:sp>
-      <p:sp>
-        <p:nvSpPr>
-          <p:cNvPr id="18" name="Rounded Rectangle 17"/>
+              <a:t>Pay-to-play limits discovery of strong builders</a:t>
+            </a:r>
+          </a:p>
+        </p:txBody>
+      </p:sp>
+      <p:sp>
+        <p:nvSpPr>
+          <p:cNvPr id="19" name="Rounded Rectangle 18"/>
           <p:cNvSpPr/>
           <p:nvPr/>
         </p:nvSpPr>
         <p:spPr>
           <a:xfrm>
-            <a:off x="1523847" y="5577840"/>
-            <a:ext cx="9144000" cy="685800"/>
+            <a:off x="731520" y="5212080"/>
+            <a:ext cx="5029200" cy="502920"/>
           </a:xfrm>
           <a:prstGeom prst="roundRect">
             <a:avLst/>
@@ -4391,14 +5336,14 @@
       </p:sp>
       <p:sp>
         <p:nvSpPr>
-          <p:cNvPr id="19" name="TextBox 18"/>
+          <p:cNvPr id="20" name="TextBox 19"/>
           <p:cNvSpPr txBox="1"/>
           <p:nvPr/>
         </p:nvSpPr>
         <p:spPr>
           <a:xfrm>
-            <a:off x="1798167" y="5669280"/>
-            <a:ext cx="457200" cy="502920"/>
+            <a:off x="1005840" y="5285232"/>
+            <a:ext cx="365760" cy="365760"/>
           </a:xfrm>
           <a:prstGeom prst="rect">
             <a:avLst/>
@@ -4412,7 +5357,7 @@
           <a:lstStyle/>
           <a:p>
             <a:pPr algn="l">
-              <a:defRPr sz="2000" b="1">
+              <a:defRPr sz="1800" b="1">
                 <a:solidFill>
                   <a:srgbClr val="D57028"/>
                 </a:solidFill>
@@ -4427,14 +5372,14 @@
       </p:sp>
       <p:sp>
         <p:nvSpPr>
-          <p:cNvPr id="20" name="TextBox 19"/>
+          <p:cNvPr id="21" name="TextBox 20"/>
           <p:cNvSpPr txBox="1"/>
           <p:nvPr/>
         </p:nvSpPr>
         <p:spPr>
           <a:xfrm>
-            <a:off x="2346807" y="5687568"/>
-            <a:ext cx="8046720" cy="502920"/>
+            <a:off x="1463040" y="5303520"/>
+            <a:ext cx="4114800" cy="365760"/>
           </a:xfrm>
           <a:prstGeom prst="rect">
             <a:avLst/>
@@ -4448,7 +5393,7 @@
           <a:lstStyle/>
           <a:p>
             <a:pPr algn="l">
-              <a:defRPr sz="1400" b="0">
+              <a:defRPr sz="1300" b="0">
                 <a:solidFill>
                   <a:srgbClr val="F3EDE7"/>
                 </a:solidFill>
@@ -4456,7 +5401,280 @@
               </a:defRPr>
             </a:pPr>
             <a:r>
-              <a:t>Both sides need support — funders need education just as much as founders need capital.</a:t>
+              <a:t>Small capital, deployed intentionally, creates outsized outcomes</a:t>
+            </a:r>
+          </a:p>
+        </p:txBody>
+      </p:sp>
+      <p:sp>
+        <p:nvSpPr>
+          <p:cNvPr id="22" name="TextBox 21"/>
+          <p:cNvSpPr txBox="1"/>
+          <p:nvPr/>
+        </p:nvSpPr>
+        <p:spPr>
+          <a:xfrm>
+            <a:off x="6400800" y="2286000"/>
+            <a:ext cx="5029200" cy="365760"/>
+          </a:xfrm>
+          <a:prstGeom prst="rect">
+            <a:avLst/>
+          </a:prstGeom>
+          <a:noFill/>
+        </p:spPr>
+        <p:txBody>
+          <a:bodyPr wrap="square">
+            <a:spAutoFit/>
+          </a:bodyPr>
+          <a:lstStyle/>
+          <a:p>
+            <a:pPr algn="l">
+              <a:defRPr sz="1800" b="1">
+                <a:solidFill>
+                  <a:srgbClr val="D57028"/>
+                </a:solidFill>
+                <a:latin typeface="Arial"/>
+              </a:defRPr>
+            </a:pPr>
+            <a:r>
+              <a:t>Our Response:</a:t>
+            </a:r>
+          </a:p>
+        </p:txBody>
+      </p:sp>
+      <p:sp>
+        <p:nvSpPr>
+          <p:cNvPr id="23" name="Rounded Rectangle 22"/>
+          <p:cNvSpPr/>
+          <p:nvPr/>
+        </p:nvSpPr>
+        <p:spPr>
+          <a:xfrm>
+            <a:off x="6400800" y="2834640"/>
+            <a:ext cx="5029200" cy="502920"/>
+          </a:xfrm>
+          <a:prstGeom prst="roundRect">
+            <a:avLst/>
+          </a:prstGeom>
+          <a:solidFill>
+            <a:srgbClr val="244A47"/>
+          </a:solidFill>
+          <a:ln>
+            <a:noFill/>
+          </a:ln>
+        </p:spPr>
+        <p:style>
+          <a:lnRef idx="1">
+            <a:schemeClr val="accent1"/>
+          </a:lnRef>
+          <a:fillRef idx="3">
+            <a:schemeClr val="accent1"/>
+          </a:fillRef>
+          <a:effectRef idx="2">
+            <a:schemeClr val="accent1"/>
+          </a:effectRef>
+          <a:fontRef idx="minor">
+            <a:schemeClr val="lt1"/>
+          </a:fontRef>
+        </p:style>
+        <p:txBody>
+          <a:bodyPr rtlCol="0" anchor="ctr"/>
+          <a:lstStyle/>
+          <a:p>
+            <a:pPr algn="ctr"/>
+          </a:p>
+        </p:txBody>
+      </p:sp>
+      <p:sp>
+        <p:nvSpPr>
+          <p:cNvPr id="24" name="TextBox 23"/>
+          <p:cNvSpPr txBox="1"/>
+          <p:nvPr/>
+        </p:nvSpPr>
+        <p:spPr>
+          <a:xfrm>
+            <a:off x="6675120" y="2926080"/>
+            <a:ext cx="4480560" cy="365760"/>
+          </a:xfrm>
+          <a:prstGeom prst="rect">
+            <a:avLst/>
+          </a:prstGeom>
+          <a:noFill/>
+        </p:spPr>
+        <p:txBody>
+          <a:bodyPr wrap="square">
+            <a:spAutoFit/>
+          </a:bodyPr>
+          <a:lstStyle/>
+          <a:p>
+            <a:pPr algn="l">
+              <a:defRPr sz="1300" b="0">
+                <a:solidFill>
+                  <a:srgbClr val="F3EDE7"/>
+                </a:solidFill>
+                <a:latin typeface="Arial"/>
+              </a:defRPr>
+            </a:pPr>
+            <a:r>
+              <a:t>→ Fewer, clearer programs</a:t>
+            </a:r>
+          </a:p>
+        </p:txBody>
+      </p:sp>
+      <p:sp>
+        <p:nvSpPr>
+          <p:cNvPr id="25" name="Rounded Rectangle 24"/>
+          <p:cNvSpPr/>
+          <p:nvPr/>
+        </p:nvSpPr>
+        <p:spPr>
+          <a:xfrm>
+            <a:off x="6400800" y="3429000"/>
+            <a:ext cx="5029200" cy="502920"/>
+          </a:xfrm>
+          <a:prstGeom prst="roundRect">
+            <a:avLst/>
+          </a:prstGeom>
+          <a:solidFill>
+            <a:srgbClr val="244A47"/>
+          </a:solidFill>
+          <a:ln>
+            <a:noFill/>
+          </a:ln>
+        </p:spPr>
+        <p:style>
+          <a:lnRef idx="1">
+            <a:schemeClr val="accent1"/>
+          </a:lnRef>
+          <a:fillRef idx="3">
+            <a:schemeClr val="accent1"/>
+          </a:fillRef>
+          <a:effectRef idx="2">
+            <a:schemeClr val="accent1"/>
+          </a:effectRef>
+          <a:fontRef idx="minor">
+            <a:schemeClr val="lt1"/>
+          </a:fontRef>
+        </p:style>
+        <p:txBody>
+          <a:bodyPr rtlCol="0" anchor="ctr"/>
+          <a:lstStyle/>
+          <a:p>
+            <a:pPr algn="ctr"/>
+          </a:p>
+        </p:txBody>
+      </p:sp>
+      <p:sp>
+        <p:nvSpPr>
+          <p:cNvPr id="26" name="TextBox 25"/>
+          <p:cNvSpPr txBox="1"/>
+          <p:nvPr/>
+        </p:nvSpPr>
+        <p:spPr>
+          <a:xfrm>
+            <a:off x="6675120" y="3520440"/>
+            <a:ext cx="4480560" cy="365760"/>
+          </a:xfrm>
+          <a:prstGeom prst="rect">
+            <a:avLst/>
+          </a:prstGeom>
+          <a:noFill/>
+        </p:spPr>
+        <p:txBody>
+          <a:bodyPr wrap="square">
+            <a:spAutoFit/>
+          </a:bodyPr>
+          <a:lstStyle/>
+          <a:p>
+            <a:pPr algn="l">
+              <a:defRPr sz="1300" b="0">
+                <a:solidFill>
+                  <a:srgbClr val="F3EDE7"/>
+                </a:solidFill>
+                <a:latin typeface="Arial"/>
+              </a:defRPr>
+            </a:pPr>
+            <a:r>
+              <a:t>→ Free readiness tools for members &amp; non-members</a:t>
+            </a:r>
+          </a:p>
+        </p:txBody>
+      </p:sp>
+      <p:sp>
+        <p:nvSpPr>
+          <p:cNvPr id="27" name="Rounded Rectangle 26"/>
+          <p:cNvSpPr/>
+          <p:nvPr/>
+        </p:nvSpPr>
+        <p:spPr>
+          <a:xfrm>
+            <a:off x="6400800" y="4023360"/>
+            <a:ext cx="5029200" cy="502920"/>
+          </a:xfrm>
+          <a:prstGeom prst="roundRect">
+            <a:avLst/>
+          </a:prstGeom>
+          <a:solidFill>
+            <a:srgbClr val="244A47"/>
+          </a:solidFill>
+          <a:ln>
+            <a:noFill/>
+          </a:ln>
+        </p:spPr>
+        <p:style>
+          <a:lnRef idx="1">
+            <a:schemeClr val="accent1"/>
+          </a:lnRef>
+          <a:fillRef idx="3">
+            <a:schemeClr val="accent1"/>
+          </a:fillRef>
+          <a:effectRef idx="2">
+            <a:schemeClr val="accent1"/>
+          </a:effectRef>
+          <a:fontRef idx="minor">
+            <a:schemeClr val="lt1"/>
+          </a:fontRef>
+        </p:style>
+        <p:txBody>
+          <a:bodyPr rtlCol="0" anchor="ctr"/>
+          <a:lstStyle/>
+          <a:p>
+            <a:pPr algn="ctr"/>
+          </a:p>
+        </p:txBody>
+      </p:sp>
+      <p:sp>
+        <p:nvSpPr>
+          <p:cNvPr id="28" name="TextBox 27"/>
+          <p:cNvSpPr txBox="1"/>
+          <p:nvPr/>
+        </p:nvSpPr>
+        <p:spPr>
+          <a:xfrm>
+            <a:off x="6675120" y="4114800"/>
+            <a:ext cx="4480560" cy="365760"/>
+          </a:xfrm>
+          <a:prstGeom prst="rect">
+            <a:avLst/>
+          </a:prstGeom>
+          <a:noFill/>
+        </p:spPr>
+        <p:txBody>
+          <a:bodyPr wrap="square">
+            <a:spAutoFit/>
+          </a:bodyPr>
+          <a:lstStyle/>
+          <a:p>
+            <a:pPr algn="l">
+              <a:defRPr sz="1300" b="0">
+                <a:solidFill>
+                  <a:srgbClr val="F3EDE7"/>
+                </a:solidFill>
+                <a:latin typeface="Arial"/>
+              </a:defRPr>
+            </a:pPr>
+            <a:r>
+              <a:t>→ Deeper 1:1 support at critical moments</a:t>
             </a:r>
           </a:p>
         </p:txBody>
@@ -4469,7 +5687,7 @@
 </p:sld>
 </file>
 
-<file path=ppt/slides/slide11.xml><?xml version="1.0" encoding="utf-8"?>
+<file path=ppt/slides/slide12.xml><?xml version="1.0" encoding="utf-8"?>
 <p:sld xmlns:a="http://schemas.openxmlformats.org/drawingml/2006/main" xmlns:p="http://schemas.openxmlformats.org/presentationml/2006/main" xmlns:r="http://schemas.openxmlformats.org/officeDocument/2006/relationships">
   <p:cSld>
     <p:bg>
@@ -4597,7 +5815,7 @@
               </a:defRPr>
             </a:pPr>
             <a:r>
-              <a:t>2026 Priorities</a:t>
+              <a:t>Deepening the Infrastructure</a:t>
             </a:r>
           </a:p>
         </p:txBody>
@@ -4653,8 +5871,8 @@
         </p:nvSpPr>
         <p:spPr>
           <a:xfrm>
-            <a:off x="731520" y="2286000"/>
-            <a:ext cx="5029200" cy="1554480"/>
+            <a:off x="1523847" y="2377440"/>
+            <a:ext cx="9144000" cy="594360"/>
           </a:xfrm>
           <a:prstGeom prst="roundRect">
             <a:avLst/>
@@ -4696,8 +5914,8 @@
         </p:nvSpPr>
         <p:spPr>
           <a:xfrm>
-            <a:off x="1005840" y="2788920"/>
-            <a:ext cx="548640" cy="548640"/>
+            <a:off x="1706727" y="2446020"/>
+            <a:ext cx="457200" cy="457200"/>
           </a:xfrm>
           <a:prstGeom prst="ellipse">
             <a:avLst/>
@@ -4728,7 +5946,7 @@
           <a:lstStyle/>
           <a:p>
             <a:pPr algn="ctr">
-              <a:defRPr sz="1800" b="1">
+              <a:defRPr sz="1600" b="1">
                 <a:solidFill>
                   <a:srgbClr val="FFFFFF"/>
                 </a:solidFill>
@@ -4748,8 +5966,8 @@
         </p:nvSpPr>
         <p:spPr>
           <a:xfrm>
-            <a:off x="1828800" y="2468880"/>
-            <a:ext cx="3657600" cy="411480"/>
+            <a:off x="2438247" y="2468880"/>
+            <a:ext cx="7955280" cy="411480"/>
           </a:xfrm>
           <a:prstGeom prst="rect">
             <a:avLst/>
@@ -4763,69 +5981,29 @@
           <a:lstStyle/>
           <a:p>
             <a:pPr algn="l">
-              <a:defRPr sz="2000" b="1">
-                <a:solidFill>
-                  <a:srgbClr val="D57028"/>
+              <a:defRPr sz="1600" b="0">
+                <a:solidFill>
+                  <a:srgbClr val="F3EDE7"/>
                 </a:solidFill>
                 <a:latin typeface="Arial"/>
               </a:defRPr>
             </a:pPr>
             <a:r>
-              <a:t>Scale the Ecosystem</a:t>
-            </a:r>
-          </a:p>
-        </p:txBody>
-      </p:sp>
-      <p:sp>
-        <p:nvSpPr>
-          <p:cNvPr id="9" name="TextBox 8"/>
-          <p:cNvSpPr txBox="1"/>
-          <p:nvPr/>
-        </p:nvSpPr>
-        <p:spPr>
-          <a:xfrm>
-            <a:off x="1828800" y="2926080"/>
-            <a:ext cx="3657600" cy="731520"/>
-          </a:xfrm>
-          <a:prstGeom prst="rect">
-            <a:avLst/>
-          </a:prstGeom>
-          <a:noFill/>
-        </p:spPr>
-        <p:txBody>
-          <a:bodyPr wrap="square">
-            <a:spAutoFit/>
-          </a:bodyPr>
-          <a:lstStyle/>
-          <a:p>
-            <a:pPr algn="l">
-              <a:defRPr sz="1400" b="0">
-                <a:solidFill>
-                  <a:srgbClr val="F3EDE7"/>
-                </a:solidFill>
-                <a:latin typeface="Arial"/>
-              </a:defRPr>
-            </a:pPr>
-            <a:r>
-              <a:t>Grow membership and deepen engagement</a:t>
-            </a:r>
-            <a:br/>
-            <a:r>
-              <a:t>across all founder, funder, and dual pathways.</a:t>
-            </a:r>
-          </a:p>
-        </p:txBody>
-      </p:sp>
-      <p:sp>
-        <p:nvSpPr>
-          <p:cNvPr id="10" name="Rounded Rectangle 9"/>
+              <a:t>Expand readiness technology &amp; impact tracking</a:t>
+            </a:r>
+          </a:p>
+        </p:txBody>
+      </p:sp>
+      <p:sp>
+        <p:nvSpPr>
+          <p:cNvPr id="9" name="Rounded Rectangle 8"/>
           <p:cNvSpPr/>
           <p:nvPr/>
         </p:nvSpPr>
         <p:spPr>
           <a:xfrm>
-            <a:off x="6217920" y="2286000"/>
-            <a:ext cx="5029200" cy="1554480"/>
+            <a:off x="1523847" y="3108960"/>
+            <a:ext cx="9144000" cy="594360"/>
           </a:xfrm>
           <a:prstGeom prst="roundRect">
             <a:avLst/>
@@ -4861,14 +6039,14 @@
       </p:sp>
       <p:sp>
         <p:nvSpPr>
-          <p:cNvPr id="11" name="Oval 10"/>
+          <p:cNvPr id="10" name="Oval 9"/>
           <p:cNvSpPr/>
           <p:nvPr/>
         </p:nvSpPr>
         <p:spPr>
           <a:xfrm>
-            <a:off x="6492240" y="2788920"/>
-            <a:ext cx="548640" cy="548640"/>
+            <a:off x="1706727" y="3177540"/>
+            <a:ext cx="457200" cy="457200"/>
           </a:xfrm>
           <a:prstGeom prst="ellipse">
             <a:avLst/>
@@ -4899,7 +6077,7 @@
           <a:lstStyle/>
           <a:p>
             <a:pPr algn="ctr">
-              <a:defRPr sz="1800" b="1">
+              <a:defRPr sz="1600" b="1">
                 <a:solidFill>
                   <a:srgbClr val="FFFFFF"/>
                 </a:solidFill>
@@ -4913,14 +6091,14 @@
       </p:sp>
       <p:sp>
         <p:nvSpPr>
-          <p:cNvPr id="12" name="TextBox 11"/>
+          <p:cNvPr id="11" name="TextBox 10"/>
           <p:cNvSpPr txBox="1"/>
           <p:nvPr/>
         </p:nvSpPr>
         <p:spPr>
           <a:xfrm>
-            <a:off x="7315200" y="2468880"/>
-            <a:ext cx="3657600" cy="411480"/>
+            <a:off x="2438247" y="3200400"/>
+            <a:ext cx="7955280" cy="411480"/>
           </a:xfrm>
           <a:prstGeom prst="rect">
             <a:avLst/>
@@ -4934,69 +6112,29 @@
           <a:lstStyle/>
           <a:p>
             <a:pPr algn="l">
-              <a:defRPr sz="2000" b="1">
-                <a:solidFill>
-                  <a:srgbClr val="D57028"/>
+              <a:defRPr sz="1600" b="0">
+                <a:solidFill>
+                  <a:srgbClr val="F3EDE7"/>
                 </a:solidFill>
                 <a:latin typeface="Arial"/>
               </a:defRPr>
             </a:pPr>
             <a:r>
-              <a:t>Launch Sengo Fund</a:t>
-            </a:r>
-          </a:p>
-        </p:txBody>
-      </p:sp>
-      <p:sp>
-        <p:nvSpPr>
-          <p:cNvPr id="13" name="TextBox 12"/>
-          <p:cNvSpPr txBox="1"/>
-          <p:nvPr/>
-        </p:nvSpPr>
-        <p:spPr>
-          <a:xfrm>
-            <a:off x="7315200" y="2926080"/>
-            <a:ext cx="3657600" cy="731520"/>
-          </a:xfrm>
-          <a:prstGeom prst="rect">
-            <a:avLst/>
-          </a:prstGeom>
-          <a:noFill/>
-        </p:spPr>
-        <p:txBody>
-          <a:bodyPr wrap="square">
-            <a:spAutoFit/>
-          </a:bodyPr>
-          <a:lstStyle/>
-          <a:p>
-            <a:pPr algn="l">
-              <a:defRPr sz="1400" b="0">
-                <a:solidFill>
-                  <a:srgbClr val="F3EDE7"/>
-                </a:solidFill>
-                <a:latin typeface="Arial"/>
-              </a:defRPr>
-            </a:pPr>
-            <a:r>
-              <a:t>Establish a dedicated fund to directly invest</a:t>
-            </a:r>
-            <a:br/>
-            <a:r>
-              <a:t>in portfolio companies from our ecosystem.</a:t>
-            </a:r>
-          </a:p>
-        </p:txBody>
-      </p:sp>
-      <p:sp>
-        <p:nvSpPr>
-          <p:cNvPr id="14" name="Rounded Rectangle 13"/>
+              <a:t>Increase investor participation through education</a:t>
+            </a:r>
+          </a:p>
+        </p:txBody>
+      </p:sp>
+      <p:sp>
+        <p:nvSpPr>
+          <p:cNvPr id="12" name="Rounded Rectangle 11"/>
           <p:cNvSpPr/>
           <p:nvPr/>
         </p:nvSpPr>
         <p:spPr>
           <a:xfrm>
-            <a:off x="731520" y="4114800"/>
-            <a:ext cx="5029200" cy="1554480"/>
+            <a:off x="1523847" y="3840480"/>
+            <a:ext cx="9144000" cy="594360"/>
           </a:xfrm>
           <a:prstGeom prst="roundRect">
             <a:avLst/>
@@ -5032,14 +6170,14 @@
       </p:sp>
       <p:sp>
         <p:nvSpPr>
-          <p:cNvPr id="15" name="Oval 14"/>
+          <p:cNvPr id="13" name="Oval 12"/>
           <p:cNvSpPr/>
           <p:nvPr/>
         </p:nvSpPr>
         <p:spPr>
           <a:xfrm>
-            <a:off x="1005840" y="4617720"/>
-            <a:ext cx="548640" cy="548640"/>
+            <a:off x="1706727" y="3909060"/>
+            <a:ext cx="457200" cy="457200"/>
           </a:xfrm>
           <a:prstGeom prst="ellipse">
             <a:avLst/>
@@ -5070,7 +6208,7 @@
           <a:lstStyle/>
           <a:p>
             <a:pPr algn="ctr">
-              <a:defRPr sz="1800" b="1">
+              <a:defRPr sz="1600" b="1">
                 <a:solidFill>
                   <a:srgbClr val="FFFFFF"/>
                 </a:solidFill>
@@ -5084,14 +6222,14 @@
       </p:sp>
       <p:sp>
         <p:nvSpPr>
-          <p:cNvPr id="16" name="TextBox 15"/>
+          <p:cNvPr id="14" name="TextBox 13"/>
           <p:cNvSpPr txBox="1"/>
           <p:nvPr/>
         </p:nvSpPr>
         <p:spPr>
           <a:xfrm>
-            <a:off x="1828800" y="4297680"/>
-            <a:ext cx="3657600" cy="411480"/>
+            <a:off x="2438247" y="3931920"/>
+            <a:ext cx="7955280" cy="411480"/>
           </a:xfrm>
           <a:prstGeom prst="rect">
             <a:avLst/>
@@ -5105,69 +6243,29 @@
           <a:lstStyle/>
           <a:p>
             <a:pPr algn="l">
-              <a:defRPr sz="2000" b="1">
-                <a:solidFill>
-                  <a:srgbClr val="D57028"/>
+              <a:defRPr sz="1600" b="0">
+                <a:solidFill>
+                  <a:srgbClr val="F3EDE7"/>
                 </a:solidFill>
                 <a:latin typeface="Arial"/>
               </a:defRPr>
             </a:pPr>
             <a:r>
-              <a:t>Expand Programming</a:t>
-            </a:r>
-          </a:p>
-        </p:txBody>
-      </p:sp>
-      <p:sp>
-        <p:nvSpPr>
-          <p:cNvPr id="17" name="TextBox 16"/>
-          <p:cNvSpPr txBox="1"/>
-          <p:nvPr/>
-        </p:nvSpPr>
-        <p:spPr>
-          <a:xfrm>
-            <a:off x="1828800" y="4754880"/>
-            <a:ext cx="3657600" cy="731520"/>
-          </a:xfrm>
-          <a:prstGeom prst="rect">
-            <a:avLst/>
-          </a:prstGeom>
-          <a:noFill/>
-        </p:spPr>
-        <p:txBody>
-          <a:bodyPr wrap="square">
-            <a:spAutoFit/>
-          </a:bodyPr>
-          <a:lstStyle/>
-          <a:p>
-            <a:pPr algn="l">
-              <a:defRPr sz="1400" b="0">
-                <a:solidFill>
-                  <a:srgbClr val="F3EDE7"/>
-                </a:solidFill>
-                <a:latin typeface="Arial"/>
-              </a:defRPr>
-            </a:pPr>
-            <a:r>
-              <a:t>Scale repeatable programs with measurable outcomes</a:t>
-            </a:r>
-            <a:br/>
-            <a:r>
-              <a:t>across regions and internationally.</a:t>
-            </a:r>
-          </a:p>
-        </p:txBody>
-      </p:sp>
-      <p:sp>
-        <p:nvSpPr>
-          <p:cNvPr id="18" name="Rounded Rectangle 17"/>
+              <a:t>Scale repeatable programs into new cities</a:t>
+            </a:r>
+          </a:p>
+        </p:txBody>
+      </p:sp>
+      <p:sp>
+        <p:nvSpPr>
+          <p:cNvPr id="15" name="Rounded Rectangle 14"/>
           <p:cNvSpPr/>
           <p:nvPr/>
         </p:nvSpPr>
         <p:spPr>
           <a:xfrm>
-            <a:off x="6217920" y="4114800"/>
-            <a:ext cx="5029200" cy="1554480"/>
+            <a:off x="1523847" y="4572000"/>
+            <a:ext cx="9144000" cy="594360"/>
           </a:xfrm>
           <a:prstGeom prst="roundRect">
             <a:avLst/>
@@ -5203,14 +6301,14 @@
       </p:sp>
       <p:sp>
         <p:nvSpPr>
-          <p:cNvPr id="19" name="Oval 18"/>
+          <p:cNvPr id="16" name="Oval 15"/>
           <p:cNvSpPr/>
           <p:nvPr/>
         </p:nvSpPr>
         <p:spPr>
           <a:xfrm>
-            <a:off x="6492240" y="4617720"/>
-            <a:ext cx="548640" cy="548640"/>
+            <a:off x="1706727" y="4640580"/>
+            <a:ext cx="457200" cy="457200"/>
           </a:xfrm>
           <a:prstGeom prst="ellipse">
             <a:avLst/>
@@ -5241,7 +6339,7 @@
           <a:lstStyle/>
           <a:p>
             <a:pPr algn="ctr">
-              <a:defRPr sz="1800" b="1">
+              <a:defRPr sz="1600" b="1">
                 <a:solidFill>
                   <a:srgbClr val="FFFFFF"/>
                 </a:solidFill>
@@ -5255,14 +6353,14 @@
       </p:sp>
       <p:sp>
         <p:nvSpPr>
-          <p:cNvPr id="20" name="TextBox 19"/>
+          <p:cNvPr id="17" name="TextBox 16"/>
           <p:cNvSpPr txBox="1"/>
           <p:nvPr/>
         </p:nvSpPr>
         <p:spPr>
           <a:xfrm>
-            <a:off x="7315200" y="4297680"/>
-            <a:ext cx="3657600" cy="411480"/>
+            <a:off x="2438247" y="4663440"/>
+            <a:ext cx="7955280" cy="411480"/>
           </a:xfrm>
           <a:prstGeom prst="rect">
             <a:avLst/>
@@ -5276,97 +6374,74 @@
           <a:lstStyle/>
           <a:p>
             <a:pPr algn="l">
-              <a:defRPr sz="2000" b="1">
-                <a:solidFill>
-                  <a:srgbClr val="D57028"/>
+              <a:defRPr sz="1600" b="0">
+                <a:solidFill>
+                  <a:srgbClr val="F3EDE7"/>
                 </a:solidFill>
                 <a:latin typeface="Arial"/>
               </a:defRPr>
             </a:pPr>
             <a:r>
-              <a:t>Deepen Partnerships</a:t>
-            </a:r>
-          </a:p>
-        </p:txBody>
-      </p:sp>
-      <p:sp>
-        <p:nvSpPr>
-          <p:cNvPr id="21" name="TextBox 20"/>
-          <p:cNvSpPr txBox="1"/>
-          <p:nvPr/>
-        </p:nvSpPr>
-        <p:spPr>
-          <a:xfrm>
-            <a:off x="7315200" y="4754880"/>
-            <a:ext cx="3657600" cy="731520"/>
-          </a:xfrm>
-          <a:prstGeom prst="rect">
-            <a:avLst/>
-          </a:prstGeom>
-          <a:noFill/>
-        </p:spPr>
-        <p:txBody>
-          <a:bodyPr wrap="square">
-            <a:spAutoFit/>
-          </a:bodyPr>
-          <a:lstStyle/>
-          <a:p>
-            <a:pPr algn="l">
-              <a:defRPr sz="1400" b="0">
-                <a:solidFill>
-                  <a:srgbClr val="F3EDE7"/>
-                </a:solidFill>
-                <a:latin typeface="Arial"/>
-              </a:defRPr>
-            </a:pPr>
-            <a:r>
-              <a:t>Build strategic alliances with accelerators,</a:t>
-            </a:r>
-            <a:br/>
-            <a:r>
-              <a:t>corporations, and institutional investors.</a:t>
-            </a:r>
-          </a:p>
-        </p:txBody>
-      </p:sp>
-    </p:spTree>
-  </p:cSld>
-  <p:clrMapOvr>
-    <a:masterClrMapping/>
-  </p:clrMapOvr>
-</p:sld>
-</file>
-
-<file path=ppt/slides/slide12.xml><?xml version="1.0" encoding="utf-8"?>
-<p:sld xmlns:a="http://schemas.openxmlformats.org/drawingml/2006/main" xmlns:p="http://schemas.openxmlformats.org/presentationml/2006/main" xmlns:r="http://schemas.openxmlformats.org/officeDocument/2006/relationships">
-  <p:cSld>
-    <p:bg>
-      <p:bgPr>
-        <a:solidFill>
-          <a:srgbClr val="1B3533"/>
-        </a:solidFill>
-        <a:effectLst/>
-      </p:bgPr>
-    </p:bg>
-    <p:spTree>
-      <p:nvGrpSpPr>
-        <p:cNvPr id="1" name=""/>
-        <p:cNvGrpSpPr/>
-        <p:nvPr/>
-      </p:nvGrpSpPr>
-      <p:grpSpPr/>
-      <p:sp>
-        <p:nvSpPr>
-          <p:cNvPr id="2" name="Rectangle 1"/>
+              <a:t>Strengthen longitudinal data on founder outcomes</a:t>
+            </a:r>
+          </a:p>
+        </p:txBody>
+      </p:sp>
+      <p:sp>
+        <p:nvSpPr>
+          <p:cNvPr id="18" name="Rounded Rectangle 17"/>
           <p:cNvSpPr/>
           <p:nvPr/>
         </p:nvSpPr>
         <p:spPr>
           <a:xfrm>
-            <a:off x="0" y="0"/>
-            <a:ext cx="12191695" cy="63500"/>
-          </a:xfrm>
-          <a:prstGeom prst="rect">
+            <a:off x="1523847" y="5303520"/>
+            <a:ext cx="9144000" cy="594360"/>
+          </a:xfrm>
+          <a:prstGeom prst="roundRect">
+            <a:avLst/>
+          </a:prstGeom>
+          <a:solidFill>
+            <a:srgbClr val="1B3533"/>
+          </a:solidFill>
+          <a:ln>
+            <a:noFill/>
+          </a:ln>
+        </p:spPr>
+        <p:style>
+          <a:lnRef idx="1">
+            <a:schemeClr val="accent1"/>
+          </a:lnRef>
+          <a:fillRef idx="3">
+            <a:schemeClr val="accent1"/>
+          </a:fillRef>
+          <a:effectRef idx="2">
+            <a:schemeClr val="accent1"/>
+          </a:effectRef>
+          <a:fontRef idx="minor">
+            <a:schemeClr val="lt1"/>
+          </a:fontRef>
+        </p:style>
+        <p:txBody>
+          <a:bodyPr rtlCol="0" anchor="ctr"/>
+          <a:lstStyle/>
+          <a:p>
+            <a:pPr algn="ctr"/>
+          </a:p>
+        </p:txBody>
+      </p:sp>
+      <p:sp>
+        <p:nvSpPr>
+          <p:cNvPr id="19" name="Oval 18"/>
+          <p:cNvSpPr/>
+          <p:nvPr/>
+        </p:nvSpPr>
+        <p:spPr>
+          <a:xfrm>
+            <a:off x="1706727" y="5372100"/>
+            <a:ext cx="457200" cy="457200"/>
+          </a:xfrm>
+          <a:prstGeom prst="ellipse">
             <a:avLst/>
           </a:prstGeom>
           <a:solidFill>
@@ -5394,20 +6469,29 @@
           <a:bodyPr rtlCol="0" anchor="ctr"/>
           <a:lstStyle/>
           <a:p>
-            <a:pPr algn="ctr"/>
-          </a:p>
-        </p:txBody>
-      </p:sp>
-      <p:sp>
-        <p:nvSpPr>
-          <p:cNvPr id="3" name="TextBox 2"/>
+            <a:pPr algn="ctr">
+              <a:defRPr sz="1600" b="1">
+                <a:solidFill>
+                  <a:srgbClr val="FFFFFF"/>
+                </a:solidFill>
+              </a:defRPr>
+            </a:pPr>
+            <a:r>
+              <a:t>5</a:t>
+            </a:r>
+          </a:p>
+        </p:txBody>
+      </p:sp>
+      <p:sp>
+        <p:nvSpPr>
+          <p:cNvPr id="20" name="TextBox 19"/>
           <p:cNvSpPr txBox="1"/>
           <p:nvPr/>
         </p:nvSpPr>
         <p:spPr>
           <a:xfrm>
-            <a:off x="914400" y="457200"/>
-            <a:ext cx="10058400" cy="457200"/>
+            <a:off x="2438247" y="5394960"/>
+            <a:ext cx="7955280" cy="411480"/>
           </a:xfrm>
           <a:prstGeom prst="rect">
             <a:avLst/>
@@ -5420,653 +6504,16 @@
           </a:bodyPr>
           <a:lstStyle/>
           <a:p>
-            <a:pPr algn="ctr">
-              <a:defRPr sz="1300" b="1">
-                <a:solidFill>
-                  <a:srgbClr val="D57028"/>
+            <a:pPr algn="l">
+              <a:defRPr sz="1600" b="0">
+                <a:solidFill>
+                  <a:srgbClr val="F3EDE7"/>
                 </a:solidFill>
                 <a:latin typeface="Arial"/>
               </a:defRPr>
             </a:pPr>
             <a:r>
-              <a:t>RECOGNITION &amp; PARTNERS</a:t>
-            </a:r>
-          </a:p>
-        </p:txBody>
-      </p:sp>
-      <p:sp>
-        <p:nvSpPr>
-          <p:cNvPr id="4" name="TextBox 3"/>
-          <p:cNvSpPr txBox="1"/>
-          <p:nvPr/>
-        </p:nvSpPr>
-        <p:spPr>
-          <a:xfrm>
-            <a:off x="914400" y="914400"/>
-            <a:ext cx="10058400" cy="914400"/>
-          </a:xfrm>
-          <a:prstGeom prst="rect">
-            <a:avLst/>
-          </a:prstGeom>
-          <a:noFill/>
-        </p:spPr>
-        <p:txBody>
-          <a:bodyPr wrap="square">
-            <a:spAutoFit/>
-          </a:bodyPr>
-          <a:lstStyle/>
-          <a:p>
-            <a:pPr algn="ctr">
-              <a:defRPr sz="4000" b="1">
-                <a:solidFill>
-                  <a:srgbClr val="FFFFFF"/>
-                </a:solidFill>
-                <a:latin typeface="Arial"/>
-              </a:defRPr>
-            </a:pPr>
-            <a:r>
-              <a:t>Strategic Partnerships</a:t>
-            </a:r>
-          </a:p>
-        </p:txBody>
-      </p:sp>
-      <p:sp>
-        <p:nvSpPr>
-          <p:cNvPr id="5" name="Rectangle 4"/>
-          <p:cNvSpPr/>
-          <p:nvPr/>
-        </p:nvSpPr>
-        <p:spPr>
-          <a:xfrm>
-            <a:off x="5029200" y="1828800"/>
-            <a:ext cx="2103120" cy="50800"/>
-          </a:xfrm>
-          <a:prstGeom prst="rect">
-            <a:avLst/>
-          </a:prstGeom>
-          <a:solidFill>
-            <a:srgbClr val="D57028"/>
-          </a:solidFill>
-          <a:ln>
-            <a:noFill/>
-          </a:ln>
-        </p:spPr>
-        <p:style>
-          <a:lnRef idx="1">
-            <a:schemeClr val="accent1"/>
-          </a:lnRef>
-          <a:fillRef idx="3">
-            <a:schemeClr val="accent1"/>
-          </a:fillRef>
-          <a:effectRef idx="2">
-            <a:schemeClr val="accent1"/>
-          </a:effectRef>
-          <a:fontRef idx="minor">
-            <a:schemeClr val="lt1"/>
-          </a:fontRef>
-        </p:style>
-        <p:txBody>
-          <a:bodyPr rtlCol="0" anchor="ctr"/>
-          <a:lstStyle/>
-          <a:p>
-            <a:pPr algn="ctr"/>
-          </a:p>
-        </p:txBody>
-      </p:sp>
-      <p:sp>
-        <p:nvSpPr>
-          <p:cNvPr id="6" name="TextBox 5"/>
-          <p:cNvSpPr txBox="1"/>
-          <p:nvPr/>
-        </p:nvSpPr>
-        <p:spPr>
-          <a:xfrm>
-            <a:off x="1828800" y="2194560"/>
-            <a:ext cx="8229600" cy="914400"/>
-          </a:xfrm>
-          <a:prstGeom prst="rect">
-            <a:avLst/>
-          </a:prstGeom>
-          <a:noFill/>
-        </p:spPr>
-        <p:txBody>
-          <a:bodyPr wrap="square">
-            <a:spAutoFit/>
-          </a:bodyPr>
-          <a:lstStyle/>
-          <a:p>
-            <a:pPr algn="ctr">
-              <a:defRPr sz="1800" b="0">
-                <a:solidFill>
-                  <a:srgbClr val="F3EDE7"/>
-                </a:solidFill>
-                <a:latin typeface="Arial"/>
-              </a:defRPr>
-            </a:pPr>
-            <a:r>
-              <a:t>Sengo's mission and impact have been recognized across major media and entrepreneurial platforms nationwide.</a:t>
-            </a:r>
-          </a:p>
-        </p:txBody>
-      </p:sp>
-      <p:sp>
-        <p:nvSpPr>
-          <p:cNvPr id="7" name="Rounded Rectangle 6"/>
-          <p:cNvSpPr/>
-          <p:nvPr/>
-        </p:nvSpPr>
-        <p:spPr>
-          <a:xfrm>
-            <a:off x="746607" y="3291840"/>
-            <a:ext cx="1554480" cy="1371600"/>
-          </a:xfrm>
-          <a:prstGeom prst="roundRect">
-            <a:avLst/>
-          </a:prstGeom>
-          <a:solidFill>
-            <a:srgbClr val="FFFFFF"/>
-          </a:solidFill>
-          <a:ln>
-            <a:noFill/>
-          </a:ln>
-        </p:spPr>
-        <p:style>
-          <a:lnRef idx="1">
-            <a:schemeClr val="accent1"/>
-          </a:lnRef>
-          <a:fillRef idx="3">
-            <a:schemeClr val="accent1"/>
-          </a:fillRef>
-          <a:effectRef idx="2">
-            <a:schemeClr val="accent1"/>
-          </a:effectRef>
-          <a:fontRef idx="minor">
-            <a:schemeClr val="lt1"/>
-          </a:fontRef>
-        </p:style>
-        <p:txBody>
-          <a:bodyPr rtlCol="0" anchor="ctr"/>
-          <a:lstStyle/>
-          <a:p>
-            <a:pPr algn="ctr"/>
-          </a:p>
-        </p:txBody>
-      </p:sp>
-      <p:sp>
-        <p:nvSpPr>
-          <p:cNvPr id="8" name="TextBox 7"/>
-          <p:cNvSpPr txBox="1"/>
-          <p:nvPr/>
-        </p:nvSpPr>
-        <p:spPr>
-          <a:xfrm>
-            <a:off x="746607" y="3566160"/>
-            <a:ext cx="1554480" cy="731520"/>
-          </a:xfrm>
-          <a:prstGeom prst="rect">
-            <a:avLst/>
-          </a:prstGeom>
-          <a:noFill/>
-        </p:spPr>
-        <p:txBody>
-          <a:bodyPr wrap="square">
-            <a:spAutoFit/>
-          </a:bodyPr>
-          <a:lstStyle/>
-          <a:p>
-            <a:pPr algn="ctr">
-              <a:defRPr sz="1500" b="1">
-                <a:solidFill>
-                  <a:srgbClr val="1B3533"/>
-                </a:solidFill>
-                <a:latin typeface="Arial"/>
-              </a:defRPr>
-            </a:pPr>
-            <a:r>
-              <a:t>Forbes</a:t>
-            </a:r>
-          </a:p>
-        </p:txBody>
-      </p:sp>
-      <p:sp>
-        <p:nvSpPr>
-          <p:cNvPr id="9" name="Rounded Rectangle 8"/>
-          <p:cNvSpPr/>
-          <p:nvPr/>
-        </p:nvSpPr>
-        <p:spPr>
-          <a:xfrm>
-            <a:off x="2575407" y="3291840"/>
-            <a:ext cx="1554480" cy="1371600"/>
-          </a:xfrm>
-          <a:prstGeom prst="roundRect">
-            <a:avLst/>
-          </a:prstGeom>
-          <a:solidFill>
-            <a:srgbClr val="FFFFFF"/>
-          </a:solidFill>
-          <a:ln>
-            <a:noFill/>
-          </a:ln>
-        </p:spPr>
-        <p:style>
-          <a:lnRef idx="1">
-            <a:schemeClr val="accent1"/>
-          </a:lnRef>
-          <a:fillRef idx="3">
-            <a:schemeClr val="accent1"/>
-          </a:fillRef>
-          <a:effectRef idx="2">
-            <a:schemeClr val="accent1"/>
-          </a:effectRef>
-          <a:fontRef idx="minor">
-            <a:schemeClr val="lt1"/>
-          </a:fontRef>
-        </p:style>
-        <p:txBody>
-          <a:bodyPr rtlCol="0" anchor="ctr"/>
-          <a:lstStyle/>
-          <a:p>
-            <a:pPr algn="ctr"/>
-          </a:p>
-        </p:txBody>
-      </p:sp>
-      <p:sp>
-        <p:nvSpPr>
-          <p:cNvPr id="10" name="TextBox 9"/>
-          <p:cNvSpPr txBox="1"/>
-          <p:nvPr/>
-        </p:nvSpPr>
-        <p:spPr>
-          <a:xfrm>
-            <a:off x="2575407" y="3566160"/>
-            <a:ext cx="1554480" cy="731520"/>
-          </a:xfrm>
-          <a:prstGeom prst="rect">
-            <a:avLst/>
-          </a:prstGeom>
-          <a:noFill/>
-        </p:spPr>
-        <p:txBody>
-          <a:bodyPr wrap="square">
-            <a:spAutoFit/>
-          </a:bodyPr>
-          <a:lstStyle/>
-          <a:p>
-            <a:pPr algn="ctr">
-              <a:defRPr sz="1500" b="1">
-                <a:solidFill>
-                  <a:srgbClr val="1B3533"/>
-                </a:solidFill>
-                <a:latin typeface="Arial"/>
-              </a:defRPr>
-            </a:pPr>
-            <a:r>
-              <a:t>NerdWallet</a:t>
-            </a:r>
-          </a:p>
-        </p:txBody>
-      </p:sp>
-      <p:sp>
-        <p:nvSpPr>
-          <p:cNvPr id="11" name="Rounded Rectangle 10"/>
-          <p:cNvSpPr/>
-          <p:nvPr/>
-        </p:nvSpPr>
-        <p:spPr>
-          <a:xfrm>
-            <a:off x="4404207" y="3291840"/>
-            <a:ext cx="1554480" cy="1371600"/>
-          </a:xfrm>
-          <a:prstGeom prst="roundRect">
-            <a:avLst/>
-          </a:prstGeom>
-          <a:solidFill>
-            <a:srgbClr val="FFFFFF"/>
-          </a:solidFill>
-          <a:ln>
-            <a:noFill/>
-          </a:ln>
-        </p:spPr>
-        <p:style>
-          <a:lnRef idx="1">
-            <a:schemeClr val="accent1"/>
-          </a:lnRef>
-          <a:fillRef idx="3">
-            <a:schemeClr val="accent1"/>
-          </a:fillRef>
-          <a:effectRef idx="2">
-            <a:schemeClr val="accent1"/>
-          </a:effectRef>
-          <a:fontRef idx="minor">
-            <a:schemeClr val="lt1"/>
-          </a:fontRef>
-        </p:style>
-        <p:txBody>
-          <a:bodyPr rtlCol="0" anchor="ctr"/>
-          <a:lstStyle/>
-          <a:p>
-            <a:pPr algn="ctr"/>
-          </a:p>
-        </p:txBody>
-      </p:sp>
-      <p:sp>
-        <p:nvSpPr>
-          <p:cNvPr id="12" name="TextBox 11"/>
-          <p:cNvSpPr txBox="1"/>
-          <p:nvPr/>
-        </p:nvSpPr>
-        <p:spPr>
-          <a:xfrm>
-            <a:off x="4404207" y="3566160"/>
-            <a:ext cx="1554480" cy="731520"/>
-          </a:xfrm>
-          <a:prstGeom prst="rect">
-            <a:avLst/>
-          </a:prstGeom>
-          <a:noFill/>
-        </p:spPr>
-        <p:txBody>
-          <a:bodyPr wrap="square">
-            <a:spAutoFit/>
-          </a:bodyPr>
-          <a:lstStyle/>
-          <a:p>
-            <a:pPr algn="ctr">
-              <a:defRPr sz="1500" b="1">
-                <a:solidFill>
-                  <a:srgbClr val="1B3533"/>
-                </a:solidFill>
-                <a:latin typeface="Arial"/>
-              </a:defRPr>
-            </a:pPr>
-            <a:r>
-              <a:t>Nasdaq</a:t>
-            </a:r>
-          </a:p>
-        </p:txBody>
-      </p:sp>
-      <p:sp>
-        <p:nvSpPr>
-          <p:cNvPr id="13" name="Rounded Rectangle 12"/>
-          <p:cNvSpPr/>
-          <p:nvPr/>
-        </p:nvSpPr>
-        <p:spPr>
-          <a:xfrm>
-            <a:off x="6233007" y="3291840"/>
-            <a:ext cx="1554480" cy="1371600"/>
-          </a:xfrm>
-          <a:prstGeom prst="roundRect">
-            <a:avLst/>
-          </a:prstGeom>
-          <a:solidFill>
-            <a:srgbClr val="FFFFFF"/>
-          </a:solidFill>
-          <a:ln>
-            <a:noFill/>
-          </a:ln>
-        </p:spPr>
-        <p:style>
-          <a:lnRef idx="1">
-            <a:schemeClr val="accent1"/>
-          </a:lnRef>
-          <a:fillRef idx="3">
-            <a:schemeClr val="accent1"/>
-          </a:fillRef>
-          <a:effectRef idx="2">
-            <a:schemeClr val="accent1"/>
-          </a:effectRef>
-          <a:fontRef idx="minor">
-            <a:schemeClr val="lt1"/>
-          </a:fontRef>
-        </p:style>
-        <p:txBody>
-          <a:bodyPr rtlCol="0" anchor="ctr"/>
-          <a:lstStyle/>
-          <a:p>
-            <a:pPr algn="ctr"/>
-          </a:p>
-        </p:txBody>
-      </p:sp>
-      <p:sp>
-        <p:nvSpPr>
-          <p:cNvPr id="14" name="TextBox 13"/>
-          <p:cNvSpPr txBox="1"/>
-          <p:nvPr/>
-        </p:nvSpPr>
-        <p:spPr>
-          <a:xfrm>
-            <a:off x="6233007" y="3566160"/>
-            <a:ext cx="1554480" cy="731520"/>
-          </a:xfrm>
-          <a:prstGeom prst="rect">
-            <a:avLst/>
-          </a:prstGeom>
-          <a:noFill/>
-        </p:spPr>
-        <p:txBody>
-          <a:bodyPr wrap="square">
-            <a:spAutoFit/>
-          </a:bodyPr>
-          <a:lstStyle/>
-          <a:p>
-            <a:pPr algn="ctr">
-              <a:defRPr sz="1500" b="1">
-                <a:solidFill>
-                  <a:srgbClr val="1B3533"/>
-                </a:solidFill>
-                <a:latin typeface="Arial"/>
-              </a:defRPr>
-            </a:pPr>
-            <a:r>
-              <a:t>Black Girl</a:t>
-            </a:r>
-            <a:br/>
-            <a:r>
-              <a:t>Ventures</a:t>
-            </a:r>
-          </a:p>
-        </p:txBody>
-      </p:sp>
-      <p:sp>
-        <p:nvSpPr>
-          <p:cNvPr id="15" name="Rounded Rectangle 14"/>
-          <p:cNvSpPr/>
-          <p:nvPr/>
-        </p:nvSpPr>
-        <p:spPr>
-          <a:xfrm>
-            <a:off x="8061807" y="3291840"/>
-            <a:ext cx="1554480" cy="1371600"/>
-          </a:xfrm>
-          <a:prstGeom prst="roundRect">
-            <a:avLst/>
-          </a:prstGeom>
-          <a:solidFill>
-            <a:srgbClr val="FFFFFF"/>
-          </a:solidFill>
-          <a:ln>
-            <a:noFill/>
-          </a:ln>
-        </p:spPr>
-        <p:style>
-          <a:lnRef idx="1">
-            <a:schemeClr val="accent1"/>
-          </a:lnRef>
-          <a:fillRef idx="3">
-            <a:schemeClr val="accent1"/>
-          </a:fillRef>
-          <a:effectRef idx="2">
-            <a:schemeClr val="accent1"/>
-          </a:effectRef>
-          <a:fontRef idx="minor">
-            <a:schemeClr val="lt1"/>
-          </a:fontRef>
-        </p:style>
-        <p:txBody>
-          <a:bodyPr rtlCol="0" anchor="ctr"/>
-          <a:lstStyle/>
-          <a:p>
-            <a:pPr algn="ctr"/>
-          </a:p>
-        </p:txBody>
-      </p:sp>
-      <p:sp>
-        <p:nvSpPr>
-          <p:cNvPr id="16" name="TextBox 15"/>
-          <p:cNvSpPr txBox="1"/>
-          <p:nvPr/>
-        </p:nvSpPr>
-        <p:spPr>
-          <a:xfrm>
-            <a:off x="8061807" y="3566160"/>
-            <a:ext cx="1554480" cy="731520"/>
-          </a:xfrm>
-          <a:prstGeom prst="rect">
-            <a:avLst/>
-          </a:prstGeom>
-          <a:noFill/>
-        </p:spPr>
-        <p:txBody>
-          <a:bodyPr wrap="square">
-            <a:spAutoFit/>
-          </a:bodyPr>
-          <a:lstStyle/>
-          <a:p>
-            <a:pPr algn="ctr">
-              <a:defRPr sz="1500" b="1">
-                <a:solidFill>
-                  <a:srgbClr val="1B3533"/>
-                </a:solidFill>
-                <a:latin typeface="Arial"/>
-              </a:defRPr>
-            </a:pPr>
-            <a:r>
-              <a:t>Business</a:t>
-            </a:r>
-            <a:br/>
-            <a:r>
-              <a:t>Insider</a:t>
-            </a:r>
-          </a:p>
-        </p:txBody>
-      </p:sp>
-      <p:sp>
-        <p:nvSpPr>
-          <p:cNvPr id="17" name="Rounded Rectangle 16"/>
-          <p:cNvSpPr/>
-          <p:nvPr/>
-        </p:nvSpPr>
-        <p:spPr>
-          <a:xfrm>
-            <a:off x="9890607" y="3291840"/>
-            <a:ext cx="1554480" cy="1371600"/>
-          </a:xfrm>
-          <a:prstGeom prst="roundRect">
-            <a:avLst/>
-          </a:prstGeom>
-          <a:solidFill>
-            <a:srgbClr val="FFFFFF"/>
-          </a:solidFill>
-          <a:ln>
-            <a:noFill/>
-          </a:ln>
-        </p:spPr>
-        <p:style>
-          <a:lnRef idx="1">
-            <a:schemeClr val="accent1"/>
-          </a:lnRef>
-          <a:fillRef idx="3">
-            <a:schemeClr val="accent1"/>
-          </a:fillRef>
-          <a:effectRef idx="2">
-            <a:schemeClr val="accent1"/>
-          </a:effectRef>
-          <a:fontRef idx="minor">
-            <a:schemeClr val="lt1"/>
-          </a:fontRef>
-        </p:style>
-        <p:txBody>
-          <a:bodyPr rtlCol="0" anchor="ctr"/>
-          <a:lstStyle/>
-          <a:p>
-            <a:pPr algn="ctr"/>
-          </a:p>
-        </p:txBody>
-      </p:sp>
-      <p:sp>
-        <p:nvSpPr>
-          <p:cNvPr id="18" name="TextBox 17"/>
-          <p:cNvSpPr txBox="1"/>
-          <p:nvPr/>
-        </p:nvSpPr>
-        <p:spPr>
-          <a:xfrm>
-            <a:off x="9890607" y="3566160"/>
-            <a:ext cx="1554480" cy="731520"/>
-          </a:xfrm>
-          <a:prstGeom prst="rect">
-            <a:avLst/>
-          </a:prstGeom>
-          <a:noFill/>
-        </p:spPr>
-        <p:txBody>
-          <a:bodyPr wrap="square">
-            <a:spAutoFit/>
-          </a:bodyPr>
-          <a:lstStyle/>
-          <a:p>
-            <a:pPr algn="ctr">
-              <a:defRPr sz="1500" b="1">
-                <a:solidFill>
-                  <a:srgbClr val="1B3533"/>
-                </a:solidFill>
-                <a:latin typeface="Arial"/>
-              </a:defRPr>
-            </a:pPr>
-            <a:r>
-              <a:t>Build in</a:t>
-            </a:r>
-            <a:br/>
-            <a:r>
-              <a:t>Tulsa</a:t>
-            </a:r>
-          </a:p>
-        </p:txBody>
-      </p:sp>
-      <p:sp>
-        <p:nvSpPr>
-          <p:cNvPr id="19" name="TextBox 18"/>
-          <p:cNvSpPr txBox="1"/>
-          <p:nvPr/>
-        </p:nvSpPr>
-        <p:spPr>
-          <a:xfrm>
-            <a:off x="1828800" y="5120640"/>
-            <a:ext cx="8229600" cy="914400"/>
-          </a:xfrm>
-          <a:prstGeom prst="rect">
-            <a:avLst/>
-          </a:prstGeom>
-          <a:noFill/>
-        </p:spPr>
-        <p:txBody>
-          <a:bodyPr wrap="square">
-            <a:spAutoFit/>
-          </a:bodyPr>
-          <a:lstStyle/>
-          <a:p>
-            <a:pPr algn="ctr">
-              <a:defRPr sz="1600" b="0">
-                <a:solidFill>
-                  <a:srgbClr val="F3EDE7"/>
-                </a:solidFill>
-                <a:latin typeface="Arial"/>
-              </a:defRPr>
-            </a:pPr>
-            <a:r>
-              <a:t>We're actively building partnerships with accelerators, angel networks, venture funds, and corporate innovation teams to expand our impact in 2026.</a:t>
+              <a:t>Continue prioritizing clarity, timing, and alignment</a:t>
             </a:r>
           </a:p>
         </p:txBody>
@@ -6207,7 +6654,7 @@
               </a:defRPr>
             </a:pPr>
             <a:r>
-              <a:t>Join the Movement</a:t>
+              <a:t>Build With Us</a:t>
             </a:r>
           </a:p>
         </p:txBody>
@@ -6257,56 +6704,20 @@
       </p:sp>
       <p:sp>
         <p:nvSpPr>
-          <p:cNvPr id="6" name="TextBox 5"/>
-          <p:cNvSpPr txBox="1"/>
-          <p:nvPr/>
-        </p:nvSpPr>
-        <p:spPr>
-          <a:xfrm>
-            <a:off x="2286000" y="3108960"/>
-            <a:ext cx="7315200" cy="1097280"/>
-          </a:xfrm>
-          <a:prstGeom prst="rect">
-            <a:avLst/>
-          </a:prstGeom>
-          <a:noFill/>
-        </p:spPr>
-        <p:txBody>
-          <a:bodyPr wrap="square">
-            <a:spAutoFit/>
-          </a:bodyPr>
-          <a:lstStyle/>
-          <a:p>
-            <a:pPr algn="ctr">
-              <a:defRPr sz="2000" b="0">
-                <a:solidFill>
-                  <a:srgbClr val="F3EDE7"/>
-                </a:solidFill>
-                <a:latin typeface="Arial"/>
-              </a:defRPr>
-            </a:pPr>
-            <a:r>
-              <a:t>Together, we're closing the wealth gap in private assets and creating a more equitable future for founders and funders alike. The best is yet to come.</a:t>
-            </a:r>
-          </a:p>
-        </p:txBody>
-      </p:sp>
-      <p:sp>
-        <p:nvSpPr>
-          <p:cNvPr id="7" name="Rounded Rectangle 6"/>
+          <p:cNvPr id="6" name="Rounded Rectangle 5"/>
           <p:cNvSpPr/>
           <p:nvPr/>
         </p:nvSpPr>
         <p:spPr>
           <a:xfrm>
-            <a:off x="1340967" y="4572000"/>
-            <a:ext cx="2926080" cy="685800"/>
+            <a:off x="3809847" y="3200400"/>
+            <a:ext cx="4572000" cy="411480"/>
           </a:xfrm>
           <a:prstGeom prst="roundRect">
             <a:avLst/>
           </a:prstGeom>
           <a:solidFill>
-            <a:srgbClr val="D57028"/>
+            <a:srgbClr val="244A47"/>
           </a:solidFill>
           <a:ln>
             <a:noFill/>
@@ -6330,29 +6741,20 @@
           <a:bodyPr rtlCol="0" anchor="ctr"/>
           <a:lstStyle/>
           <a:p>
-            <a:pPr algn="ctr">
-              <a:defRPr sz="2000" b="1">
-                <a:solidFill>
-                  <a:srgbClr val="FFFFFF"/>
-                </a:solidFill>
-              </a:defRPr>
-            </a:pPr>
-            <a:r>
-              <a:t>I'm a Founder</a:t>
-            </a:r>
-          </a:p>
-        </p:txBody>
-      </p:sp>
-      <p:sp>
-        <p:nvSpPr>
-          <p:cNvPr id="8" name="TextBox 7"/>
+            <a:pPr algn="ctr"/>
+          </a:p>
+        </p:txBody>
+      </p:sp>
+      <p:sp>
+        <p:nvSpPr>
+          <p:cNvPr id="7" name="TextBox 6"/>
           <p:cNvSpPr txBox="1"/>
           <p:nvPr/>
         </p:nvSpPr>
         <p:spPr>
           <a:xfrm>
-            <a:off x="1340967" y="5303520"/>
-            <a:ext cx="2926080" cy="365760"/>
+            <a:off x="4084167" y="3255264"/>
+            <a:ext cx="4023360" cy="320040"/>
           </a:xfrm>
           <a:prstGeom prst="rect">
             <a:avLst/>
@@ -6366,35 +6768,35 @@
           <a:lstStyle/>
           <a:p>
             <a:pPr algn="ctr">
-              <a:defRPr sz="1000" b="0">
-                <a:solidFill>
-                  <a:srgbClr val="AF8145"/>
+              <a:defRPr sz="1500" b="0">
+                <a:solidFill>
+                  <a:srgbClr val="F3EDE7"/>
                 </a:solidFill>
                 <a:latin typeface="Arial"/>
               </a:defRPr>
             </a:pPr>
             <a:r>
-              <a:t>app.bysengo.com/founder-enrollment</a:t>
-            </a:r>
-          </a:p>
-        </p:txBody>
-      </p:sp>
-      <p:sp>
-        <p:nvSpPr>
-          <p:cNvPr id="9" name="Rounded Rectangle 8"/>
+              <a:t>Join the Sengo community</a:t>
+            </a:r>
+          </a:p>
+        </p:txBody>
+      </p:sp>
+      <p:sp>
+        <p:nvSpPr>
+          <p:cNvPr id="8" name="Rounded Rectangle 7"/>
           <p:cNvSpPr/>
           <p:nvPr/>
         </p:nvSpPr>
         <p:spPr>
           <a:xfrm>
-            <a:off x="4632807" y="4572000"/>
-            <a:ext cx="2926080" cy="685800"/>
+            <a:off x="3809847" y="3703320"/>
+            <a:ext cx="4572000" cy="411480"/>
           </a:xfrm>
           <a:prstGeom prst="roundRect">
             <a:avLst/>
           </a:prstGeom>
           <a:solidFill>
-            <a:srgbClr val="D57028"/>
+            <a:srgbClr val="244A47"/>
           </a:solidFill>
           <a:ln>
             <a:noFill/>
@@ -6418,29 +6820,20 @@
           <a:bodyPr rtlCol="0" anchor="ctr"/>
           <a:lstStyle/>
           <a:p>
-            <a:pPr algn="ctr">
-              <a:defRPr sz="2000" b="1">
-                <a:solidFill>
-                  <a:srgbClr val="FFFFFF"/>
-                </a:solidFill>
-              </a:defRPr>
-            </a:pPr>
-            <a:r>
-              <a:t>I'm a Funder</a:t>
-            </a:r>
-          </a:p>
-        </p:txBody>
-      </p:sp>
-      <p:sp>
-        <p:nvSpPr>
-          <p:cNvPr id="10" name="TextBox 9"/>
+            <a:pPr algn="ctr"/>
+          </a:p>
+        </p:txBody>
+      </p:sp>
+      <p:sp>
+        <p:nvSpPr>
+          <p:cNvPr id="9" name="TextBox 8"/>
           <p:cNvSpPr txBox="1"/>
           <p:nvPr/>
         </p:nvSpPr>
         <p:spPr>
           <a:xfrm>
-            <a:off x="4632807" y="5303520"/>
-            <a:ext cx="2926080" cy="365760"/>
+            <a:off x="4084167" y="3758184"/>
+            <a:ext cx="4023360" cy="320040"/>
           </a:xfrm>
           <a:prstGeom prst="rect">
             <a:avLst/>
@@ -6454,35 +6847,35 @@
           <a:lstStyle/>
           <a:p>
             <a:pPr algn="ctr">
-              <a:defRPr sz="1000" b="0">
-                <a:solidFill>
-                  <a:srgbClr val="AF8145"/>
+              <a:defRPr sz="1500" b="0">
+                <a:solidFill>
+                  <a:srgbClr val="F3EDE7"/>
                 </a:solidFill>
                 <a:latin typeface="Arial"/>
               </a:defRPr>
             </a:pPr>
             <a:r>
-              <a:t>app.bysengo.com/investor-enrollment</a:t>
-            </a:r>
-          </a:p>
-        </p:txBody>
-      </p:sp>
-      <p:sp>
-        <p:nvSpPr>
-          <p:cNvPr id="11" name="Rounded Rectangle 10"/>
+              <a:t>Partner on readiness, education, or grants</a:t>
+            </a:r>
+          </a:p>
+        </p:txBody>
+      </p:sp>
+      <p:sp>
+        <p:nvSpPr>
+          <p:cNvPr id="10" name="Rounded Rectangle 9"/>
           <p:cNvSpPr/>
           <p:nvPr/>
         </p:nvSpPr>
         <p:spPr>
           <a:xfrm>
-            <a:off x="7924647" y="4572000"/>
-            <a:ext cx="2926080" cy="685800"/>
+            <a:off x="3809847" y="4206240"/>
+            <a:ext cx="4572000" cy="411480"/>
           </a:xfrm>
           <a:prstGeom prst="roundRect">
             <a:avLst/>
           </a:prstGeom>
           <a:solidFill>
-            <a:srgbClr val="D57028"/>
+            <a:srgbClr val="244A47"/>
           </a:solidFill>
           <a:ln>
             <a:noFill/>
@@ -6506,29 +6899,20 @@
           <a:bodyPr rtlCol="0" anchor="ctr"/>
           <a:lstStyle/>
           <a:p>
-            <a:pPr algn="ctr">
-              <a:defRPr sz="2000" b="1">
-                <a:solidFill>
-                  <a:srgbClr val="FFFFFF"/>
-                </a:solidFill>
-              </a:defRPr>
-            </a:pPr>
-            <a:r>
-              <a:t>I'm Both</a:t>
-            </a:r>
-          </a:p>
-        </p:txBody>
-      </p:sp>
-      <p:sp>
-        <p:nvSpPr>
-          <p:cNvPr id="12" name="TextBox 11"/>
+            <a:pPr algn="ctr"/>
+          </a:p>
+        </p:txBody>
+      </p:sp>
+      <p:sp>
+        <p:nvSpPr>
+          <p:cNvPr id="11" name="TextBox 10"/>
           <p:cNvSpPr txBox="1"/>
           <p:nvPr/>
         </p:nvSpPr>
         <p:spPr>
           <a:xfrm>
-            <a:off x="7924647" y="5303520"/>
-            <a:ext cx="2926080" cy="365760"/>
+            <a:off x="4084167" y="4261104"/>
+            <a:ext cx="4023360" cy="320040"/>
           </a:xfrm>
           <a:prstGeom prst="rect">
             <a:avLst/>
@@ -6542,16 +6926,59 @@
           <a:lstStyle/>
           <a:p>
             <a:pPr algn="ctr">
-              <a:defRPr sz="1000" b="0">
-                <a:solidFill>
-                  <a:srgbClr val="AF8145"/>
+              <a:defRPr sz="1500" b="0">
+                <a:solidFill>
+                  <a:srgbClr val="F3EDE7"/>
                 </a:solidFill>
                 <a:latin typeface="Arial"/>
               </a:defRPr>
             </a:pPr>
             <a:r>
-              <a:t>app.bysengo.com/allaccess-enrollment</a:t>
-            </a:r>
+              <a:t>Attend an event or workshop</a:t>
+            </a:r>
+          </a:p>
+        </p:txBody>
+      </p:sp>
+      <p:sp>
+        <p:nvSpPr>
+          <p:cNvPr id="12" name="Rounded Rectangle 11"/>
+          <p:cNvSpPr/>
+          <p:nvPr/>
+        </p:nvSpPr>
+        <p:spPr>
+          <a:xfrm>
+            <a:off x="3809847" y="4709160"/>
+            <a:ext cx="4572000" cy="411480"/>
+          </a:xfrm>
+          <a:prstGeom prst="roundRect">
+            <a:avLst/>
+          </a:prstGeom>
+          <a:solidFill>
+            <a:srgbClr val="244A47"/>
+          </a:solidFill>
+          <a:ln>
+            <a:noFill/>
+          </a:ln>
+        </p:spPr>
+        <p:style>
+          <a:lnRef idx="1">
+            <a:schemeClr val="accent1"/>
+          </a:lnRef>
+          <a:fillRef idx="3">
+            <a:schemeClr val="accent1"/>
+          </a:fillRef>
+          <a:effectRef idx="2">
+            <a:schemeClr val="accent1"/>
+          </a:effectRef>
+          <a:fontRef idx="minor">
+            <a:schemeClr val="lt1"/>
+          </a:fontRef>
+        </p:style>
+        <p:txBody>
+          <a:bodyPr rtlCol="0" anchor="ctr"/>
+          <a:lstStyle/>
+          <a:p>
+            <a:pPr algn="ctr"/>
           </a:p>
         </p:txBody>
       </p:sp>
@@ -6563,8 +6990,8 @@
         </p:nvSpPr>
         <p:spPr>
           <a:xfrm>
-            <a:off x="1371600" y="6035040"/>
-            <a:ext cx="9144000" cy="457200"/>
+            <a:off x="4084167" y="4764024"/>
+            <a:ext cx="4023360" cy="320040"/>
           </a:xfrm>
           <a:prstGeom prst="rect">
             <a:avLst/>
@@ -6578,6 +7005,78 @@
           <a:lstStyle/>
           <a:p>
             <a:pPr algn="ctr">
+              <a:defRPr sz="1500" b="0">
+                <a:solidFill>
+                  <a:srgbClr val="F3EDE7"/>
+                </a:solidFill>
+                <a:latin typeface="Arial"/>
+              </a:defRPr>
+            </a:pPr>
+            <a:r>
+              <a:t>Support founders building with intention</a:t>
+            </a:r>
+          </a:p>
+        </p:txBody>
+      </p:sp>
+      <p:sp>
+        <p:nvSpPr>
+          <p:cNvPr id="14" name="TextBox 13"/>
+          <p:cNvSpPr txBox="1"/>
+          <p:nvPr/>
+        </p:nvSpPr>
+        <p:spPr>
+          <a:xfrm>
+            <a:off x="1828800" y="5303520"/>
+            <a:ext cx="8229600" cy="548640"/>
+          </a:xfrm>
+          <a:prstGeom prst="rect">
+            <a:avLst/>
+          </a:prstGeom>
+          <a:noFill/>
+        </p:spPr>
+        <p:txBody>
+          <a:bodyPr wrap="square">
+            <a:spAutoFit/>
+          </a:bodyPr>
+          <a:lstStyle/>
+          <a:p>
+            <a:pPr algn="ctr">
+              <a:defRPr sz="1800" b="1">
+                <a:solidFill>
+                  <a:srgbClr val="D57028"/>
+                </a:solidFill>
+                <a:latin typeface="Arial"/>
+              </a:defRPr>
+            </a:pPr>
+            <a:r>
+              <a:t>Sengo believes capital should meet preparedness — not pressure.</a:t>
+            </a:r>
+          </a:p>
+        </p:txBody>
+      </p:sp>
+      <p:sp>
+        <p:nvSpPr>
+          <p:cNvPr id="15" name="TextBox 14"/>
+          <p:cNvSpPr txBox="1"/>
+          <p:nvPr/>
+        </p:nvSpPr>
+        <p:spPr>
+          <a:xfrm>
+            <a:off x="1371600" y="6035040"/>
+            <a:ext cx="9144000" cy="457200"/>
+          </a:xfrm>
+          <a:prstGeom prst="rect">
+            <a:avLst/>
+          </a:prstGeom>
+          <a:noFill/>
+        </p:spPr>
+        <p:txBody>
+          <a:bodyPr wrap="square">
+            <a:spAutoFit/>
+          </a:bodyPr>
+          <a:lstStyle/>
+          <a:p>
+            <a:pPr algn="ctr">
               <a:defRPr sz="1200" b="0">
                 <a:solidFill>
                   <a:srgbClr val="AF8145"/>
@@ -6586,14 +7085,14 @@
               </a:defRPr>
             </a:pPr>
             <a:r>
-              <a:t>SENGO  ·  Reimagining Fundraising &amp; Investing  ·  2025</a:t>
-            </a:r>
-          </a:p>
-        </p:txBody>
-      </p:sp>
-      <p:sp>
-        <p:nvSpPr>
-          <p:cNvPr id="14" name="Rectangle 13"/>
+              <a:t>SENGO  ·  Founded by Ila B. Corcoran  ·  2025</a:t>
+            </a:r>
+          </a:p>
+        </p:txBody>
+      </p:sp>
+      <p:sp>
+        <p:nvSpPr>
+          <p:cNvPr id="16" name="Rectangle 15"/>
           <p:cNvSpPr/>
           <p:nvPr/>
         </p:nvSpPr>
@@ -6770,7 +7269,7 @@
               </a:defRPr>
             </a:pPr>
             <a:r>
-              <a:t>2025 Overview</a:t>
+              <a:t>From Experimentation to Infrastructure</a:t>
             </a:r>
           </a:p>
         </p:txBody>
@@ -6820,50 +7319,14 @@
       </p:sp>
       <p:sp>
         <p:nvSpPr>
-          <p:cNvPr id="6" name="TextBox 5"/>
-          <p:cNvSpPr txBox="1"/>
-          <p:nvPr/>
-        </p:nvSpPr>
-        <p:spPr>
-          <a:xfrm>
-            <a:off x="914400" y="2286000"/>
-            <a:ext cx="10058400" cy="914400"/>
-          </a:xfrm>
-          <a:prstGeom prst="rect">
-            <a:avLst/>
-          </a:prstGeom>
-          <a:noFill/>
-        </p:spPr>
-        <p:txBody>
-          <a:bodyPr wrap="square">
-            <a:spAutoFit/>
-          </a:bodyPr>
-          <a:lstStyle/>
-          <a:p>
-            <a:pPr algn="ctr">
-              <a:defRPr sz="2200" b="1">
-                <a:solidFill>
-                  <a:srgbClr val="1B3533"/>
-                </a:solidFill>
-                <a:latin typeface="Arial"/>
-              </a:defRPr>
-            </a:pPr>
-            <a:r>
-              <a:t>Reimagining fundraising and investing through education, community, and access.</a:t>
-            </a:r>
-          </a:p>
-        </p:txBody>
-      </p:sp>
-      <p:sp>
-        <p:nvSpPr>
-          <p:cNvPr id="7" name="Rounded Rectangle 6"/>
+          <p:cNvPr id="6" name="Rounded Rectangle 5"/>
           <p:cNvSpPr/>
           <p:nvPr/>
         </p:nvSpPr>
         <p:spPr>
           <a:xfrm>
-            <a:off x="1981047" y="3474720"/>
-            <a:ext cx="8229600" cy="548640"/>
+            <a:off x="1523847" y="2377440"/>
+            <a:ext cx="9144000" cy="548640"/>
           </a:xfrm>
           <a:prstGeom prst="roundRect">
             <a:avLst/>
@@ -6899,14 +7362,14 @@
       </p:sp>
       <p:sp>
         <p:nvSpPr>
-          <p:cNvPr id="8" name="TextBox 7"/>
+          <p:cNvPr id="7" name="TextBox 6"/>
           <p:cNvSpPr txBox="1"/>
           <p:nvPr/>
         </p:nvSpPr>
         <p:spPr>
           <a:xfrm>
-            <a:off x="2255367" y="3547872"/>
-            <a:ext cx="7680960" cy="411480"/>
+            <a:off x="1798167" y="2450592"/>
+            <a:ext cx="8595360" cy="411480"/>
           </a:xfrm>
           <a:prstGeom prst="rect">
             <a:avLst/>
@@ -6928,21 +7391,21 @@
               </a:defRPr>
             </a:pPr>
             <a:r>
-              <a:t>Official platform launch and first grant-funded year</a:t>
-            </a:r>
-          </a:p>
-        </p:txBody>
-      </p:sp>
-      <p:sp>
-        <p:nvSpPr>
-          <p:cNvPr id="9" name="Rounded Rectangle 8"/>
+              <a:t>2025 marked Sengo's official platform launch and first grant-funded year</a:t>
+            </a:r>
+          </a:p>
+        </p:txBody>
+      </p:sp>
+      <p:sp>
+        <p:nvSpPr>
+          <p:cNvPr id="8" name="Rounded Rectangle 7"/>
           <p:cNvSpPr/>
           <p:nvPr/>
         </p:nvSpPr>
         <p:spPr>
           <a:xfrm>
-            <a:off x="1981047" y="4160520"/>
-            <a:ext cx="8229600" cy="548640"/>
+            <a:off x="1523847" y="3063240"/>
+            <a:ext cx="9144000" cy="548640"/>
           </a:xfrm>
           <a:prstGeom prst="roundRect">
             <a:avLst/>
@@ -6978,14 +7441,14 @@
       </p:sp>
       <p:sp>
         <p:nvSpPr>
-          <p:cNvPr id="10" name="TextBox 9"/>
+          <p:cNvPr id="9" name="TextBox 8"/>
           <p:cNvSpPr txBox="1"/>
           <p:nvPr/>
         </p:nvSpPr>
         <p:spPr>
           <a:xfrm>
-            <a:off x="2255367" y="4233672"/>
-            <a:ext cx="7680960" cy="411480"/>
+            <a:off x="1798167" y="3136392"/>
+            <a:ext cx="8595360" cy="411480"/>
           </a:xfrm>
           <a:prstGeom prst="rect">
             <a:avLst/>
@@ -7007,21 +7470,21 @@
               </a:defRPr>
             </a:pPr>
             <a:r>
-              <a:t>Transitioned from experimentation (2024) to repeatable programs with measurable outcomes</a:t>
-            </a:r>
-          </a:p>
-        </p:txBody>
-      </p:sp>
-      <p:sp>
-        <p:nvSpPr>
-          <p:cNvPr id="11" name="Rounded Rectangle 10"/>
+              <a:t>Transitioned from research and pilots (2024) to repeatable, technology-enabled programs</a:t>
+            </a:r>
+          </a:p>
+        </p:txBody>
+      </p:sp>
+      <p:sp>
+        <p:nvSpPr>
+          <p:cNvPr id="10" name="Rounded Rectangle 9"/>
           <p:cNvSpPr/>
           <p:nvPr/>
         </p:nvSpPr>
         <p:spPr>
           <a:xfrm>
-            <a:off x="1981047" y="4846320"/>
-            <a:ext cx="8229600" cy="548640"/>
+            <a:off x="1523847" y="3749040"/>
+            <a:ext cx="9144000" cy="548640"/>
           </a:xfrm>
           <a:prstGeom prst="roundRect">
             <a:avLst/>
@@ -7057,14 +7520,14 @@
       </p:sp>
       <p:sp>
         <p:nvSpPr>
-          <p:cNvPr id="12" name="TextBox 11"/>
+          <p:cNvPr id="11" name="TextBox 10"/>
           <p:cNvSpPr txBox="1"/>
           <p:nvPr/>
         </p:nvSpPr>
         <p:spPr>
           <a:xfrm>
-            <a:off x="2255367" y="4919472"/>
-            <a:ext cx="7680960" cy="411480"/>
+            <a:off x="1798167" y="3822192"/>
+            <a:ext cx="8595360" cy="411480"/>
           </a:xfrm>
           <a:prstGeom prst="rect">
             <a:avLst/>
@@ -7086,21 +7549,21 @@
               </a:defRPr>
             </a:pPr>
             <a:r>
-              <a:t>Combined education, technology, and non-dilutive capital into one ecosystem</a:t>
-            </a:r>
-          </a:p>
-        </p:txBody>
-      </p:sp>
-      <p:sp>
-        <p:nvSpPr>
-          <p:cNvPr id="13" name="Rounded Rectangle 12"/>
+              <a:t>Introduced readiness tools that help founders assess, prepare, and decide if and when to raise</a:t>
+            </a:r>
+          </a:p>
+        </p:txBody>
+      </p:sp>
+      <p:sp>
+        <p:nvSpPr>
+          <p:cNvPr id="12" name="Rounded Rectangle 11"/>
           <p:cNvSpPr/>
           <p:nvPr/>
         </p:nvSpPr>
         <p:spPr>
           <a:xfrm>
-            <a:off x="1981047" y="5532120"/>
-            <a:ext cx="8229600" cy="548640"/>
+            <a:off x="1523847" y="4434840"/>
+            <a:ext cx="9144000" cy="548640"/>
           </a:xfrm>
           <a:prstGeom prst="roundRect">
             <a:avLst/>
@@ -7136,14 +7599,14 @@
       </p:sp>
       <p:sp>
         <p:nvSpPr>
-          <p:cNvPr id="14" name="TextBox 13"/>
+          <p:cNvPr id="13" name="TextBox 12"/>
           <p:cNvSpPr txBox="1"/>
           <p:nvPr/>
         </p:nvSpPr>
         <p:spPr>
           <a:xfrm>
-            <a:off x="2255367" y="5605272"/>
-            <a:ext cx="7680960" cy="411480"/>
+            <a:off x="1798167" y="4507992"/>
+            <a:ext cx="8595360" cy="411480"/>
           </a:xfrm>
           <a:prstGeom prst="rect">
             <a:avLst/>
@@ -7166,6 +7629,85 @@
             </a:pPr>
             <a:r>
               <a:t>Served founders, funders, and partners across the U.S. and internationally</a:t>
+            </a:r>
+          </a:p>
+        </p:txBody>
+      </p:sp>
+      <p:sp>
+        <p:nvSpPr>
+          <p:cNvPr id="14" name="Rounded Rectangle 13"/>
+          <p:cNvSpPr/>
+          <p:nvPr/>
+        </p:nvSpPr>
+        <p:spPr>
+          <a:xfrm>
+            <a:off x="1523847" y="5303520"/>
+            <a:ext cx="9144000" cy="640080"/>
+          </a:xfrm>
+          <a:prstGeom prst="roundRect">
+            <a:avLst/>
+          </a:prstGeom>
+          <a:solidFill>
+            <a:srgbClr val="D57028"/>
+          </a:solidFill>
+          <a:ln>
+            <a:noFill/>
+          </a:ln>
+        </p:spPr>
+        <p:style>
+          <a:lnRef idx="1">
+            <a:schemeClr val="accent1"/>
+          </a:lnRef>
+          <a:fillRef idx="3">
+            <a:schemeClr val="accent1"/>
+          </a:fillRef>
+          <a:effectRef idx="2">
+            <a:schemeClr val="accent1"/>
+          </a:effectRef>
+          <a:fontRef idx="minor">
+            <a:schemeClr val="lt1"/>
+          </a:fontRef>
+        </p:style>
+        <p:txBody>
+          <a:bodyPr rtlCol="0" anchor="ctr"/>
+          <a:lstStyle/>
+          <a:p>
+            <a:pPr algn="ctr"/>
+          </a:p>
+        </p:txBody>
+      </p:sp>
+      <p:sp>
+        <p:nvSpPr>
+          <p:cNvPr id="15" name="TextBox 14"/>
+          <p:cNvSpPr txBox="1"/>
+          <p:nvPr/>
+        </p:nvSpPr>
+        <p:spPr>
+          <a:xfrm>
+            <a:off x="1798167" y="5394960"/>
+            <a:ext cx="8595360" cy="457200"/>
+          </a:xfrm>
+          <a:prstGeom prst="rect">
+            <a:avLst/>
+          </a:prstGeom>
+          <a:noFill/>
+        </p:spPr>
+        <p:txBody>
+          <a:bodyPr wrap="square">
+            <a:spAutoFit/>
+          </a:bodyPr>
+          <a:lstStyle/>
+          <a:p>
+            <a:pPr algn="ctr">
+              <a:defRPr sz="1700" b="1">
+                <a:solidFill>
+                  <a:srgbClr val="FFFFFF"/>
+                </a:solidFill>
+                <a:latin typeface="Arial"/>
+              </a:defRPr>
+            </a:pPr>
+            <a:r>
+              <a:t>Core shift:  From "access to capital" → readiness for capital</a:t>
             </a:r>
           </a:p>
         </p:txBody>
@@ -7306,7 +7848,7 @@
               </a:defRPr>
             </a:pPr>
             <a:r>
-              <a:t>Highlights &amp; Impact Numbers</a:t>
+              <a:t>Headline Impact</a:t>
             </a:r>
           </a:p>
         </p:txBody>
@@ -7362,8 +7904,8 @@
         </p:nvSpPr>
         <p:spPr>
           <a:xfrm>
-            <a:off x="495147" y="2468880"/>
-            <a:ext cx="2560320" cy="2011680"/>
+            <a:off x="380847" y="2377440"/>
+            <a:ext cx="2103120" cy="1828800"/>
           </a:xfrm>
           <a:prstGeom prst="roundRect">
             <a:avLst/>
@@ -7405,8 +7947,8 @@
         </p:nvSpPr>
         <p:spPr>
           <a:xfrm>
-            <a:off x="495147" y="2743200"/>
-            <a:ext cx="2560320" cy="822960"/>
+            <a:off x="380847" y="2560320"/>
+            <a:ext cx="2103120" cy="731520"/>
           </a:xfrm>
           <a:prstGeom prst="rect">
             <a:avLst/>
@@ -7420,7 +7962,7 @@
           <a:lstStyle/>
           <a:p>
             <a:pPr algn="ctr">
-              <a:defRPr sz="4800" b="1">
+              <a:defRPr sz="4200" b="1">
                 <a:solidFill>
                   <a:srgbClr val="D57028"/>
                 </a:solidFill>
@@ -7428,7 +7970,7 @@
               </a:defRPr>
             </a:pPr>
             <a:r>
-              <a:t>$5M+</a:t>
+              <a:t>600+</a:t>
             </a:r>
           </a:p>
         </p:txBody>
@@ -7441,8 +7983,8 @@
         </p:nvSpPr>
         <p:spPr>
           <a:xfrm>
-            <a:off x="495147" y="3566160"/>
-            <a:ext cx="2560320" cy="731520"/>
+            <a:off x="380847" y="3291840"/>
+            <a:ext cx="2103120" cy="731520"/>
           </a:xfrm>
           <a:prstGeom prst="rect">
             <a:avLst/>
@@ -7456,7 +7998,7 @@
           <a:lstStyle/>
           <a:p>
             <a:pPr algn="ctr">
-              <a:defRPr sz="1500" b="0">
+              <a:defRPr sz="1300" b="0">
                 <a:solidFill>
                   <a:srgbClr val="F3EDE7"/>
                 </a:solidFill>
@@ -7464,11 +8006,15 @@
               </a:defRPr>
             </a:pPr>
             <a:r>
-              <a:t>Raised by</a:t>
+              <a:t>Members across</a:t>
             </a:r>
             <a:br/>
             <a:r>
-              <a:t>Founders</a:t>
+              <a:t>Explorer, Founder,</a:t>
+            </a:r>
+            <a:br/>
+            <a:r>
+              <a:t>Funder &amp; All-Access</a:t>
             </a:r>
           </a:p>
         </p:txBody>
@@ -7481,8 +8027,8 @@
         </p:nvSpPr>
         <p:spPr>
           <a:xfrm>
-            <a:off x="3375507" y="2468880"/>
-            <a:ext cx="2560320" cy="2011680"/>
+            <a:off x="2712567" y="2377440"/>
+            <a:ext cx="2103120" cy="1828800"/>
           </a:xfrm>
           <a:prstGeom prst="roundRect">
             <a:avLst/>
@@ -7524,8 +8070,8 @@
         </p:nvSpPr>
         <p:spPr>
           <a:xfrm>
-            <a:off x="3375507" y="2743200"/>
-            <a:ext cx="2560320" cy="822960"/>
+            <a:off x="2712567" y="2560320"/>
+            <a:ext cx="2103120" cy="731520"/>
           </a:xfrm>
           <a:prstGeom prst="rect">
             <a:avLst/>
@@ -7539,7 +8085,7 @@
           <a:lstStyle/>
           <a:p>
             <a:pPr algn="ctr">
-              <a:defRPr sz="4800" b="1">
+              <a:defRPr sz="4200" b="1">
                 <a:solidFill>
                   <a:srgbClr val="D57028"/>
                 </a:solidFill>
@@ -7547,7 +8093,7 @@
               </a:defRPr>
             </a:pPr>
             <a:r>
-              <a:t>600</a:t>
+              <a:t>8,000+</a:t>
             </a:r>
           </a:p>
         </p:txBody>
@@ -7560,8 +8106,8 @@
         </p:nvSpPr>
         <p:spPr>
           <a:xfrm>
-            <a:off x="3375507" y="3566160"/>
-            <a:ext cx="2560320" cy="731520"/>
+            <a:off x="2712567" y="3291840"/>
+            <a:ext cx="2103120" cy="731520"/>
           </a:xfrm>
           <a:prstGeom prst="rect">
             <a:avLst/>
@@ -7575,7 +8121,7 @@
           <a:lstStyle/>
           <a:p>
             <a:pPr algn="ctr">
-              <a:defRPr sz="1500" b="0">
+              <a:defRPr sz="1300" b="0">
                 <a:solidFill>
                   <a:srgbClr val="F3EDE7"/>
                 </a:solidFill>
@@ -7583,11 +8129,15 @@
               </a:defRPr>
             </a:pPr>
             <a:r>
-              <a:t>Active App</a:t>
+              <a:t>Email Subscribers</a:t>
             </a:r>
             <a:br/>
             <a:r>
-              <a:t>Members</a:t>
+              <a:t>(from 157 in</a:t>
+            </a:r>
+            <a:br/>
+            <a:r>
+              <a:t>Jan 2025)</a:t>
             </a:r>
           </a:p>
         </p:txBody>
@@ -7600,8 +8150,8 @@
         </p:nvSpPr>
         <p:spPr>
           <a:xfrm>
-            <a:off x="6255867" y="2468880"/>
-            <a:ext cx="2560320" cy="2011680"/>
+            <a:off x="5044287" y="2377440"/>
+            <a:ext cx="2103120" cy="1828800"/>
           </a:xfrm>
           <a:prstGeom prst="roundRect">
             <a:avLst/>
@@ -7643,8 +8193,8 @@
         </p:nvSpPr>
         <p:spPr>
           <a:xfrm>
-            <a:off x="6255867" y="2743200"/>
-            <a:ext cx="2560320" cy="822960"/>
+            <a:off x="5044287" y="2560320"/>
+            <a:ext cx="2103120" cy="731520"/>
           </a:xfrm>
           <a:prstGeom prst="rect">
             <a:avLst/>
@@ -7658,7 +8208,7 @@
           <a:lstStyle/>
           <a:p>
             <a:pPr algn="ctr">
-              <a:defRPr sz="4800" b="1">
+              <a:defRPr sz="4200" b="1">
                 <a:solidFill>
                   <a:srgbClr val="D57028"/>
                 </a:solidFill>
@@ -7666,7 +8216,7 @@
               </a:defRPr>
             </a:pPr>
             <a:r>
-              <a:t>90+</a:t>
+              <a:t>$31,250</a:t>
             </a:r>
           </a:p>
         </p:txBody>
@@ -7679,8 +8229,8 @@
         </p:nvSpPr>
         <p:spPr>
           <a:xfrm>
-            <a:off x="6255867" y="3566160"/>
-            <a:ext cx="2560320" cy="731520"/>
+            <a:off x="5044287" y="3291840"/>
+            <a:ext cx="2103120" cy="731520"/>
           </a:xfrm>
           <a:prstGeom prst="rect">
             <a:avLst/>
@@ -7694,7 +8244,7 @@
           <a:lstStyle/>
           <a:p>
             <a:pPr algn="ctr">
-              <a:defRPr sz="1500" b="0">
+              <a:defRPr sz="1300" b="0">
                 <a:solidFill>
                   <a:srgbClr val="F3EDE7"/>
                 </a:solidFill>
@@ -7702,11 +8252,15 @@
               </a:defRPr>
             </a:pPr>
             <a:r>
-              <a:t>Annual</a:t>
+              <a:t>Grants Deployed to</a:t>
             </a:r>
             <a:br/>
             <a:r>
-              <a:t>Touchpoints</a:t>
+              <a:t>Underrepresented</a:t>
+            </a:r>
+            <a:br/>
+            <a:r>
+              <a:t>Founders</a:t>
             </a:r>
           </a:p>
         </p:txBody>
@@ -7719,8 +8273,8 @@
         </p:nvSpPr>
         <p:spPr>
           <a:xfrm>
-            <a:off x="9136227" y="2468880"/>
-            <a:ext cx="2560320" cy="2011680"/>
+            <a:off x="7376007" y="2377440"/>
+            <a:ext cx="2103120" cy="1828800"/>
           </a:xfrm>
           <a:prstGeom prst="roundRect">
             <a:avLst/>
@@ -7762,8 +8316,8 @@
         </p:nvSpPr>
         <p:spPr>
           <a:xfrm>
-            <a:off x="9136227" y="2743200"/>
-            <a:ext cx="2560320" cy="822960"/>
+            <a:off x="7376007" y="2560320"/>
+            <a:ext cx="2103120" cy="731520"/>
           </a:xfrm>
           <a:prstGeom prst="rect">
             <a:avLst/>
@@ -7777,7 +8331,7 @@
           <a:lstStyle/>
           <a:p>
             <a:pPr algn="ctr">
-              <a:defRPr sz="4800" b="1">
+              <a:defRPr sz="4200" b="1">
                 <a:solidFill>
                   <a:srgbClr val="D57028"/>
                 </a:solidFill>
@@ -7785,7 +8339,7 @@
               </a:defRPr>
             </a:pPr>
             <a:r>
-              <a:t>167X</a:t>
+              <a:t>$5M+</a:t>
             </a:r>
           </a:p>
         </p:txBody>
@@ -7798,8 +8352,8 @@
         </p:nvSpPr>
         <p:spPr>
           <a:xfrm>
-            <a:off x="9136227" y="3566160"/>
-            <a:ext cx="2560320" cy="731520"/>
+            <a:off x="7376007" y="3291840"/>
+            <a:ext cx="2103120" cy="731520"/>
           </a:xfrm>
           <a:prstGeom prst="rect">
             <a:avLst/>
@@ -7813,7 +8367,7 @@
           <a:lstStyle/>
           <a:p>
             <a:pPr algn="ctr">
-              <a:defRPr sz="1500" b="0">
+              <a:defRPr sz="1300" b="0">
                 <a:solidFill>
                   <a:srgbClr val="F3EDE7"/>
                 </a:solidFill>
@@ -7821,25 +8375,72 @@
               </a:defRPr>
             </a:pPr>
             <a:r>
-              <a:t>Return on</a:t>
+              <a:t>Follow-on Capital</a:t>
             </a:r>
             <a:br/>
             <a:r>
-              <a:t>Grants</a:t>
-            </a:r>
-          </a:p>
-        </p:txBody>
-      </p:sp>
-      <p:sp>
-        <p:nvSpPr>
-          <p:cNvPr id="18" name="TextBox 17"/>
+              <a:t>Influenced by</a:t>
+            </a:r>
+            <a:br/>
+            <a:r>
+              <a:t>Supported Founders</a:t>
+            </a:r>
+          </a:p>
+        </p:txBody>
+      </p:sp>
+      <p:sp>
+        <p:nvSpPr>
+          <p:cNvPr id="18" name="Rounded Rectangle 17"/>
+          <p:cNvSpPr/>
+          <p:nvPr/>
+        </p:nvSpPr>
+        <p:spPr>
+          <a:xfrm>
+            <a:off x="9707727" y="2377440"/>
+            <a:ext cx="2103120" cy="1828800"/>
+          </a:xfrm>
+          <a:prstGeom prst="roundRect">
+            <a:avLst/>
+          </a:prstGeom>
+          <a:solidFill>
+            <a:srgbClr val="244A47"/>
+          </a:solidFill>
+          <a:ln>
+            <a:noFill/>
+          </a:ln>
+        </p:spPr>
+        <p:style>
+          <a:lnRef idx="1">
+            <a:schemeClr val="accent1"/>
+          </a:lnRef>
+          <a:fillRef idx="3">
+            <a:schemeClr val="accent1"/>
+          </a:fillRef>
+          <a:effectRef idx="2">
+            <a:schemeClr val="accent1"/>
+          </a:effectRef>
+          <a:fontRef idx="minor">
+            <a:schemeClr val="lt1"/>
+          </a:fontRef>
+        </p:style>
+        <p:txBody>
+          <a:bodyPr rtlCol="0" anchor="ctr"/>
+          <a:lstStyle/>
+          <a:p>
+            <a:pPr algn="ctr"/>
+          </a:p>
+        </p:txBody>
+      </p:sp>
+      <p:sp>
+        <p:nvSpPr>
+          <p:cNvPr id="19" name="TextBox 18"/>
           <p:cNvSpPr txBox="1"/>
           <p:nvPr/>
         </p:nvSpPr>
         <p:spPr>
           <a:xfrm>
-            <a:off x="1828800" y="4937760"/>
-            <a:ext cx="8229600" cy="1097280"/>
+            <a:off x="9707727" y="2560320"/>
+            <a:ext cx="2103120" cy="731520"/>
           </a:xfrm>
           <a:prstGeom prst="rect">
             <a:avLst/>
@@ -7853,7 +8454,43 @@
           <a:lstStyle/>
           <a:p>
             <a:pPr algn="ctr">
-              <a:defRPr sz="1600" b="0">
+              <a:defRPr sz="4200" b="1">
+                <a:solidFill>
+                  <a:srgbClr val="D57028"/>
+                </a:solidFill>
+                <a:latin typeface="Arial"/>
+              </a:defRPr>
+            </a:pPr>
+            <a:r>
+              <a:t>27</a:t>
+            </a:r>
+          </a:p>
+        </p:txBody>
+      </p:sp>
+      <p:sp>
+        <p:nvSpPr>
+          <p:cNvPr id="20" name="TextBox 19"/>
+          <p:cNvSpPr txBox="1"/>
+          <p:nvPr/>
+        </p:nvSpPr>
+        <p:spPr>
+          <a:xfrm>
+            <a:off x="9707727" y="3291840"/>
+            <a:ext cx="2103120" cy="731520"/>
+          </a:xfrm>
+          <a:prstGeom prst="rect">
+            <a:avLst/>
+          </a:prstGeom>
+          <a:noFill/>
+        </p:spPr>
+        <p:txBody>
+          <a:bodyPr wrap="square">
+            <a:spAutoFit/>
+          </a:bodyPr>
+          <a:lstStyle/>
+          <a:p>
+            <a:pPr algn="ctr">
+              <a:defRPr sz="1300" b="0">
                 <a:solidFill>
                   <a:srgbClr val="F3EDE7"/>
                 </a:solidFill>
@@ -7861,7 +8498,47 @@
               </a:defRPr>
             </a:pPr>
             <a:r>
-              <a:t>These numbers represent more than metrics — they represent real founders funded, real investors educated, and real wealth created in underserved communities.</a:t>
+              <a:t>Events Hosted</a:t>
+            </a:r>
+            <a:br/>
+            <a:r>
+              <a:t>Globally</a:t>
+            </a:r>
+          </a:p>
+        </p:txBody>
+      </p:sp>
+      <p:sp>
+        <p:nvSpPr>
+          <p:cNvPr id="21" name="TextBox 20"/>
+          <p:cNvSpPr txBox="1"/>
+          <p:nvPr/>
+        </p:nvSpPr>
+        <p:spPr>
+          <a:xfrm>
+            <a:off x="1828800" y="4754880"/>
+            <a:ext cx="8229600" cy="914400"/>
+          </a:xfrm>
+          <a:prstGeom prst="rect">
+            <a:avLst/>
+          </a:prstGeom>
+          <a:noFill/>
+        </p:spPr>
+        <p:txBody>
+          <a:bodyPr wrap="square">
+            <a:spAutoFit/>
+          </a:bodyPr>
+          <a:lstStyle/>
+          <a:p>
+            <a:pPr algn="ctr">
+              <a:defRPr sz="1500" b="0">
+                <a:solidFill>
+                  <a:srgbClr val="F3EDE7"/>
+                </a:solidFill>
+                <a:latin typeface="Arial"/>
+              </a:defRPr>
+            </a:pPr>
+            <a:r>
+              <a:t>Real founders funded. Real investors educated. Real wealth created in underserved communities.</a:t>
             </a:r>
           </a:p>
         </p:txBody>
@@ -7966,7 +8643,7 @@
               </a:defRPr>
             </a:pPr>
             <a:r>
-              <a:t>GROWTH TRAJECTORY</a:t>
+              <a:t>DATA &amp; TRENDS</a:t>
             </a:r>
           </a:p>
         </p:txBody>
@@ -8002,7 +8679,7 @@
               </a:defRPr>
             </a:pPr>
             <a:r>
-              <a:t>Charts &amp; Trends</a:t>
+              <a:t>Charts &amp; Breakdown</a:t>
             </a:r>
           </a:p>
         </p:txBody>
@@ -8059,8 +8736,8 @@
           <p:nvPr/>
         </p:nvGraphicFramePr>
         <p:xfrm>
-          <a:off x="731520" y="2377440"/>
-          <a:ext cx="5029200" cy="3840480"/>
+          <a:off x="548640" y="2286000"/>
+          <a:ext cx="5303520" cy="3931920"/>
         </p:xfrm>
         <a:graphic>
           <a:graphicData uri="http://schemas.openxmlformats.org/drawingml/2006/chart">
@@ -8077,8 +8754,8 @@
           <p:nvPr/>
         </p:nvGraphicFramePr>
         <p:xfrm>
-          <a:off x="6400800" y="2377440"/>
-          <a:ext cx="5029200" cy="3840480"/>
+          <a:off x="6400800" y="2286000"/>
+          <a:ext cx="5029200" cy="3931920"/>
         </p:xfrm>
         <a:graphic>
           <a:graphicData uri="http://schemas.openxmlformats.org/drawingml/2006/chart">
@@ -8186,7 +8863,7 @@
               </a:defRPr>
             </a:pPr>
             <a:r>
-              <a:t>COMMUNITY</a:t>
+              <a:t>27 TOUCHPOINTS</a:t>
             </a:r>
           </a:p>
         </p:txBody>
@@ -8222,7 +8899,7 @@
               </a:defRPr>
             </a:pPr>
             <a:r>
-              <a:t>Events &amp; Gatherings</a:t>
+              <a:t>Events — Virtual (13)</a:t>
             </a:r>
           </a:p>
         </p:txBody>
@@ -8278,8 +8955,8 @@
         </p:nvSpPr>
         <p:spPr>
           <a:xfrm>
-            <a:off x="563727" y="2377440"/>
-            <a:ext cx="2560320" cy="3657600"/>
+            <a:off x="548640" y="2286000"/>
+            <a:ext cx="5029200" cy="438912"/>
           </a:xfrm>
           <a:prstGeom prst="roundRect">
             <a:avLst/>
@@ -8315,66 +8992,14 @@
       </p:sp>
       <p:sp>
         <p:nvSpPr>
-          <p:cNvPr id="7" name="Rounded Rectangle 6"/>
-          <p:cNvSpPr/>
-          <p:nvPr/>
-        </p:nvSpPr>
-        <p:spPr>
-          <a:xfrm>
-            <a:off x="1295247" y="2651760"/>
-            <a:ext cx="1097280" cy="411480"/>
-          </a:xfrm>
-          <a:prstGeom prst="roundRect">
-            <a:avLst/>
-          </a:prstGeom>
-          <a:solidFill>
-            <a:srgbClr val="D57028"/>
-          </a:solidFill>
-          <a:ln>
-            <a:noFill/>
-          </a:ln>
-        </p:spPr>
-        <p:style>
-          <a:lnRef idx="1">
-            <a:schemeClr val="accent1"/>
-          </a:lnRef>
-          <a:fillRef idx="3">
-            <a:schemeClr val="accent1"/>
-          </a:fillRef>
-          <a:effectRef idx="2">
-            <a:schemeClr val="accent1"/>
-          </a:effectRef>
-          <a:fontRef idx="minor">
-            <a:schemeClr val="lt1"/>
-          </a:fontRef>
-        </p:style>
-        <p:txBody>
-          <a:bodyPr rtlCol="0" anchor="ctr"/>
-          <a:lstStyle/>
-          <a:p>
-            <a:pPr algn="ctr">
-              <a:defRPr sz="1100" b="1">
-                <a:solidFill>
-                  <a:srgbClr val="FFFFFF"/>
-                </a:solidFill>
-              </a:defRPr>
-            </a:pPr>
-            <a:r>
-              <a:t>Q1 2025</a:t>
-            </a:r>
-          </a:p>
-        </p:txBody>
-      </p:sp>
-      <p:sp>
-        <p:nvSpPr>
-          <p:cNvPr id="8" name="TextBox 7"/>
+          <p:cNvPr id="7" name="TextBox 6"/>
           <p:cNvSpPr txBox="1"/>
           <p:nvPr/>
         </p:nvSpPr>
         <p:spPr>
           <a:xfrm>
-            <a:off x="746607" y="3291840"/>
-            <a:ext cx="2194560" cy="822960"/>
+            <a:off x="731520" y="2340864"/>
+            <a:ext cx="4663440" cy="347472"/>
           </a:xfrm>
           <a:prstGeom prst="rect">
             <a:avLst/>
@@ -8387,70 +9012,30 @@
           </a:bodyPr>
           <a:lstStyle/>
           <a:p>
-            <a:pPr algn="ctr">
-              <a:defRPr sz="1800" b="1">
-                <a:solidFill>
-                  <a:srgbClr val="FFFFFF"/>
+            <a:pPr algn="l">
+              <a:defRPr sz="1200" b="0">
+                <a:solidFill>
+                  <a:srgbClr val="F3EDE7"/>
                 </a:solidFill>
                 <a:latin typeface="Arial"/>
               </a:defRPr>
             </a:pPr>
             <a:r>
-              <a:t>Founder Pitch Night</a:t>
-            </a:r>
-          </a:p>
-        </p:txBody>
-      </p:sp>
-      <p:sp>
-        <p:nvSpPr>
-          <p:cNvPr id="9" name="TextBox 8"/>
-          <p:cNvSpPr txBox="1"/>
-          <p:nvPr/>
-        </p:nvSpPr>
-        <p:spPr>
-          <a:xfrm>
-            <a:off x="746607" y="4389120"/>
-            <a:ext cx="2194560" cy="1280160"/>
-          </a:xfrm>
-          <a:prstGeom prst="rect">
-            <a:avLst/>
-          </a:prstGeom>
-          <a:noFill/>
-        </p:spPr>
-        <p:txBody>
-          <a:bodyPr wrap="square">
-            <a:spAutoFit/>
-          </a:bodyPr>
-          <a:lstStyle/>
-          <a:p>
-            <a:pPr algn="ctr">
-              <a:defRPr sz="1300" b="0">
-                <a:solidFill>
-                  <a:srgbClr val="F3EDE7"/>
-                </a:solidFill>
-                <a:latin typeface="Arial"/>
-              </a:defRPr>
-            </a:pPr>
-            <a:r>
-              <a:t>Live pitch event connecting founders</a:t>
-            </a:r>
-            <a:br/>
-            <a:r>
-              <a:t>with angel investors and VCs.</a:t>
-            </a:r>
-          </a:p>
-        </p:txBody>
-      </p:sp>
-      <p:sp>
-        <p:nvSpPr>
-          <p:cNvPr id="10" name="Rounded Rectangle 9"/>
+              <a:t>Virtual Pitch for $1,000 — Sep 25</a:t>
+            </a:r>
+          </a:p>
+        </p:txBody>
+      </p:sp>
+      <p:sp>
+        <p:nvSpPr>
+          <p:cNvPr id="8" name="Rounded Rectangle 7"/>
           <p:cNvSpPr/>
           <p:nvPr/>
         </p:nvSpPr>
         <p:spPr>
           <a:xfrm>
-            <a:off x="3398367" y="2377440"/>
-            <a:ext cx="2560320" cy="3657600"/>
+            <a:off x="548640" y="2816352"/>
+            <a:ext cx="5029200" cy="438912"/>
           </a:xfrm>
           <a:prstGeom prst="roundRect">
             <a:avLst/>
@@ -8486,66 +9071,14 @@
       </p:sp>
       <p:sp>
         <p:nvSpPr>
-          <p:cNvPr id="11" name="Rounded Rectangle 10"/>
-          <p:cNvSpPr/>
-          <p:nvPr/>
-        </p:nvSpPr>
-        <p:spPr>
-          <a:xfrm>
-            <a:off x="4129887" y="2651760"/>
-            <a:ext cx="1097280" cy="411480"/>
-          </a:xfrm>
-          <a:prstGeom prst="roundRect">
-            <a:avLst/>
-          </a:prstGeom>
-          <a:solidFill>
-            <a:srgbClr val="D57028"/>
-          </a:solidFill>
-          <a:ln>
-            <a:noFill/>
-          </a:ln>
-        </p:spPr>
-        <p:style>
-          <a:lnRef idx="1">
-            <a:schemeClr val="accent1"/>
-          </a:lnRef>
-          <a:fillRef idx="3">
-            <a:schemeClr val="accent1"/>
-          </a:fillRef>
-          <a:effectRef idx="2">
-            <a:schemeClr val="accent1"/>
-          </a:effectRef>
-          <a:fontRef idx="minor">
-            <a:schemeClr val="lt1"/>
-          </a:fontRef>
-        </p:style>
-        <p:txBody>
-          <a:bodyPr rtlCol="0" anchor="ctr"/>
-          <a:lstStyle/>
-          <a:p>
-            <a:pPr algn="ctr">
-              <a:defRPr sz="1100" b="1">
-                <a:solidFill>
-                  <a:srgbClr val="FFFFFF"/>
-                </a:solidFill>
-              </a:defRPr>
-            </a:pPr>
-            <a:r>
-              <a:t>Q2 2025</a:t>
-            </a:r>
-          </a:p>
-        </p:txBody>
-      </p:sp>
-      <p:sp>
-        <p:nvSpPr>
-          <p:cNvPr id="12" name="TextBox 11"/>
+          <p:cNvPr id="9" name="TextBox 8"/>
           <p:cNvSpPr txBox="1"/>
           <p:nvPr/>
         </p:nvSpPr>
         <p:spPr>
           <a:xfrm>
-            <a:off x="3581247" y="3291840"/>
-            <a:ext cx="2194560" cy="822960"/>
+            <a:off x="731520" y="2871216"/>
+            <a:ext cx="4663440" cy="347472"/>
           </a:xfrm>
           <a:prstGeom prst="rect">
             <a:avLst/>
@@ -8558,74 +9091,30 @@
           </a:bodyPr>
           <a:lstStyle/>
           <a:p>
-            <a:pPr algn="ctr">
-              <a:defRPr sz="1800" b="1">
-                <a:solidFill>
-                  <a:srgbClr val="FFFFFF"/>
+            <a:pPr algn="l">
+              <a:defRPr sz="1200" b="0">
+                <a:solidFill>
+                  <a:srgbClr val="F3EDE7"/>
                 </a:solidFill>
                 <a:latin typeface="Arial"/>
               </a:defRPr>
             </a:pPr>
             <a:r>
-              <a:t>Funder Education</a:t>
-            </a:r>
-            <a:br/>
-            <a:r>
-              <a:t>Series</a:t>
-            </a:r>
-          </a:p>
-        </p:txBody>
-      </p:sp>
-      <p:sp>
-        <p:nvSpPr>
-          <p:cNvPr id="13" name="TextBox 12"/>
-          <p:cNvSpPr txBox="1"/>
-          <p:nvPr/>
-        </p:nvSpPr>
-        <p:spPr>
-          <a:xfrm>
-            <a:off x="3581247" y="4389120"/>
-            <a:ext cx="2194560" cy="1280160"/>
-          </a:xfrm>
-          <a:prstGeom prst="rect">
-            <a:avLst/>
-          </a:prstGeom>
-          <a:noFill/>
-        </p:spPr>
-        <p:txBody>
-          <a:bodyPr wrap="square">
-            <a:spAutoFit/>
-          </a:bodyPr>
-          <a:lstStyle/>
-          <a:p>
-            <a:pPr algn="ctr">
-              <a:defRPr sz="1300" b="0">
-                <a:solidFill>
-                  <a:srgbClr val="F3EDE7"/>
-                </a:solidFill>
-                <a:latin typeface="Arial"/>
-              </a:defRPr>
-            </a:pPr>
-            <a:r>
-              <a:t>Workshop series teaching new investors</a:t>
-            </a:r>
-            <a:br/>
-            <a:r>
-              <a:t>how to evaluate early-stage deals.</a:t>
-            </a:r>
-          </a:p>
-        </p:txBody>
-      </p:sp>
-      <p:sp>
-        <p:nvSpPr>
-          <p:cNvPr id="14" name="Rounded Rectangle 13"/>
+              <a:t>Virtual Pitch for $1,000 — Oct 30</a:t>
+            </a:r>
+          </a:p>
+        </p:txBody>
+      </p:sp>
+      <p:sp>
+        <p:nvSpPr>
+          <p:cNvPr id="10" name="Rounded Rectangle 9"/>
           <p:cNvSpPr/>
           <p:nvPr/>
         </p:nvSpPr>
         <p:spPr>
           <a:xfrm>
-            <a:off x="6233007" y="2377440"/>
-            <a:ext cx="2560320" cy="3657600"/>
+            <a:off x="548640" y="3346704"/>
+            <a:ext cx="5029200" cy="438912"/>
           </a:xfrm>
           <a:prstGeom prst="roundRect">
             <a:avLst/>
@@ -8661,66 +9150,14 @@
       </p:sp>
       <p:sp>
         <p:nvSpPr>
-          <p:cNvPr id="15" name="Rounded Rectangle 14"/>
-          <p:cNvSpPr/>
-          <p:nvPr/>
-        </p:nvSpPr>
-        <p:spPr>
-          <a:xfrm>
-            <a:off x="6964527" y="2651760"/>
-            <a:ext cx="1097280" cy="411480"/>
-          </a:xfrm>
-          <a:prstGeom prst="roundRect">
-            <a:avLst/>
-          </a:prstGeom>
-          <a:solidFill>
-            <a:srgbClr val="D57028"/>
-          </a:solidFill>
-          <a:ln>
-            <a:noFill/>
-          </a:ln>
-        </p:spPr>
-        <p:style>
-          <a:lnRef idx="1">
-            <a:schemeClr val="accent1"/>
-          </a:lnRef>
-          <a:fillRef idx="3">
-            <a:schemeClr val="accent1"/>
-          </a:fillRef>
-          <a:effectRef idx="2">
-            <a:schemeClr val="accent1"/>
-          </a:effectRef>
-          <a:fontRef idx="minor">
-            <a:schemeClr val="lt1"/>
-          </a:fontRef>
-        </p:style>
-        <p:txBody>
-          <a:bodyPr rtlCol="0" anchor="ctr"/>
-          <a:lstStyle/>
-          <a:p>
-            <a:pPr algn="ctr">
-              <a:defRPr sz="1100" b="1">
-                <a:solidFill>
-                  <a:srgbClr val="FFFFFF"/>
-                </a:solidFill>
-              </a:defRPr>
-            </a:pPr>
-            <a:r>
-              <a:t>Q3 2025</a:t>
-            </a:r>
-          </a:p>
-        </p:txBody>
-      </p:sp>
-      <p:sp>
-        <p:nvSpPr>
-          <p:cNvPr id="16" name="TextBox 15"/>
+          <p:cNvPr id="11" name="TextBox 10"/>
           <p:cNvSpPr txBox="1"/>
           <p:nvPr/>
         </p:nvSpPr>
         <p:spPr>
           <a:xfrm>
-            <a:off x="6415887" y="3291840"/>
-            <a:ext cx="2194560" cy="822960"/>
+            <a:off x="731520" y="3401568"/>
+            <a:ext cx="4663440" cy="347472"/>
           </a:xfrm>
           <a:prstGeom prst="rect">
             <a:avLst/>
@@ -8733,74 +9170,30 @@
           </a:bodyPr>
           <a:lstStyle/>
           <a:p>
-            <a:pPr algn="ctr">
-              <a:defRPr sz="1800" b="1">
-                <a:solidFill>
-                  <a:srgbClr val="FFFFFF"/>
+            <a:pPr algn="l">
+              <a:defRPr sz="1200" b="0">
+                <a:solidFill>
+                  <a:srgbClr val="F3EDE7"/>
                 </a:solidFill>
                 <a:latin typeface="Arial"/>
               </a:defRPr>
             </a:pPr>
             <a:r>
-              <a:t>Annual Impact</a:t>
-            </a:r>
-            <a:br/>
-            <a:r>
-              <a:t>Summit</a:t>
-            </a:r>
-          </a:p>
-        </p:txBody>
-      </p:sp>
-      <p:sp>
-        <p:nvSpPr>
-          <p:cNvPr id="17" name="TextBox 16"/>
-          <p:cNvSpPr txBox="1"/>
-          <p:nvPr/>
-        </p:nvSpPr>
-        <p:spPr>
-          <a:xfrm>
-            <a:off x="6415887" y="4389120"/>
-            <a:ext cx="2194560" cy="1280160"/>
-          </a:xfrm>
-          <a:prstGeom prst="rect">
-            <a:avLst/>
-          </a:prstGeom>
-          <a:noFill/>
-        </p:spPr>
-        <p:txBody>
-          <a:bodyPr wrap="square">
-            <a:spAutoFit/>
-          </a:bodyPr>
-          <a:lstStyle/>
-          <a:p>
-            <a:pPr algn="ctr">
-              <a:defRPr sz="1300" b="0">
-                <a:solidFill>
-                  <a:srgbClr val="F3EDE7"/>
-                </a:solidFill>
-                <a:latin typeface="Arial"/>
-              </a:defRPr>
-            </a:pPr>
-            <a:r>
-              <a:t>Flagship event bringing members</a:t>
-            </a:r>
-            <a:br/>
-            <a:r>
-              <a:t>together for networking and learning.</a:t>
-            </a:r>
-          </a:p>
-        </p:txBody>
-      </p:sp>
-      <p:sp>
-        <p:nvSpPr>
-          <p:cNvPr id="18" name="Rounded Rectangle 17"/>
+              <a:t>Virtual Pitch Competition (CPG) — Nov 20</a:t>
+            </a:r>
+          </a:p>
+        </p:txBody>
+      </p:sp>
+      <p:sp>
+        <p:nvSpPr>
+          <p:cNvPr id="12" name="Rounded Rectangle 11"/>
           <p:cNvSpPr/>
           <p:nvPr/>
         </p:nvSpPr>
         <p:spPr>
           <a:xfrm>
-            <a:off x="9067647" y="2377440"/>
-            <a:ext cx="2560320" cy="3657600"/>
+            <a:off x="548640" y="3877056"/>
+            <a:ext cx="5029200" cy="438912"/>
           </a:xfrm>
           <a:prstGeom prst="roundRect">
             <a:avLst/>
@@ -8836,20 +9229,56 @@
       </p:sp>
       <p:sp>
         <p:nvSpPr>
-          <p:cNvPr id="19" name="Rounded Rectangle 18"/>
+          <p:cNvPr id="13" name="TextBox 12"/>
+          <p:cNvSpPr txBox="1"/>
+          <p:nvPr/>
+        </p:nvSpPr>
+        <p:spPr>
+          <a:xfrm>
+            <a:off x="731520" y="3931920"/>
+            <a:ext cx="4663440" cy="347472"/>
+          </a:xfrm>
+          <a:prstGeom prst="rect">
+            <a:avLst/>
+          </a:prstGeom>
+          <a:noFill/>
+        </p:spPr>
+        <p:txBody>
+          <a:bodyPr wrap="square">
+            <a:spAutoFit/>
+          </a:bodyPr>
+          <a:lstStyle/>
+          <a:p>
+            <a:pPr algn="l">
+              <a:defRPr sz="1200" b="0">
+                <a:solidFill>
+                  <a:srgbClr val="F3EDE7"/>
+                </a:solidFill>
+                <a:latin typeface="Arial"/>
+              </a:defRPr>
+            </a:pPr>
+            <a:r>
+              <a:t>Pitch Prep with Amiah — Oct 23</a:t>
+            </a:r>
+          </a:p>
+        </p:txBody>
+      </p:sp>
+      <p:sp>
+        <p:nvSpPr>
+          <p:cNvPr id="14" name="Rounded Rectangle 13"/>
           <p:cNvSpPr/>
           <p:nvPr/>
         </p:nvSpPr>
         <p:spPr>
           <a:xfrm>
-            <a:off x="9799167" y="2651760"/>
-            <a:ext cx="1097280" cy="411480"/>
+            <a:off x="548640" y="4407408"/>
+            <a:ext cx="5029200" cy="438912"/>
           </a:xfrm>
           <a:prstGeom prst="roundRect">
             <a:avLst/>
           </a:prstGeom>
           <a:solidFill>
-            <a:srgbClr val="D57028"/>
+            <a:srgbClr val="1B3533"/>
           </a:solidFill>
           <a:ln>
             <a:noFill/>
@@ -8873,29 +9302,20 @@
           <a:bodyPr rtlCol="0" anchor="ctr"/>
           <a:lstStyle/>
           <a:p>
-            <a:pPr algn="ctr">
-              <a:defRPr sz="1100" b="1">
-                <a:solidFill>
-                  <a:srgbClr val="FFFFFF"/>
-                </a:solidFill>
-              </a:defRPr>
-            </a:pPr>
-            <a:r>
-              <a:t>Q4 2025</a:t>
-            </a:r>
-          </a:p>
-        </p:txBody>
-      </p:sp>
-      <p:sp>
-        <p:nvSpPr>
-          <p:cNvPr id="20" name="TextBox 19"/>
+            <a:pPr algn="ctr"/>
+          </a:p>
+        </p:txBody>
+      </p:sp>
+      <p:sp>
+        <p:nvSpPr>
+          <p:cNvPr id="15" name="TextBox 14"/>
           <p:cNvSpPr txBox="1"/>
           <p:nvPr/>
         </p:nvSpPr>
         <p:spPr>
           <a:xfrm>
-            <a:off x="9250527" y="3291840"/>
-            <a:ext cx="2194560" cy="822960"/>
+            <a:off x="731520" y="4462272"/>
+            <a:ext cx="4663440" cy="347472"/>
           </a:xfrm>
           <a:prstGeom prst="rect">
             <a:avLst/>
@@ -8908,30 +9328,73 @@
           </a:bodyPr>
           <a:lstStyle/>
           <a:p>
-            <a:pPr algn="ctr">
-              <a:defRPr sz="1800" b="1">
-                <a:solidFill>
-                  <a:srgbClr val="FFFFFF"/>
+            <a:pPr algn="l">
+              <a:defRPr sz="1200" b="0">
+                <a:solidFill>
+                  <a:srgbClr val="F3EDE7"/>
                 </a:solidFill>
                 <a:latin typeface="Arial"/>
               </a:defRPr>
             </a:pPr>
             <a:r>
-              <a:t>Demo Day</a:t>
-            </a:r>
-          </a:p>
-        </p:txBody>
-      </p:sp>
-      <p:sp>
-        <p:nvSpPr>
-          <p:cNvPr id="21" name="TextBox 20"/>
+              <a:t>Practice Your Pitch with Sarah Anto — Aug 12</a:t>
+            </a:r>
+          </a:p>
+        </p:txBody>
+      </p:sp>
+      <p:sp>
+        <p:nvSpPr>
+          <p:cNvPr id="16" name="Rounded Rectangle 15"/>
+          <p:cNvSpPr/>
+          <p:nvPr/>
+        </p:nvSpPr>
+        <p:spPr>
+          <a:xfrm>
+            <a:off x="548640" y="4937760"/>
+            <a:ext cx="5029200" cy="438912"/>
+          </a:xfrm>
+          <a:prstGeom prst="roundRect">
+            <a:avLst/>
+          </a:prstGeom>
+          <a:solidFill>
+            <a:srgbClr val="1B3533"/>
+          </a:solidFill>
+          <a:ln>
+            <a:noFill/>
+          </a:ln>
+        </p:spPr>
+        <p:style>
+          <a:lnRef idx="1">
+            <a:schemeClr val="accent1"/>
+          </a:lnRef>
+          <a:fillRef idx="3">
+            <a:schemeClr val="accent1"/>
+          </a:fillRef>
+          <a:effectRef idx="2">
+            <a:schemeClr val="accent1"/>
+          </a:effectRef>
+          <a:fontRef idx="minor">
+            <a:schemeClr val="lt1"/>
+          </a:fontRef>
+        </p:style>
+        <p:txBody>
+          <a:bodyPr rtlCol="0" anchor="ctr"/>
+          <a:lstStyle/>
+          <a:p>
+            <a:pPr algn="ctr"/>
+          </a:p>
+        </p:txBody>
+      </p:sp>
+      <p:sp>
+        <p:nvSpPr>
+          <p:cNvPr id="17" name="TextBox 16"/>
           <p:cNvSpPr txBox="1"/>
           <p:nvPr/>
         </p:nvSpPr>
         <p:spPr>
           <a:xfrm>
-            <a:off x="9250527" y="4389120"/>
-            <a:ext cx="2194560" cy="1280160"/>
+            <a:off x="731520" y="4992624"/>
+            <a:ext cx="4663440" cy="347472"/>
           </a:xfrm>
           <a:prstGeom prst="rect">
             <a:avLst/>
@@ -8944,8 +9407,8 @@
           </a:bodyPr>
           <a:lstStyle/>
           <a:p>
-            <a:pPr algn="ctr">
-              <a:defRPr sz="1300" b="0">
+            <a:pPr algn="l">
+              <a:defRPr sz="1200" b="0">
                 <a:solidFill>
                   <a:srgbClr val="F3EDE7"/>
                 </a:solidFill>
@@ -8953,11 +9416,639 @@
               </a:defRPr>
             </a:pPr>
             <a:r>
-              <a:t>Showcasing top portfolio companies</a:t>
-            </a:r>
-            <a:br/>
-            <a:r>
-              <a:t>to a curated investor audience.</a:t>
+              <a:t>Build Your 2026 Pitch Strategy (Dana Ammons) — Dec 11</a:t>
+            </a:r>
+          </a:p>
+        </p:txBody>
+      </p:sp>
+      <p:sp>
+        <p:nvSpPr>
+          <p:cNvPr id="18" name="Rounded Rectangle 17"/>
+          <p:cNvSpPr/>
+          <p:nvPr/>
+        </p:nvSpPr>
+        <p:spPr>
+          <a:xfrm>
+            <a:off x="548640" y="5468112"/>
+            <a:ext cx="5029200" cy="438912"/>
+          </a:xfrm>
+          <a:prstGeom prst="roundRect">
+            <a:avLst/>
+          </a:prstGeom>
+          <a:solidFill>
+            <a:srgbClr val="1B3533"/>
+          </a:solidFill>
+          <a:ln>
+            <a:noFill/>
+          </a:ln>
+        </p:spPr>
+        <p:style>
+          <a:lnRef idx="1">
+            <a:schemeClr val="accent1"/>
+          </a:lnRef>
+          <a:fillRef idx="3">
+            <a:schemeClr val="accent1"/>
+          </a:fillRef>
+          <a:effectRef idx="2">
+            <a:schemeClr val="accent1"/>
+          </a:effectRef>
+          <a:fontRef idx="minor">
+            <a:schemeClr val="lt1"/>
+          </a:fontRef>
+        </p:style>
+        <p:txBody>
+          <a:bodyPr rtlCol="0" anchor="ctr"/>
+          <a:lstStyle/>
+          <a:p>
+            <a:pPr algn="ctr"/>
+          </a:p>
+        </p:txBody>
+      </p:sp>
+      <p:sp>
+        <p:nvSpPr>
+          <p:cNvPr id="19" name="TextBox 18"/>
+          <p:cNvSpPr txBox="1"/>
+          <p:nvPr/>
+        </p:nvSpPr>
+        <p:spPr>
+          <a:xfrm>
+            <a:off x="731520" y="5522976"/>
+            <a:ext cx="4663440" cy="347472"/>
+          </a:xfrm>
+          <a:prstGeom prst="rect">
+            <a:avLst/>
+          </a:prstGeom>
+          <a:noFill/>
+        </p:spPr>
+        <p:txBody>
+          <a:bodyPr wrap="square">
+            <a:spAutoFit/>
+          </a:bodyPr>
+          <a:lstStyle/>
+          <a:p>
+            <a:pPr algn="l">
+              <a:defRPr sz="1200" b="0">
+                <a:solidFill>
+                  <a:srgbClr val="F3EDE7"/>
+                </a:solidFill>
+                <a:latin typeface="Arial"/>
+              </a:defRPr>
+            </a:pPr>
+            <a:r>
+              <a:t>Private Markets 101 (Part 1) — Sep 9</a:t>
+            </a:r>
+          </a:p>
+        </p:txBody>
+      </p:sp>
+      <p:sp>
+        <p:nvSpPr>
+          <p:cNvPr id="20" name="Rounded Rectangle 19"/>
+          <p:cNvSpPr/>
+          <p:nvPr/>
+        </p:nvSpPr>
+        <p:spPr>
+          <a:xfrm>
+            <a:off x="6217920" y="2286000"/>
+            <a:ext cx="5029200" cy="438912"/>
+          </a:xfrm>
+          <a:prstGeom prst="roundRect">
+            <a:avLst/>
+          </a:prstGeom>
+          <a:solidFill>
+            <a:srgbClr val="1B3533"/>
+          </a:solidFill>
+          <a:ln>
+            <a:noFill/>
+          </a:ln>
+        </p:spPr>
+        <p:style>
+          <a:lnRef idx="1">
+            <a:schemeClr val="accent1"/>
+          </a:lnRef>
+          <a:fillRef idx="3">
+            <a:schemeClr val="accent1"/>
+          </a:fillRef>
+          <a:effectRef idx="2">
+            <a:schemeClr val="accent1"/>
+          </a:effectRef>
+          <a:fontRef idx="minor">
+            <a:schemeClr val="lt1"/>
+          </a:fontRef>
+        </p:style>
+        <p:txBody>
+          <a:bodyPr rtlCol="0" anchor="ctr"/>
+          <a:lstStyle/>
+          <a:p>
+            <a:pPr algn="ctr"/>
+          </a:p>
+        </p:txBody>
+      </p:sp>
+      <p:sp>
+        <p:nvSpPr>
+          <p:cNvPr id="21" name="TextBox 20"/>
+          <p:cNvSpPr txBox="1"/>
+          <p:nvPr/>
+        </p:nvSpPr>
+        <p:spPr>
+          <a:xfrm>
+            <a:off x="6400800" y="2340864"/>
+            <a:ext cx="4663440" cy="347472"/>
+          </a:xfrm>
+          <a:prstGeom prst="rect">
+            <a:avLst/>
+          </a:prstGeom>
+          <a:noFill/>
+        </p:spPr>
+        <p:txBody>
+          <a:bodyPr wrap="square">
+            <a:spAutoFit/>
+          </a:bodyPr>
+          <a:lstStyle/>
+          <a:p>
+            <a:pPr algn="l">
+              <a:defRPr sz="1200" b="0">
+                <a:solidFill>
+                  <a:srgbClr val="F3EDE7"/>
+                </a:solidFill>
+                <a:latin typeface="Arial"/>
+              </a:defRPr>
+            </a:pPr>
+            <a:r>
+              <a:t>Demystifying CDFI Funding with Coleman — Oct 14</a:t>
+            </a:r>
+          </a:p>
+        </p:txBody>
+      </p:sp>
+      <p:sp>
+        <p:nvSpPr>
+          <p:cNvPr id="22" name="Rounded Rectangle 21"/>
+          <p:cNvSpPr/>
+          <p:nvPr/>
+        </p:nvSpPr>
+        <p:spPr>
+          <a:xfrm>
+            <a:off x="6217920" y="2816352"/>
+            <a:ext cx="5029200" cy="438912"/>
+          </a:xfrm>
+          <a:prstGeom prst="roundRect">
+            <a:avLst/>
+          </a:prstGeom>
+          <a:solidFill>
+            <a:srgbClr val="1B3533"/>
+          </a:solidFill>
+          <a:ln>
+            <a:noFill/>
+          </a:ln>
+        </p:spPr>
+        <p:style>
+          <a:lnRef idx="1">
+            <a:schemeClr val="accent1"/>
+          </a:lnRef>
+          <a:fillRef idx="3">
+            <a:schemeClr val="accent1"/>
+          </a:fillRef>
+          <a:effectRef idx="2">
+            <a:schemeClr val="accent1"/>
+          </a:effectRef>
+          <a:fontRef idx="minor">
+            <a:schemeClr val="lt1"/>
+          </a:fontRef>
+        </p:style>
+        <p:txBody>
+          <a:bodyPr rtlCol="0" anchor="ctr"/>
+          <a:lstStyle/>
+          <a:p>
+            <a:pPr algn="ctr"/>
+          </a:p>
+        </p:txBody>
+      </p:sp>
+      <p:sp>
+        <p:nvSpPr>
+          <p:cNvPr id="23" name="TextBox 22"/>
+          <p:cNvSpPr txBox="1"/>
+          <p:nvPr/>
+        </p:nvSpPr>
+        <p:spPr>
+          <a:xfrm>
+            <a:off x="6400800" y="2871216"/>
+            <a:ext cx="4663440" cy="347472"/>
+          </a:xfrm>
+          <a:prstGeom prst="rect">
+            <a:avLst/>
+          </a:prstGeom>
+          <a:noFill/>
+        </p:spPr>
+        <p:txBody>
+          <a:bodyPr wrap="square">
+            <a:spAutoFit/>
+          </a:bodyPr>
+          <a:lstStyle/>
+          <a:p>
+            <a:pPr algn="l">
+              <a:defRPr sz="1200" b="0">
+                <a:solidFill>
+                  <a:srgbClr val="F3EDE7"/>
+                </a:solidFill>
+                <a:latin typeface="Arial"/>
+              </a:defRPr>
+            </a:pPr>
+            <a:r>
+              <a:t>Ask an Angel — Jul 31</a:t>
+            </a:r>
+          </a:p>
+        </p:txBody>
+      </p:sp>
+      <p:sp>
+        <p:nvSpPr>
+          <p:cNvPr id="24" name="Rounded Rectangle 23"/>
+          <p:cNvSpPr/>
+          <p:nvPr/>
+        </p:nvSpPr>
+        <p:spPr>
+          <a:xfrm>
+            <a:off x="6217920" y="3346704"/>
+            <a:ext cx="5029200" cy="438912"/>
+          </a:xfrm>
+          <a:prstGeom prst="roundRect">
+            <a:avLst/>
+          </a:prstGeom>
+          <a:solidFill>
+            <a:srgbClr val="1B3533"/>
+          </a:solidFill>
+          <a:ln>
+            <a:noFill/>
+          </a:ln>
+        </p:spPr>
+        <p:style>
+          <a:lnRef idx="1">
+            <a:schemeClr val="accent1"/>
+          </a:lnRef>
+          <a:fillRef idx="3">
+            <a:schemeClr val="accent1"/>
+          </a:fillRef>
+          <a:effectRef idx="2">
+            <a:schemeClr val="accent1"/>
+          </a:effectRef>
+          <a:fontRef idx="minor">
+            <a:schemeClr val="lt1"/>
+          </a:fontRef>
+        </p:style>
+        <p:txBody>
+          <a:bodyPr rtlCol="0" anchor="ctr"/>
+          <a:lstStyle/>
+          <a:p>
+            <a:pPr algn="ctr"/>
+          </a:p>
+        </p:txBody>
+      </p:sp>
+      <p:sp>
+        <p:nvSpPr>
+          <p:cNvPr id="25" name="TextBox 24"/>
+          <p:cNvSpPr txBox="1"/>
+          <p:nvPr/>
+        </p:nvSpPr>
+        <p:spPr>
+          <a:xfrm>
+            <a:off x="6400800" y="3401568"/>
+            <a:ext cx="4663440" cy="347472"/>
+          </a:xfrm>
+          <a:prstGeom prst="rect">
+            <a:avLst/>
+          </a:prstGeom>
+          <a:noFill/>
+        </p:spPr>
+        <p:txBody>
+          <a:bodyPr wrap="square">
+            <a:spAutoFit/>
+          </a:bodyPr>
+          <a:lstStyle/>
+          <a:p>
+            <a:pPr algn="l">
+              <a:defRPr sz="1200" b="0">
+                <a:solidFill>
+                  <a:srgbClr val="F3EDE7"/>
+                </a:solidFill>
+                <a:latin typeface="Arial"/>
+              </a:defRPr>
+            </a:pPr>
+            <a:r>
+              <a:t>Preparing to Raise Capital with Confidence — Sep 4</a:t>
+            </a:r>
+          </a:p>
+        </p:txBody>
+      </p:sp>
+      <p:sp>
+        <p:nvSpPr>
+          <p:cNvPr id="26" name="Rounded Rectangle 25"/>
+          <p:cNvSpPr/>
+          <p:nvPr/>
+        </p:nvSpPr>
+        <p:spPr>
+          <a:xfrm>
+            <a:off x="6217920" y="3877056"/>
+            <a:ext cx="5029200" cy="438912"/>
+          </a:xfrm>
+          <a:prstGeom prst="roundRect">
+            <a:avLst/>
+          </a:prstGeom>
+          <a:solidFill>
+            <a:srgbClr val="1B3533"/>
+          </a:solidFill>
+          <a:ln>
+            <a:noFill/>
+          </a:ln>
+        </p:spPr>
+        <p:style>
+          <a:lnRef idx="1">
+            <a:schemeClr val="accent1"/>
+          </a:lnRef>
+          <a:fillRef idx="3">
+            <a:schemeClr val="accent1"/>
+          </a:fillRef>
+          <a:effectRef idx="2">
+            <a:schemeClr val="accent1"/>
+          </a:effectRef>
+          <a:fontRef idx="minor">
+            <a:schemeClr val="lt1"/>
+          </a:fontRef>
+        </p:style>
+        <p:txBody>
+          <a:bodyPr rtlCol="0" anchor="ctr"/>
+          <a:lstStyle/>
+          <a:p>
+            <a:pPr algn="ctr"/>
+          </a:p>
+        </p:txBody>
+      </p:sp>
+      <p:sp>
+        <p:nvSpPr>
+          <p:cNvPr id="27" name="TextBox 26"/>
+          <p:cNvSpPr txBox="1"/>
+          <p:nvPr/>
+        </p:nvSpPr>
+        <p:spPr>
+          <a:xfrm>
+            <a:off x="6400800" y="3931920"/>
+            <a:ext cx="4663440" cy="347472"/>
+          </a:xfrm>
+          <a:prstGeom prst="rect">
+            <a:avLst/>
+          </a:prstGeom>
+          <a:noFill/>
+        </p:spPr>
+        <p:txBody>
+          <a:bodyPr wrap="square">
+            <a:spAutoFit/>
+          </a:bodyPr>
+          <a:lstStyle/>
+          <a:p>
+            <a:pPr algn="l">
+              <a:defRPr sz="1200" b="0">
+                <a:solidFill>
+                  <a:srgbClr val="F3EDE7"/>
+                </a:solidFill>
+                <a:latin typeface="Arial"/>
+              </a:defRPr>
+            </a:pPr>
+            <a:r>
+              <a:t>Welcome to Sengo Webinar — May 21</a:t>
+            </a:r>
+          </a:p>
+        </p:txBody>
+      </p:sp>
+      <p:sp>
+        <p:nvSpPr>
+          <p:cNvPr id="28" name="Rounded Rectangle 27"/>
+          <p:cNvSpPr/>
+          <p:nvPr/>
+        </p:nvSpPr>
+        <p:spPr>
+          <a:xfrm>
+            <a:off x="6217920" y="4407408"/>
+            <a:ext cx="5029200" cy="438912"/>
+          </a:xfrm>
+          <a:prstGeom prst="roundRect">
+            <a:avLst/>
+          </a:prstGeom>
+          <a:solidFill>
+            <a:srgbClr val="1B3533"/>
+          </a:solidFill>
+          <a:ln>
+            <a:noFill/>
+          </a:ln>
+        </p:spPr>
+        <p:style>
+          <a:lnRef idx="1">
+            <a:schemeClr val="accent1"/>
+          </a:lnRef>
+          <a:fillRef idx="3">
+            <a:schemeClr val="accent1"/>
+          </a:fillRef>
+          <a:effectRef idx="2">
+            <a:schemeClr val="accent1"/>
+          </a:effectRef>
+          <a:fontRef idx="minor">
+            <a:schemeClr val="lt1"/>
+          </a:fontRef>
+        </p:style>
+        <p:txBody>
+          <a:bodyPr rtlCol="0" anchor="ctr"/>
+          <a:lstStyle/>
+          <a:p>
+            <a:pPr algn="ctr"/>
+          </a:p>
+        </p:txBody>
+      </p:sp>
+      <p:sp>
+        <p:nvSpPr>
+          <p:cNvPr id="29" name="TextBox 28"/>
+          <p:cNvSpPr txBox="1"/>
+          <p:nvPr/>
+        </p:nvSpPr>
+        <p:spPr>
+          <a:xfrm>
+            <a:off x="6400800" y="4462272"/>
+            <a:ext cx="4663440" cy="347472"/>
+          </a:xfrm>
+          <a:prstGeom prst="rect">
+            <a:avLst/>
+          </a:prstGeom>
+          <a:noFill/>
+        </p:spPr>
+        <p:txBody>
+          <a:bodyPr wrap="square">
+            <a:spAutoFit/>
+          </a:bodyPr>
+          <a:lstStyle/>
+          <a:p>
+            <a:pPr algn="l">
+              <a:defRPr sz="1200" b="0">
+                <a:solidFill>
+                  <a:srgbClr val="F3EDE7"/>
+                </a:solidFill>
+                <a:latin typeface="Arial"/>
+              </a:defRPr>
+            </a:pPr>
+            <a:r>
+              <a:t>Sengo Founder Meetup: Angels &amp; VCs — Sep 18</a:t>
+            </a:r>
+          </a:p>
+        </p:txBody>
+      </p:sp>
+      <p:sp>
+        <p:nvSpPr>
+          <p:cNvPr id="30" name="Rounded Rectangle 29"/>
+          <p:cNvSpPr/>
+          <p:nvPr/>
+        </p:nvSpPr>
+        <p:spPr>
+          <a:xfrm>
+            <a:off x="6217920" y="4937760"/>
+            <a:ext cx="5029200" cy="438912"/>
+          </a:xfrm>
+          <a:prstGeom prst="roundRect">
+            <a:avLst/>
+          </a:prstGeom>
+          <a:solidFill>
+            <a:srgbClr val="1B3533"/>
+          </a:solidFill>
+          <a:ln>
+            <a:noFill/>
+          </a:ln>
+        </p:spPr>
+        <p:style>
+          <a:lnRef idx="1">
+            <a:schemeClr val="accent1"/>
+          </a:lnRef>
+          <a:fillRef idx="3">
+            <a:schemeClr val="accent1"/>
+          </a:fillRef>
+          <a:effectRef idx="2">
+            <a:schemeClr val="accent1"/>
+          </a:effectRef>
+          <a:fontRef idx="minor">
+            <a:schemeClr val="lt1"/>
+          </a:fontRef>
+        </p:style>
+        <p:txBody>
+          <a:bodyPr rtlCol="0" anchor="ctr"/>
+          <a:lstStyle/>
+          <a:p>
+            <a:pPr algn="ctr"/>
+          </a:p>
+        </p:txBody>
+      </p:sp>
+      <p:sp>
+        <p:nvSpPr>
+          <p:cNvPr id="31" name="TextBox 30"/>
+          <p:cNvSpPr txBox="1"/>
+          <p:nvPr/>
+        </p:nvSpPr>
+        <p:spPr>
+          <a:xfrm>
+            <a:off x="6400800" y="4992624"/>
+            <a:ext cx="4663440" cy="347472"/>
+          </a:xfrm>
+          <a:prstGeom prst="rect">
+            <a:avLst/>
+          </a:prstGeom>
+          <a:noFill/>
+        </p:spPr>
+        <p:txBody>
+          <a:bodyPr wrap="square">
+            <a:spAutoFit/>
+          </a:bodyPr>
+          <a:lstStyle/>
+          <a:p>
+            <a:pPr algn="l">
+              <a:defRPr sz="1200" b="0">
+                <a:solidFill>
+                  <a:srgbClr val="F3EDE7"/>
+                </a:solidFill>
+                <a:latin typeface="Arial"/>
+              </a:defRPr>
+            </a:pPr>
+            <a:r>
+              <a:t>Sengo Founder Meetup: Social Enterprise &amp; EdTech — Jul 22</a:t>
+            </a:r>
+          </a:p>
+        </p:txBody>
+      </p:sp>
+      <p:sp>
+        <p:nvSpPr>
+          <p:cNvPr id="32" name="Rounded Rectangle 31"/>
+          <p:cNvSpPr/>
+          <p:nvPr/>
+        </p:nvSpPr>
+        <p:spPr>
+          <a:xfrm>
+            <a:off x="6217920" y="5468112"/>
+            <a:ext cx="5029200" cy="438912"/>
+          </a:xfrm>
+          <a:prstGeom prst="roundRect">
+            <a:avLst/>
+          </a:prstGeom>
+          <a:solidFill>
+            <a:srgbClr val="1B3533"/>
+          </a:solidFill>
+          <a:ln>
+            <a:noFill/>
+          </a:ln>
+        </p:spPr>
+        <p:style>
+          <a:lnRef idx="1">
+            <a:schemeClr val="accent1"/>
+          </a:lnRef>
+          <a:fillRef idx="3">
+            <a:schemeClr val="accent1"/>
+          </a:fillRef>
+          <a:effectRef idx="2">
+            <a:schemeClr val="accent1"/>
+          </a:effectRef>
+          <a:fontRef idx="minor">
+            <a:schemeClr val="lt1"/>
+          </a:fontRef>
+        </p:style>
+        <p:txBody>
+          <a:bodyPr rtlCol="0" anchor="ctr"/>
+          <a:lstStyle/>
+          <a:p>
+            <a:pPr algn="ctr"/>
+          </a:p>
+        </p:txBody>
+      </p:sp>
+      <p:sp>
+        <p:nvSpPr>
+          <p:cNvPr id="33" name="TextBox 32"/>
+          <p:cNvSpPr txBox="1"/>
+          <p:nvPr/>
+        </p:nvSpPr>
+        <p:spPr>
+          <a:xfrm>
+            <a:off x="6400800" y="5522976"/>
+            <a:ext cx="4663440" cy="347472"/>
+          </a:xfrm>
+          <a:prstGeom prst="rect">
+            <a:avLst/>
+          </a:prstGeom>
+          <a:noFill/>
+        </p:spPr>
+        <p:txBody>
+          <a:bodyPr wrap="square">
+            <a:spAutoFit/>
+          </a:bodyPr>
+          <a:lstStyle/>
+          <a:p>
+            <a:pPr algn="l">
+              <a:defRPr sz="1200" b="0">
+                <a:solidFill>
+                  <a:srgbClr val="F3EDE7"/>
+                </a:solidFill>
+                <a:latin typeface="Arial"/>
+              </a:defRPr>
+            </a:pPr>
+            <a:r>
+              <a:t>IFundWomen Webinar — Jun 3</a:t>
             </a:r>
           </a:p>
         </p:txBody>
@@ -8971,6 +10062,1375 @@
 </file>
 
 <file path=ppt/slides/slide6.xml><?xml version="1.0" encoding="utf-8"?>
+<p:sld xmlns:a="http://schemas.openxmlformats.org/drawingml/2006/main" xmlns:p="http://schemas.openxmlformats.org/presentationml/2006/main" xmlns:r="http://schemas.openxmlformats.org/officeDocument/2006/relationships">
+  <p:cSld>
+    <p:bg>
+      <p:bgPr>
+        <a:solidFill>
+          <a:srgbClr val="F3EDE7"/>
+        </a:solidFill>
+        <a:effectLst/>
+      </p:bgPr>
+    </p:bg>
+    <p:spTree>
+      <p:nvGrpSpPr>
+        <p:cNvPr id="1" name=""/>
+        <p:cNvGrpSpPr/>
+        <p:nvPr/>
+      </p:nvGrpSpPr>
+      <p:grpSpPr/>
+      <p:sp>
+        <p:nvSpPr>
+          <p:cNvPr id="2" name="Rectangle 1"/>
+          <p:cNvSpPr/>
+          <p:nvPr/>
+        </p:nvSpPr>
+        <p:spPr>
+          <a:xfrm>
+            <a:off x="0" y="0"/>
+            <a:ext cx="12191695" cy="63500"/>
+          </a:xfrm>
+          <a:prstGeom prst="rect">
+            <a:avLst/>
+          </a:prstGeom>
+          <a:solidFill>
+            <a:srgbClr val="D57028"/>
+          </a:solidFill>
+          <a:ln>
+            <a:noFill/>
+          </a:ln>
+        </p:spPr>
+        <p:style>
+          <a:lnRef idx="1">
+            <a:schemeClr val="accent1"/>
+          </a:lnRef>
+          <a:fillRef idx="3">
+            <a:schemeClr val="accent1"/>
+          </a:fillRef>
+          <a:effectRef idx="2">
+            <a:schemeClr val="accent1"/>
+          </a:effectRef>
+          <a:fontRef idx="minor">
+            <a:schemeClr val="lt1"/>
+          </a:fontRef>
+        </p:style>
+        <p:txBody>
+          <a:bodyPr rtlCol="0" anchor="ctr"/>
+          <a:lstStyle/>
+          <a:p>
+            <a:pPr algn="ctr"/>
+          </a:p>
+        </p:txBody>
+      </p:sp>
+      <p:sp>
+        <p:nvSpPr>
+          <p:cNvPr id="3" name="TextBox 2"/>
+          <p:cNvSpPr txBox="1"/>
+          <p:nvPr/>
+        </p:nvSpPr>
+        <p:spPr>
+          <a:xfrm>
+            <a:off x="914400" y="457200"/>
+            <a:ext cx="10058400" cy="457200"/>
+          </a:xfrm>
+          <a:prstGeom prst="rect">
+            <a:avLst/>
+          </a:prstGeom>
+          <a:noFill/>
+        </p:spPr>
+        <p:txBody>
+          <a:bodyPr wrap="square">
+            <a:spAutoFit/>
+          </a:bodyPr>
+          <a:lstStyle/>
+          <a:p>
+            <a:pPr algn="ctr">
+              <a:defRPr sz="1300" b="1">
+                <a:solidFill>
+                  <a:srgbClr val="D57028"/>
+                </a:solidFill>
+                <a:latin typeface="Arial"/>
+              </a:defRPr>
+            </a:pPr>
+            <a:r>
+              <a:t>27 TOUCHPOINTS</a:t>
+            </a:r>
+          </a:p>
+        </p:txBody>
+      </p:sp>
+      <p:sp>
+        <p:nvSpPr>
+          <p:cNvPr id="4" name="TextBox 3"/>
+          <p:cNvSpPr txBox="1"/>
+          <p:nvPr/>
+        </p:nvSpPr>
+        <p:spPr>
+          <a:xfrm>
+            <a:off x="914400" y="914400"/>
+            <a:ext cx="10058400" cy="914400"/>
+          </a:xfrm>
+          <a:prstGeom prst="rect">
+            <a:avLst/>
+          </a:prstGeom>
+          <a:noFill/>
+        </p:spPr>
+        <p:txBody>
+          <a:bodyPr wrap="square">
+            <a:spAutoFit/>
+          </a:bodyPr>
+          <a:lstStyle/>
+          <a:p>
+            <a:pPr algn="ctr">
+              <a:defRPr sz="4000" b="1">
+                <a:solidFill>
+                  <a:srgbClr val="1B3533"/>
+                </a:solidFill>
+                <a:latin typeface="Arial"/>
+              </a:defRPr>
+            </a:pPr>
+            <a:r>
+              <a:t>Events — In-Person (14)</a:t>
+            </a:r>
+          </a:p>
+        </p:txBody>
+      </p:sp>
+      <p:sp>
+        <p:nvSpPr>
+          <p:cNvPr id="5" name="Rectangle 4"/>
+          <p:cNvSpPr/>
+          <p:nvPr/>
+        </p:nvSpPr>
+        <p:spPr>
+          <a:xfrm>
+            <a:off x="5029200" y="1828800"/>
+            <a:ext cx="2103120" cy="50800"/>
+          </a:xfrm>
+          <a:prstGeom prst="rect">
+            <a:avLst/>
+          </a:prstGeom>
+          <a:solidFill>
+            <a:srgbClr val="D57028"/>
+          </a:solidFill>
+          <a:ln>
+            <a:noFill/>
+          </a:ln>
+        </p:spPr>
+        <p:style>
+          <a:lnRef idx="1">
+            <a:schemeClr val="accent1"/>
+          </a:lnRef>
+          <a:fillRef idx="3">
+            <a:schemeClr val="accent1"/>
+          </a:fillRef>
+          <a:effectRef idx="2">
+            <a:schemeClr val="accent1"/>
+          </a:effectRef>
+          <a:fontRef idx="minor">
+            <a:schemeClr val="lt1"/>
+          </a:fontRef>
+        </p:style>
+        <p:txBody>
+          <a:bodyPr rtlCol="0" anchor="ctr"/>
+          <a:lstStyle/>
+          <a:p>
+            <a:pPr algn="ctr"/>
+          </a:p>
+        </p:txBody>
+      </p:sp>
+      <p:sp>
+        <p:nvSpPr>
+          <p:cNvPr id="6" name="Rounded Rectangle 5"/>
+          <p:cNvSpPr/>
+          <p:nvPr/>
+        </p:nvSpPr>
+        <p:spPr>
+          <a:xfrm>
+            <a:off x="548640" y="2286000"/>
+            <a:ext cx="5029200" cy="438912"/>
+          </a:xfrm>
+          <a:prstGeom prst="roundRect">
+            <a:avLst/>
+          </a:prstGeom>
+          <a:solidFill>
+            <a:srgbClr val="1B3533"/>
+          </a:solidFill>
+          <a:ln>
+            <a:noFill/>
+          </a:ln>
+        </p:spPr>
+        <p:style>
+          <a:lnRef idx="1">
+            <a:schemeClr val="accent1"/>
+          </a:lnRef>
+          <a:fillRef idx="3">
+            <a:schemeClr val="accent1"/>
+          </a:fillRef>
+          <a:effectRef idx="2">
+            <a:schemeClr val="accent1"/>
+          </a:effectRef>
+          <a:fontRef idx="minor">
+            <a:schemeClr val="lt1"/>
+          </a:fontRef>
+        </p:style>
+        <p:txBody>
+          <a:bodyPr rtlCol="0" anchor="ctr"/>
+          <a:lstStyle/>
+          <a:p>
+            <a:pPr algn="ctr"/>
+          </a:p>
+        </p:txBody>
+      </p:sp>
+      <p:sp>
+        <p:nvSpPr>
+          <p:cNvPr id="7" name="TextBox 6"/>
+          <p:cNvSpPr txBox="1"/>
+          <p:nvPr/>
+        </p:nvSpPr>
+        <p:spPr>
+          <a:xfrm>
+            <a:off x="731520" y="2340864"/>
+            <a:ext cx="4663440" cy="347472"/>
+          </a:xfrm>
+          <a:prstGeom prst="rect">
+            <a:avLst/>
+          </a:prstGeom>
+          <a:noFill/>
+        </p:spPr>
+        <p:txBody>
+          <a:bodyPr wrap="square">
+            <a:spAutoFit/>
+          </a:bodyPr>
+          <a:lstStyle/>
+          <a:p>
+            <a:pPr algn="l">
+              <a:defRPr sz="1200" b="0">
+                <a:solidFill>
+                  <a:srgbClr val="F3EDE7"/>
+                </a:solidFill>
+                <a:latin typeface="Arial"/>
+              </a:defRPr>
+            </a:pPr>
+            <a:r>
+              <a:t>Fashion x Futures — LA (Jun 28)</a:t>
+            </a:r>
+          </a:p>
+        </p:txBody>
+      </p:sp>
+      <p:sp>
+        <p:nvSpPr>
+          <p:cNvPr id="8" name="Rounded Rectangle 7"/>
+          <p:cNvSpPr/>
+          <p:nvPr/>
+        </p:nvSpPr>
+        <p:spPr>
+          <a:xfrm>
+            <a:off x="548640" y="2816352"/>
+            <a:ext cx="5029200" cy="438912"/>
+          </a:xfrm>
+          <a:prstGeom prst="roundRect">
+            <a:avLst/>
+          </a:prstGeom>
+          <a:solidFill>
+            <a:srgbClr val="1B3533"/>
+          </a:solidFill>
+          <a:ln>
+            <a:noFill/>
+          </a:ln>
+        </p:spPr>
+        <p:style>
+          <a:lnRef idx="1">
+            <a:schemeClr val="accent1"/>
+          </a:lnRef>
+          <a:fillRef idx="3">
+            <a:schemeClr val="accent1"/>
+          </a:fillRef>
+          <a:effectRef idx="2">
+            <a:schemeClr val="accent1"/>
+          </a:effectRef>
+          <a:fontRef idx="minor">
+            <a:schemeClr val="lt1"/>
+          </a:fontRef>
+        </p:style>
+        <p:txBody>
+          <a:bodyPr rtlCol="0" anchor="ctr"/>
+          <a:lstStyle/>
+          <a:p>
+            <a:pPr algn="ctr"/>
+          </a:p>
+        </p:txBody>
+      </p:sp>
+      <p:sp>
+        <p:nvSpPr>
+          <p:cNvPr id="9" name="TextBox 8"/>
+          <p:cNvSpPr txBox="1"/>
+          <p:nvPr/>
+        </p:nvSpPr>
+        <p:spPr>
+          <a:xfrm>
+            <a:off x="731520" y="2871216"/>
+            <a:ext cx="4663440" cy="347472"/>
+          </a:xfrm>
+          <a:prstGeom prst="rect">
+            <a:avLst/>
+          </a:prstGeom>
+          <a:noFill/>
+        </p:spPr>
+        <p:txBody>
+          <a:bodyPr wrap="square">
+            <a:spAutoFit/>
+          </a:bodyPr>
+          <a:lstStyle/>
+          <a:p>
+            <a:pPr algn="l">
+              <a:defRPr sz="1200" b="0">
+                <a:solidFill>
+                  <a:srgbClr val="F3EDE7"/>
+                </a:solidFill>
+                <a:latin typeface="Arial"/>
+              </a:defRPr>
+            </a:pPr>
+            <a:r>
+              <a:t>Fashion x Futures — NY (Jul 26)</a:t>
+            </a:r>
+          </a:p>
+        </p:txBody>
+      </p:sp>
+      <p:sp>
+        <p:nvSpPr>
+          <p:cNvPr id="10" name="Rounded Rectangle 9"/>
+          <p:cNvSpPr/>
+          <p:nvPr/>
+        </p:nvSpPr>
+        <p:spPr>
+          <a:xfrm>
+            <a:off x="548640" y="3346704"/>
+            <a:ext cx="5029200" cy="438912"/>
+          </a:xfrm>
+          <a:prstGeom prst="roundRect">
+            <a:avLst/>
+          </a:prstGeom>
+          <a:solidFill>
+            <a:srgbClr val="1B3533"/>
+          </a:solidFill>
+          <a:ln>
+            <a:noFill/>
+          </a:ln>
+        </p:spPr>
+        <p:style>
+          <a:lnRef idx="1">
+            <a:schemeClr val="accent1"/>
+          </a:lnRef>
+          <a:fillRef idx="3">
+            <a:schemeClr val="accent1"/>
+          </a:fillRef>
+          <a:effectRef idx="2">
+            <a:schemeClr val="accent1"/>
+          </a:effectRef>
+          <a:fontRef idx="minor">
+            <a:schemeClr val="lt1"/>
+          </a:fontRef>
+        </p:style>
+        <p:txBody>
+          <a:bodyPr rtlCol="0" anchor="ctr"/>
+          <a:lstStyle/>
+          <a:p>
+            <a:pPr algn="ctr"/>
+          </a:p>
+        </p:txBody>
+      </p:sp>
+      <p:sp>
+        <p:nvSpPr>
+          <p:cNvPr id="11" name="TextBox 10"/>
+          <p:cNvSpPr txBox="1"/>
+          <p:nvPr/>
+        </p:nvSpPr>
+        <p:spPr>
+          <a:xfrm>
+            <a:off x="731520" y="3401568"/>
+            <a:ext cx="4663440" cy="347472"/>
+          </a:xfrm>
+          <a:prstGeom prst="rect">
+            <a:avLst/>
+          </a:prstGeom>
+          <a:noFill/>
+        </p:spPr>
+        <p:txBody>
+          <a:bodyPr wrap="square">
+            <a:spAutoFit/>
+          </a:bodyPr>
+          <a:lstStyle/>
+          <a:p>
+            <a:pPr algn="l">
+              <a:defRPr sz="1200" b="0">
+                <a:solidFill>
+                  <a:srgbClr val="F3EDE7"/>
+                </a:solidFill>
+                <a:latin typeface="Arial"/>
+              </a:defRPr>
+            </a:pPr>
+            <a:r>
+              <a:t>Fashion x Futures — LA Holiday Pop-Up (Nov 8–9)</a:t>
+            </a:r>
+          </a:p>
+        </p:txBody>
+      </p:sp>
+      <p:sp>
+        <p:nvSpPr>
+          <p:cNvPr id="12" name="Rounded Rectangle 11"/>
+          <p:cNvSpPr/>
+          <p:nvPr/>
+        </p:nvSpPr>
+        <p:spPr>
+          <a:xfrm>
+            <a:off x="548640" y="3877056"/>
+            <a:ext cx="5029200" cy="438912"/>
+          </a:xfrm>
+          <a:prstGeom prst="roundRect">
+            <a:avLst/>
+          </a:prstGeom>
+          <a:solidFill>
+            <a:srgbClr val="1B3533"/>
+          </a:solidFill>
+          <a:ln>
+            <a:noFill/>
+          </a:ln>
+        </p:spPr>
+        <p:style>
+          <a:lnRef idx="1">
+            <a:schemeClr val="accent1"/>
+          </a:lnRef>
+          <a:fillRef idx="3">
+            <a:schemeClr val="accent1"/>
+          </a:fillRef>
+          <a:effectRef idx="2">
+            <a:schemeClr val="accent1"/>
+          </a:effectRef>
+          <a:fontRef idx="minor">
+            <a:schemeClr val="lt1"/>
+          </a:fontRef>
+        </p:style>
+        <p:txBody>
+          <a:bodyPr rtlCol="0" anchor="ctr"/>
+          <a:lstStyle/>
+          <a:p>
+            <a:pPr algn="ctr"/>
+          </a:p>
+        </p:txBody>
+      </p:sp>
+      <p:sp>
+        <p:nvSpPr>
+          <p:cNvPr id="13" name="TextBox 12"/>
+          <p:cNvSpPr txBox="1"/>
+          <p:nvPr/>
+        </p:nvSpPr>
+        <p:spPr>
+          <a:xfrm>
+            <a:off x="731520" y="3931920"/>
+            <a:ext cx="4663440" cy="347472"/>
+          </a:xfrm>
+          <a:prstGeom prst="rect">
+            <a:avLst/>
+          </a:prstGeom>
+          <a:noFill/>
+        </p:spPr>
+        <p:txBody>
+          <a:bodyPr wrap="square">
+            <a:spAutoFit/>
+          </a:bodyPr>
+          <a:lstStyle/>
+          <a:p>
+            <a:pPr algn="l">
+              <a:defRPr sz="1200" b="0">
+                <a:solidFill>
+                  <a:srgbClr val="F3EDE7"/>
+                </a:solidFill>
+                <a:latin typeface="Arial"/>
+              </a:defRPr>
+            </a:pPr>
+            <a:r>
+              <a:t>Galentine's Wine Club — Dallas (Feb 21)</a:t>
+            </a:r>
+          </a:p>
+        </p:txBody>
+      </p:sp>
+      <p:sp>
+        <p:nvSpPr>
+          <p:cNvPr id="14" name="Rounded Rectangle 13"/>
+          <p:cNvSpPr/>
+          <p:nvPr/>
+        </p:nvSpPr>
+        <p:spPr>
+          <a:xfrm>
+            <a:off x="548640" y="4407408"/>
+            <a:ext cx="5029200" cy="438912"/>
+          </a:xfrm>
+          <a:prstGeom prst="roundRect">
+            <a:avLst/>
+          </a:prstGeom>
+          <a:solidFill>
+            <a:srgbClr val="1B3533"/>
+          </a:solidFill>
+          <a:ln>
+            <a:noFill/>
+          </a:ln>
+        </p:spPr>
+        <p:style>
+          <a:lnRef idx="1">
+            <a:schemeClr val="accent1"/>
+          </a:lnRef>
+          <a:fillRef idx="3">
+            <a:schemeClr val="accent1"/>
+          </a:fillRef>
+          <a:effectRef idx="2">
+            <a:schemeClr val="accent1"/>
+          </a:effectRef>
+          <a:fontRef idx="minor">
+            <a:schemeClr val="lt1"/>
+          </a:fontRef>
+        </p:style>
+        <p:txBody>
+          <a:bodyPr rtlCol="0" anchor="ctr"/>
+          <a:lstStyle/>
+          <a:p>
+            <a:pPr algn="ctr"/>
+          </a:p>
+        </p:txBody>
+      </p:sp>
+      <p:sp>
+        <p:nvSpPr>
+          <p:cNvPr id="15" name="TextBox 14"/>
+          <p:cNvSpPr txBox="1"/>
+          <p:nvPr/>
+        </p:nvSpPr>
+        <p:spPr>
+          <a:xfrm>
+            <a:off x="731520" y="4462272"/>
+            <a:ext cx="4663440" cy="347472"/>
+          </a:xfrm>
+          <a:prstGeom prst="rect">
+            <a:avLst/>
+          </a:prstGeom>
+          <a:noFill/>
+        </p:spPr>
+        <p:txBody>
+          <a:bodyPr wrap="square">
+            <a:spAutoFit/>
+          </a:bodyPr>
+          <a:lstStyle/>
+          <a:p>
+            <a:pPr algn="l">
+              <a:defRPr sz="1200" b="0">
+                <a:solidFill>
+                  <a:srgbClr val="F3EDE7"/>
+                </a:solidFill>
+                <a:latin typeface="Arial"/>
+              </a:defRPr>
+            </a:pPr>
+            <a:r>
+              <a:t>Brunch Wine Club — Dallas (Mar 15)</a:t>
+            </a:r>
+          </a:p>
+        </p:txBody>
+      </p:sp>
+      <p:sp>
+        <p:nvSpPr>
+          <p:cNvPr id="16" name="Rounded Rectangle 15"/>
+          <p:cNvSpPr/>
+          <p:nvPr/>
+        </p:nvSpPr>
+        <p:spPr>
+          <a:xfrm>
+            <a:off x="548640" y="4937760"/>
+            <a:ext cx="5029200" cy="438912"/>
+          </a:xfrm>
+          <a:prstGeom prst="roundRect">
+            <a:avLst/>
+          </a:prstGeom>
+          <a:solidFill>
+            <a:srgbClr val="1B3533"/>
+          </a:solidFill>
+          <a:ln>
+            <a:noFill/>
+          </a:ln>
+        </p:spPr>
+        <p:style>
+          <a:lnRef idx="1">
+            <a:schemeClr val="accent1"/>
+          </a:lnRef>
+          <a:fillRef idx="3">
+            <a:schemeClr val="accent1"/>
+          </a:fillRef>
+          <a:effectRef idx="2">
+            <a:schemeClr val="accent1"/>
+          </a:effectRef>
+          <a:fontRef idx="minor">
+            <a:schemeClr val="lt1"/>
+          </a:fontRef>
+        </p:style>
+        <p:txBody>
+          <a:bodyPr rtlCol="0" anchor="ctr"/>
+          <a:lstStyle/>
+          <a:p>
+            <a:pPr algn="ctr"/>
+          </a:p>
+        </p:txBody>
+      </p:sp>
+      <p:sp>
+        <p:nvSpPr>
+          <p:cNvPr id="17" name="TextBox 16"/>
+          <p:cNvSpPr txBox="1"/>
+          <p:nvPr/>
+        </p:nvSpPr>
+        <p:spPr>
+          <a:xfrm>
+            <a:off x="731520" y="4992624"/>
+            <a:ext cx="4663440" cy="347472"/>
+          </a:xfrm>
+          <a:prstGeom prst="rect">
+            <a:avLst/>
+          </a:prstGeom>
+          <a:noFill/>
+        </p:spPr>
+        <p:txBody>
+          <a:bodyPr wrap="square">
+            <a:spAutoFit/>
+          </a:bodyPr>
+          <a:lstStyle/>
+          <a:p>
+            <a:pPr algn="l">
+              <a:defRPr sz="1200" b="0">
+                <a:solidFill>
+                  <a:srgbClr val="F3EDE7"/>
+                </a:solidFill>
+                <a:latin typeface="Arial"/>
+              </a:defRPr>
+            </a:pPr>
+            <a:r>
+              <a:t>Sip Into Spring — Dallas (Mar 30)</a:t>
+            </a:r>
+          </a:p>
+        </p:txBody>
+      </p:sp>
+      <p:sp>
+        <p:nvSpPr>
+          <p:cNvPr id="18" name="Rounded Rectangle 17"/>
+          <p:cNvSpPr/>
+          <p:nvPr/>
+        </p:nvSpPr>
+        <p:spPr>
+          <a:xfrm>
+            <a:off x="548640" y="5468112"/>
+            <a:ext cx="5029200" cy="438912"/>
+          </a:xfrm>
+          <a:prstGeom prst="roundRect">
+            <a:avLst/>
+          </a:prstGeom>
+          <a:solidFill>
+            <a:srgbClr val="1B3533"/>
+          </a:solidFill>
+          <a:ln>
+            <a:noFill/>
+          </a:ln>
+        </p:spPr>
+        <p:style>
+          <a:lnRef idx="1">
+            <a:schemeClr val="accent1"/>
+          </a:lnRef>
+          <a:fillRef idx="3">
+            <a:schemeClr val="accent1"/>
+          </a:fillRef>
+          <a:effectRef idx="2">
+            <a:schemeClr val="accent1"/>
+          </a:effectRef>
+          <a:fontRef idx="minor">
+            <a:schemeClr val="lt1"/>
+          </a:fontRef>
+        </p:style>
+        <p:txBody>
+          <a:bodyPr rtlCol="0" anchor="ctr"/>
+          <a:lstStyle/>
+          <a:p>
+            <a:pPr algn="ctr"/>
+          </a:p>
+        </p:txBody>
+      </p:sp>
+      <p:sp>
+        <p:nvSpPr>
+          <p:cNvPr id="19" name="TextBox 18"/>
+          <p:cNvSpPr txBox="1"/>
+          <p:nvPr/>
+        </p:nvSpPr>
+        <p:spPr>
+          <a:xfrm>
+            <a:off x="731520" y="5522976"/>
+            <a:ext cx="4663440" cy="347472"/>
+          </a:xfrm>
+          <a:prstGeom prst="rect">
+            <a:avLst/>
+          </a:prstGeom>
+          <a:noFill/>
+        </p:spPr>
+        <p:txBody>
+          <a:bodyPr wrap="square">
+            <a:spAutoFit/>
+          </a:bodyPr>
+          <a:lstStyle/>
+          <a:p>
+            <a:pPr algn="l">
+              <a:defRPr sz="1200" b="0">
+                <a:solidFill>
+                  <a:srgbClr val="F3EDE7"/>
+                </a:solidFill>
+                <a:latin typeface="Arial"/>
+              </a:defRPr>
+            </a:pPr>
+            <a:r>
+              <a:t>Wine Club — Dallas (Apr 9)</a:t>
+            </a:r>
+          </a:p>
+        </p:txBody>
+      </p:sp>
+      <p:sp>
+        <p:nvSpPr>
+          <p:cNvPr id="20" name="Rounded Rectangle 19"/>
+          <p:cNvSpPr/>
+          <p:nvPr/>
+        </p:nvSpPr>
+        <p:spPr>
+          <a:xfrm>
+            <a:off x="6217920" y="2286000"/>
+            <a:ext cx="5029200" cy="438912"/>
+          </a:xfrm>
+          <a:prstGeom prst="roundRect">
+            <a:avLst/>
+          </a:prstGeom>
+          <a:solidFill>
+            <a:srgbClr val="1B3533"/>
+          </a:solidFill>
+          <a:ln>
+            <a:noFill/>
+          </a:ln>
+        </p:spPr>
+        <p:style>
+          <a:lnRef idx="1">
+            <a:schemeClr val="accent1"/>
+          </a:lnRef>
+          <a:fillRef idx="3">
+            <a:schemeClr val="accent1"/>
+          </a:fillRef>
+          <a:effectRef idx="2">
+            <a:schemeClr val="accent1"/>
+          </a:effectRef>
+          <a:fontRef idx="minor">
+            <a:schemeClr val="lt1"/>
+          </a:fontRef>
+        </p:style>
+        <p:txBody>
+          <a:bodyPr rtlCol="0" anchor="ctr"/>
+          <a:lstStyle/>
+          <a:p>
+            <a:pPr algn="ctr"/>
+          </a:p>
+        </p:txBody>
+      </p:sp>
+      <p:sp>
+        <p:nvSpPr>
+          <p:cNvPr id="21" name="TextBox 20"/>
+          <p:cNvSpPr txBox="1"/>
+          <p:nvPr/>
+        </p:nvSpPr>
+        <p:spPr>
+          <a:xfrm>
+            <a:off x="6400800" y="2340864"/>
+            <a:ext cx="4663440" cy="347472"/>
+          </a:xfrm>
+          <a:prstGeom prst="rect">
+            <a:avLst/>
+          </a:prstGeom>
+          <a:noFill/>
+        </p:spPr>
+        <p:txBody>
+          <a:bodyPr wrap="square">
+            <a:spAutoFit/>
+          </a:bodyPr>
+          <a:lstStyle/>
+          <a:p>
+            <a:pPr algn="l">
+              <a:defRPr sz="1200" b="0">
+                <a:solidFill>
+                  <a:srgbClr val="F3EDE7"/>
+                </a:solidFill>
+                <a:latin typeface="Arial"/>
+              </a:defRPr>
+            </a:pPr>
+            <a:r>
+              <a:t>GirlMath x Sengo: Wed Night Write-Off (NY Tech Week, Jun 4)</a:t>
+            </a:r>
+          </a:p>
+        </p:txBody>
+      </p:sp>
+      <p:sp>
+        <p:nvSpPr>
+          <p:cNvPr id="22" name="Rounded Rectangle 21"/>
+          <p:cNvSpPr/>
+          <p:nvPr/>
+        </p:nvSpPr>
+        <p:spPr>
+          <a:xfrm>
+            <a:off x="6217920" y="2816352"/>
+            <a:ext cx="5029200" cy="438912"/>
+          </a:xfrm>
+          <a:prstGeom prst="roundRect">
+            <a:avLst/>
+          </a:prstGeom>
+          <a:solidFill>
+            <a:srgbClr val="1B3533"/>
+          </a:solidFill>
+          <a:ln>
+            <a:noFill/>
+          </a:ln>
+        </p:spPr>
+        <p:style>
+          <a:lnRef idx="1">
+            <a:schemeClr val="accent1"/>
+          </a:lnRef>
+          <a:fillRef idx="3">
+            <a:schemeClr val="accent1"/>
+          </a:fillRef>
+          <a:effectRef idx="2">
+            <a:schemeClr val="accent1"/>
+          </a:effectRef>
+          <a:fontRef idx="minor">
+            <a:schemeClr val="lt1"/>
+          </a:fontRef>
+        </p:style>
+        <p:txBody>
+          <a:bodyPr rtlCol="0" anchor="ctr"/>
+          <a:lstStyle/>
+          <a:p>
+            <a:pPr algn="ctr"/>
+          </a:p>
+        </p:txBody>
+      </p:sp>
+      <p:sp>
+        <p:nvSpPr>
+          <p:cNvPr id="23" name="TextBox 22"/>
+          <p:cNvSpPr txBox="1"/>
+          <p:nvPr/>
+        </p:nvSpPr>
+        <p:spPr>
+          <a:xfrm>
+            <a:off x="6400800" y="2871216"/>
+            <a:ext cx="4663440" cy="347472"/>
+          </a:xfrm>
+          <a:prstGeom prst="rect">
+            <a:avLst/>
+          </a:prstGeom>
+          <a:noFill/>
+        </p:spPr>
+        <p:txBody>
+          <a:bodyPr wrap="square">
+            <a:spAutoFit/>
+          </a:bodyPr>
+          <a:lstStyle/>
+          <a:p>
+            <a:pPr algn="l">
+              <a:defRPr sz="1200" b="0">
+                <a:solidFill>
+                  <a:srgbClr val="F3EDE7"/>
+                </a:solidFill>
+                <a:latin typeface="Arial"/>
+              </a:defRPr>
+            </a:pPr>
+            <a:r>
+              <a:t>Spill the Tea: AI &amp; Tech (LA Tech Week, Oct 14)</a:t>
+            </a:r>
+          </a:p>
+        </p:txBody>
+      </p:sp>
+      <p:sp>
+        <p:nvSpPr>
+          <p:cNvPr id="24" name="Rounded Rectangle 23"/>
+          <p:cNvSpPr/>
+          <p:nvPr/>
+        </p:nvSpPr>
+        <p:spPr>
+          <a:xfrm>
+            <a:off x="6217920" y="3346704"/>
+            <a:ext cx="5029200" cy="438912"/>
+          </a:xfrm>
+          <a:prstGeom prst="roundRect">
+            <a:avLst/>
+          </a:prstGeom>
+          <a:solidFill>
+            <a:srgbClr val="1B3533"/>
+          </a:solidFill>
+          <a:ln>
+            <a:noFill/>
+          </a:ln>
+        </p:spPr>
+        <p:style>
+          <a:lnRef idx="1">
+            <a:schemeClr val="accent1"/>
+          </a:lnRef>
+          <a:fillRef idx="3">
+            <a:schemeClr val="accent1"/>
+          </a:fillRef>
+          <a:effectRef idx="2">
+            <a:schemeClr val="accent1"/>
+          </a:effectRef>
+          <a:fontRef idx="minor">
+            <a:schemeClr val="lt1"/>
+          </a:fontRef>
+        </p:style>
+        <p:txBody>
+          <a:bodyPr rtlCol="0" anchor="ctr"/>
+          <a:lstStyle/>
+          <a:p>
+            <a:pPr algn="ctr"/>
+          </a:p>
+        </p:txBody>
+      </p:sp>
+      <p:sp>
+        <p:nvSpPr>
+          <p:cNvPr id="25" name="TextBox 24"/>
+          <p:cNvSpPr txBox="1"/>
+          <p:nvPr/>
+        </p:nvSpPr>
+        <p:spPr>
+          <a:xfrm>
+            <a:off x="6400800" y="3401568"/>
+            <a:ext cx="4663440" cy="347472"/>
+          </a:xfrm>
+          <a:prstGeom prst="rect">
+            <a:avLst/>
+          </a:prstGeom>
+          <a:noFill/>
+        </p:spPr>
+        <p:txBody>
+          <a:bodyPr wrap="square">
+            <a:spAutoFit/>
+          </a:bodyPr>
+          <a:lstStyle/>
+          <a:p>
+            <a:pPr algn="l">
+              <a:defRPr sz="1200" b="0">
+                <a:solidFill>
+                  <a:srgbClr val="F3EDE7"/>
+                </a:solidFill>
+                <a:latin typeface="Arial"/>
+              </a:defRPr>
+            </a:pPr>
+            <a:r>
+              <a:t>NY Tech Week Mixer (Sengo x Little More, Jun 4)</a:t>
+            </a:r>
+          </a:p>
+        </p:txBody>
+      </p:sp>
+      <p:sp>
+        <p:nvSpPr>
+          <p:cNvPr id="26" name="Rounded Rectangle 25"/>
+          <p:cNvSpPr/>
+          <p:nvPr/>
+        </p:nvSpPr>
+        <p:spPr>
+          <a:xfrm>
+            <a:off x="6217920" y="3877056"/>
+            <a:ext cx="5029200" cy="438912"/>
+          </a:xfrm>
+          <a:prstGeom prst="roundRect">
+            <a:avLst/>
+          </a:prstGeom>
+          <a:solidFill>
+            <a:srgbClr val="1B3533"/>
+          </a:solidFill>
+          <a:ln>
+            <a:noFill/>
+          </a:ln>
+        </p:spPr>
+        <p:style>
+          <a:lnRef idx="1">
+            <a:schemeClr val="accent1"/>
+          </a:lnRef>
+          <a:fillRef idx="3">
+            <a:schemeClr val="accent1"/>
+          </a:fillRef>
+          <a:effectRef idx="2">
+            <a:schemeClr val="accent1"/>
+          </a:effectRef>
+          <a:fontRef idx="minor">
+            <a:schemeClr val="lt1"/>
+          </a:fontRef>
+        </p:style>
+        <p:txBody>
+          <a:bodyPr rtlCol="0" anchor="ctr"/>
+          <a:lstStyle/>
+          <a:p>
+            <a:pPr algn="ctr"/>
+          </a:p>
+        </p:txBody>
+      </p:sp>
+      <p:sp>
+        <p:nvSpPr>
+          <p:cNvPr id="27" name="TextBox 26"/>
+          <p:cNvSpPr txBox="1"/>
+          <p:nvPr/>
+        </p:nvSpPr>
+        <p:spPr>
+          <a:xfrm>
+            <a:off x="6400800" y="3931920"/>
+            <a:ext cx="4663440" cy="347472"/>
+          </a:xfrm>
+          <a:prstGeom prst="rect">
+            <a:avLst/>
+          </a:prstGeom>
+          <a:noFill/>
+        </p:spPr>
+        <p:txBody>
+          <a:bodyPr wrap="square">
+            <a:spAutoFit/>
+          </a:bodyPr>
+          <a:lstStyle/>
+          <a:p>
+            <a:pPr algn="l">
+              <a:defRPr sz="1200" b="0">
+                <a:solidFill>
+                  <a:srgbClr val="F3EDE7"/>
+                </a:solidFill>
+                <a:latin typeface="Arial"/>
+              </a:defRPr>
+            </a:pPr>
+            <a:r>
+              <a:t>BBOP Center x Sengo Founder Workshop (Mar 28)</a:t>
+            </a:r>
+          </a:p>
+        </p:txBody>
+      </p:sp>
+      <p:sp>
+        <p:nvSpPr>
+          <p:cNvPr id="28" name="Rounded Rectangle 27"/>
+          <p:cNvSpPr/>
+          <p:nvPr/>
+        </p:nvSpPr>
+        <p:spPr>
+          <a:xfrm>
+            <a:off x="6217920" y="4407408"/>
+            <a:ext cx="5029200" cy="438912"/>
+          </a:xfrm>
+          <a:prstGeom prst="roundRect">
+            <a:avLst/>
+          </a:prstGeom>
+          <a:solidFill>
+            <a:srgbClr val="1B3533"/>
+          </a:solidFill>
+          <a:ln>
+            <a:noFill/>
+          </a:ln>
+        </p:spPr>
+        <p:style>
+          <a:lnRef idx="1">
+            <a:schemeClr val="accent1"/>
+          </a:lnRef>
+          <a:fillRef idx="3">
+            <a:schemeClr val="accent1"/>
+          </a:fillRef>
+          <a:effectRef idx="2">
+            <a:schemeClr val="accent1"/>
+          </a:effectRef>
+          <a:fontRef idx="minor">
+            <a:schemeClr val="lt1"/>
+          </a:fontRef>
+        </p:style>
+        <p:txBody>
+          <a:bodyPr rtlCol="0" anchor="ctr"/>
+          <a:lstStyle/>
+          <a:p>
+            <a:pPr algn="ctr"/>
+          </a:p>
+        </p:txBody>
+      </p:sp>
+      <p:sp>
+        <p:nvSpPr>
+          <p:cNvPr id="29" name="TextBox 28"/>
+          <p:cNvSpPr txBox="1"/>
+          <p:nvPr/>
+        </p:nvSpPr>
+        <p:spPr>
+          <a:xfrm>
+            <a:off x="6400800" y="4462272"/>
+            <a:ext cx="4663440" cy="347472"/>
+          </a:xfrm>
+          <a:prstGeom prst="rect">
+            <a:avLst/>
+          </a:prstGeom>
+          <a:noFill/>
+        </p:spPr>
+        <p:txBody>
+          <a:bodyPr wrap="square">
+            <a:spAutoFit/>
+          </a:bodyPr>
+          <a:lstStyle/>
+          <a:p>
+            <a:pPr algn="l">
+              <a:defRPr sz="1200" b="0">
+                <a:solidFill>
+                  <a:srgbClr val="F3EDE7"/>
+                </a:solidFill>
+                <a:latin typeface="Arial"/>
+              </a:defRPr>
+            </a:pPr>
+            <a:r>
+              <a:t>Funded &amp; Fearless Workshop (Apr 26)</a:t>
+            </a:r>
+          </a:p>
+        </p:txBody>
+      </p:sp>
+      <p:sp>
+        <p:nvSpPr>
+          <p:cNvPr id="30" name="Rounded Rectangle 29"/>
+          <p:cNvSpPr/>
+          <p:nvPr/>
+        </p:nvSpPr>
+        <p:spPr>
+          <a:xfrm>
+            <a:off x="6217920" y="4937760"/>
+            <a:ext cx="5029200" cy="438912"/>
+          </a:xfrm>
+          <a:prstGeom prst="roundRect">
+            <a:avLst/>
+          </a:prstGeom>
+          <a:solidFill>
+            <a:srgbClr val="1B3533"/>
+          </a:solidFill>
+          <a:ln>
+            <a:noFill/>
+          </a:ln>
+        </p:spPr>
+        <p:style>
+          <a:lnRef idx="1">
+            <a:schemeClr val="accent1"/>
+          </a:lnRef>
+          <a:fillRef idx="3">
+            <a:schemeClr val="accent1"/>
+          </a:fillRef>
+          <a:effectRef idx="2">
+            <a:schemeClr val="accent1"/>
+          </a:effectRef>
+          <a:fontRef idx="minor">
+            <a:schemeClr val="lt1"/>
+          </a:fontRef>
+        </p:style>
+        <p:txBody>
+          <a:bodyPr rtlCol="0" anchor="ctr"/>
+          <a:lstStyle/>
+          <a:p>
+            <a:pPr algn="ctr"/>
+          </a:p>
+        </p:txBody>
+      </p:sp>
+      <p:sp>
+        <p:nvSpPr>
+          <p:cNvPr id="31" name="TextBox 30"/>
+          <p:cNvSpPr txBox="1"/>
+          <p:nvPr/>
+        </p:nvSpPr>
+        <p:spPr>
+          <a:xfrm>
+            <a:off x="6400800" y="4992624"/>
+            <a:ext cx="4663440" cy="347472"/>
+          </a:xfrm>
+          <a:prstGeom prst="rect">
+            <a:avLst/>
+          </a:prstGeom>
+          <a:noFill/>
+        </p:spPr>
+        <p:txBody>
+          <a:bodyPr wrap="square">
+            <a:spAutoFit/>
+          </a:bodyPr>
+          <a:lstStyle/>
+          <a:p>
+            <a:pPr algn="l">
+              <a:defRPr sz="1200" b="0">
+                <a:solidFill>
+                  <a:srgbClr val="F3EDE7"/>
+                </a:solidFill>
+                <a:latin typeface="Arial"/>
+              </a:defRPr>
+            </a:pPr>
+            <a:r>
+              <a:t>Barcelona Black Women Entrepreneurs Mixer (Mar 13)</a:t>
+            </a:r>
+          </a:p>
+        </p:txBody>
+      </p:sp>
+      <p:sp>
+        <p:nvSpPr>
+          <p:cNvPr id="32" name="Rounded Rectangle 31"/>
+          <p:cNvSpPr/>
+          <p:nvPr/>
+        </p:nvSpPr>
+        <p:spPr>
+          <a:xfrm>
+            <a:off x="6217920" y="5468112"/>
+            <a:ext cx="5029200" cy="438912"/>
+          </a:xfrm>
+          <a:prstGeom prst="roundRect">
+            <a:avLst/>
+          </a:prstGeom>
+          <a:solidFill>
+            <a:srgbClr val="1B3533"/>
+          </a:solidFill>
+          <a:ln>
+            <a:noFill/>
+          </a:ln>
+        </p:spPr>
+        <p:style>
+          <a:lnRef idx="1">
+            <a:schemeClr val="accent1"/>
+          </a:lnRef>
+          <a:fillRef idx="3">
+            <a:schemeClr val="accent1"/>
+          </a:fillRef>
+          <a:effectRef idx="2">
+            <a:schemeClr val="accent1"/>
+          </a:effectRef>
+          <a:fontRef idx="minor">
+            <a:schemeClr val="lt1"/>
+          </a:fontRef>
+        </p:style>
+        <p:txBody>
+          <a:bodyPr rtlCol="0" anchor="ctr"/>
+          <a:lstStyle/>
+          <a:p>
+            <a:pPr algn="ctr"/>
+          </a:p>
+        </p:txBody>
+      </p:sp>
+      <p:sp>
+        <p:nvSpPr>
+          <p:cNvPr id="33" name="TextBox 32"/>
+          <p:cNvSpPr txBox="1"/>
+          <p:nvPr/>
+        </p:nvSpPr>
+        <p:spPr>
+          <a:xfrm>
+            <a:off x="6400800" y="5522976"/>
+            <a:ext cx="4663440" cy="347472"/>
+          </a:xfrm>
+          <a:prstGeom prst="rect">
+            <a:avLst/>
+          </a:prstGeom>
+          <a:noFill/>
+        </p:spPr>
+        <p:txBody>
+          <a:bodyPr wrap="square">
+            <a:spAutoFit/>
+          </a:bodyPr>
+          <a:lstStyle/>
+          <a:p>
+            <a:pPr algn="l">
+              <a:defRPr sz="1200" b="0">
+                <a:solidFill>
+                  <a:srgbClr val="F3EDE7"/>
+                </a:solidFill>
+                <a:latin typeface="Arial"/>
+              </a:defRPr>
+            </a:pPr>
+            <a:r>
+              <a:t>The Village Retreat — France (Jun 10–15)</a:t>
+            </a:r>
+          </a:p>
+        </p:txBody>
+      </p:sp>
+      <p:sp>
+        <p:nvSpPr>
+          <p:cNvPr id="34" name="Rounded Rectangle 33"/>
+          <p:cNvSpPr/>
+          <p:nvPr/>
+        </p:nvSpPr>
+        <p:spPr>
+          <a:xfrm>
+            <a:off x="1371600" y="6035040"/>
+            <a:ext cx="9144000" cy="548640"/>
+          </a:xfrm>
+          <a:prstGeom prst="roundRect">
+            <a:avLst/>
+          </a:prstGeom>
+          <a:solidFill>
+            <a:srgbClr val="D57028"/>
+          </a:solidFill>
+          <a:ln>
+            <a:noFill/>
+          </a:ln>
+        </p:spPr>
+        <p:style>
+          <a:lnRef idx="1">
+            <a:schemeClr val="accent1"/>
+          </a:lnRef>
+          <a:fillRef idx="3">
+            <a:schemeClr val="accent1"/>
+          </a:fillRef>
+          <a:effectRef idx="2">
+            <a:schemeClr val="accent1"/>
+          </a:effectRef>
+          <a:fontRef idx="minor">
+            <a:schemeClr val="lt1"/>
+          </a:fontRef>
+        </p:style>
+        <p:txBody>
+          <a:bodyPr rtlCol="0" anchor="ctr"/>
+          <a:lstStyle/>
+          <a:p>
+            <a:pPr algn="ctr"/>
+          </a:p>
+        </p:txBody>
+      </p:sp>
+      <p:sp>
+        <p:nvSpPr>
+          <p:cNvPr id="35" name="TextBox 34"/>
+          <p:cNvSpPr txBox="1"/>
+          <p:nvPr/>
+        </p:nvSpPr>
+        <p:spPr>
+          <a:xfrm>
+            <a:off x="1645920" y="6108192"/>
+            <a:ext cx="8595360" cy="411480"/>
+          </a:xfrm>
+          <a:prstGeom prst="rect">
+            <a:avLst/>
+          </a:prstGeom>
+          <a:noFill/>
+        </p:spPr>
+        <p:txBody>
+          <a:bodyPr wrap="square">
+            <a:spAutoFit/>
+          </a:bodyPr>
+          <a:lstStyle/>
+          <a:p>
+            <a:pPr algn="ctr">
+              <a:defRPr sz="1300" b="1">
+                <a:solidFill>
+                  <a:srgbClr val="FFFFFF"/>
+                </a:solidFill>
+                <a:latin typeface="Arial"/>
+              </a:defRPr>
+            </a:pPr>
+            <a:r>
+              <a:t>Key Insight: Events are most effective when they lead into readiness tools and structured next steps.</a:t>
+            </a:r>
+          </a:p>
+        </p:txBody>
+      </p:sp>
+    </p:spTree>
+  </p:cSld>
+  <p:clrMapOvr>
+    <a:masterClrMapping/>
+  </p:clrMapOvr>
+</p:sld>
+</file>
+
+<file path=ppt/slides/slide7.xml><?xml version="1.0" encoding="utf-8"?>
 <p:sld xmlns:a="http://schemas.openxmlformats.org/drawingml/2006/main" xmlns:p="http://schemas.openxmlformats.org/presentationml/2006/main" xmlns:r="http://schemas.openxmlformats.org/officeDocument/2006/relationships">
   <p:cSld>
     <p:bg>
@@ -9154,8 +11614,8 @@
         </p:nvSpPr>
         <p:spPr>
           <a:xfrm>
-            <a:off x="929487" y="2286000"/>
-            <a:ext cx="3200400" cy="4023360"/>
+            <a:off x="731520" y="2286000"/>
+            <a:ext cx="5029200" cy="4114800"/>
           </a:xfrm>
           <a:prstGeom prst="roundRect">
             <a:avLst/>
@@ -9197,8 +11657,8 @@
         </p:nvSpPr>
         <p:spPr>
           <a:xfrm>
-            <a:off x="1158087" y="2560320"/>
-            <a:ext cx="2743200" cy="457200"/>
+            <a:off x="1005840" y="2468880"/>
+            <a:ext cx="4480560" cy="365760"/>
           </a:xfrm>
           <a:prstGeom prst="rect">
             <a:avLst/>
@@ -9211,8 +11671,8 @@
           </a:bodyPr>
           <a:lstStyle/>
           <a:p>
-            <a:pPr algn="ctr">
-              <a:defRPr sz="2000" b="1">
+            <a:pPr algn="l">
+              <a:defRPr sz="2200" b="1">
                 <a:solidFill>
                   <a:srgbClr val="D57028"/>
                 </a:solidFill>
@@ -9220,7 +11680,7 @@
               </a:defRPr>
             </a:pPr>
             <a:r>
-              <a:t>Founder Spotlight</a:t>
+              <a:t>Versed Wellness</a:t>
             </a:r>
           </a:p>
         </p:txBody>
@@ -9233,8 +11693,8 @@
         </p:nvSpPr>
         <p:spPr>
           <a:xfrm>
-            <a:off x="1158087" y="3200400"/>
-            <a:ext cx="2743200" cy="2011680"/>
+            <a:off x="1005840" y="2880360"/>
+            <a:ext cx="4480560" cy="320040"/>
           </a:xfrm>
           <a:prstGeom prst="rect">
             <a:avLst/>
@@ -9256,21 +11716,73 @@
               </a:defRPr>
             </a:pPr>
             <a:r>
-              <a:t>A first-time founder joined Sengo's education program, refined their pitch through our workshops, and connected with an investor at Pitch Night. Within 6 months, they closed a pre-seed round through our ecosystem.</a:t>
-            </a:r>
-          </a:p>
-        </p:txBody>
-      </p:sp>
-      <p:sp>
-        <p:nvSpPr>
-          <p:cNvPr id="9" name="Rounded Rectangle 8"/>
+              <a:t>Founder: Jasmine Bowie  |  Grant: $500 Micro-Grant</a:t>
+            </a:r>
+          </a:p>
+        </p:txBody>
+      </p:sp>
+      <p:sp>
+        <p:nvSpPr>
+          <p:cNvPr id="9" name="TextBox 8"/>
+          <p:cNvSpPr txBox="1"/>
+          <p:nvPr/>
+        </p:nvSpPr>
+        <p:spPr>
+          <a:xfrm>
+            <a:off x="1005840" y="3383280"/>
+            <a:ext cx="4480560" cy="1645920"/>
+          </a:xfrm>
+          <a:prstGeom prst="rect">
+            <a:avLst/>
+          </a:prstGeom>
+          <a:noFill/>
+        </p:spPr>
+        <p:txBody>
+          <a:bodyPr wrap="square">
+            <a:spAutoFit/>
+          </a:bodyPr>
+          <a:lstStyle/>
+          <a:p>
+            <a:pPr algn="l">
+              <a:defRPr sz="1400" b="0">
+                <a:solidFill>
+                  <a:srgbClr val="F3EDE7"/>
+                </a:solidFill>
+                <a:latin typeface="Arial"/>
+              </a:defRPr>
+            </a:pPr>
+            <a:r>
+              <a:t>Impact:</a:t>
+            </a:r>
+            <a:br/>
+            <a:r>
+              <a:t>• Concept → physical prototype</a:t>
+            </a:r>
+            <a:br/>
+            <a:r>
+              <a:t>• 25 new customers acquired</a:t>
+            </a:r>
+            <a:br/>
+            <a:r>
+              <a:t>• Revenue increased post-grant</a:t>
+            </a:r>
+            <a:br/>
+            <a:r>
+              <a:t>• Founder chose not to raise capital prematurely</a:t>
+            </a:r>
+          </a:p>
+        </p:txBody>
+      </p:sp>
+      <p:sp>
+        <p:nvSpPr>
+          <p:cNvPr id="10" name="Rounded Rectangle 9"/>
           <p:cNvSpPr/>
           <p:nvPr/>
         </p:nvSpPr>
         <p:spPr>
           <a:xfrm>
-            <a:off x="1523847" y="5486400"/>
-            <a:ext cx="2011680" cy="502920"/>
+            <a:off x="1005840" y="5394960"/>
+            <a:ext cx="4114800" cy="640080"/>
           </a:xfrm>
           <a:prstGeom prst="roundRect">
             <a:avLst/>
@@ -9300,29 +11812,56 @@
           <a:bodyPr rtlCol="0" anchor="ctr"/>
           <a:lstStyle/>
           <a:p>
-            <a:pPr algn="ctr">
-              <a:defRPr sz="1400" b="1">
+            <a:pPr algn="ctr"/>
+          </a:p>
+        </p:txBody>
+      </p:sp>
+      <p:sp>
+        <p:nvSpPr>
+          <p:cNvPr id="11" name="TextBox 10"/>
+          <p:cNvSpPr txBox="1"/>
+          <p:nvPr/>
+        </p:nvSpPr>
+        <p:spPr>
+          <a:xfrm>
+            <a:off x="1097280" y="5486400"/>
+            <a:ext cx="3931920" cy="457200"/>
+          </a:xfrm>
+          <a:prstGeom prst="rect">
+            <a:avLst/>
+          </a:prstGeom>
+          <a:noFill/>
+        </p:spPr>
+        <p:txBody>
+          <a:bodyPr wrap="square">
+            <a:spAutoFit/>
+          </a:bodyPr>
+          <a:lstStyle/>
+          <a:p>
+            <a:pPr algn="l">
+              <a:defRPr sz="1300" b="1">
                 <a:solidFill>
                   <a:srgbClr val="FFFFFF"/>
                 </a:solidFill>
-              </a:defRPr>
-            </a:pPr>
-            <a:r>
-              <a:t>Capital Secured</a:t>
-            </a:r>
-          </a:p>
-        </p:txBody>
-      </p:sp>
-      <p:sp>
-        <p:nvSpPr>
-          <p:cNvPr id="10" name="Rounded Rectangle 9"/>
+                <a:latin typeface="Arial"/>
+              </a:defRPr>
+            </a:pPr>
+            <a:r>
+              <a:t>Why it matters: Readiness includes knowing when not to fundraise.</a:t>
+            </a:r>
+          </a:p>
+        </p:txBody>
+      </p:sp>
+      <p:sp>
+        <p:nvSpPr>
+          <p:cNvPr id="12" name="Rounded Rectangle 11"/>
           <p:cNvSpPr/>
           <p:nvPr/>
         </p:nvSpPr>
         <p:spPr>
           <a:xfrm>
-            <a:off x="4495647" y="2286000"/>
-            <a:ext cx="3200400" cy="4023360"/>
+            <a:off x="6400800" y="2286000"/>
+            <a:ext cx="5029200" cy="4114800"/>
           </a:xfrm>
           <a:prstGeom prst="roundRect">
             <a:avLst/>
@@ -9358,14 +11897,14 @@
       </p:sp>
       <p:sp>
         <p:nvSpPr>
-          <p:cNvPr id="11" name="TextBox 10"/>
+          <p:cNvPr id="13" name="TextBox 12"/>
           <p:cNvSpPr txBox="1"/>
           <p:nvPr/>
         </p:nvSpPr>
         <p:spPr>
           <a:xfrm>
-            <a:off x="4724247" y="2560320"/>
-            <a:ext cx="2743200" cy="457200"/>
+            <a:off x="6675120" y="2468880"/>
+            <a:ext cx="4480560" cy="365760"/>
           </a:xfrm>
           <a:prstGeom prst="rect">
             <a:avLst/>
@@ -9378,8 +11917,8 @@
           </a:bodyPr>
           <a:lstStyle/>
           <a:p>
-            <a:pPr algn="ctr">
-              <a:defRPr sz="2000" b="1">
+            <a:pPr algn="l">
+              <a:defRPr sz="2200" b="1">
                 <a:solidFill>
                   <a:srgbClr val="D57028"/>
                 </a:solidFill>
@@ -9387,21 +11926,21 @@
               </a:defRPr>
             </a:pPr>
             <a:r>
-              <a:t>Funder Journey</a:t>
-            </a:r>
-          </a:p>
-        </p:txBody>
-      </p:sp>
-      <p:sp>
-        <p:nvSpPr>
-          <p:cNvPr id="12" name="TextBox 11"/>
+              <a:t>Satlyt</a:t>
+            </a:r>
+          </a:p>
+        </p:txBody>
+      </p:sp>
+      <p:sp>
+        <p:nvSpPr>
+          <p:cNvPr id="14" name="TextBox 13"/>
           <p:cNvSpPr txBox="1"/>
           <p:nvPr/>
         </p:nvSpPr>
         <p:spPr>
           <a:xfrm>
-            <a:off x="4724247" y="3200400"/>
-            <a:ext cx="2743200" cy="2011680"/>
+            <a:off x="6675120" y="2880360"/>
+            <a:ext cx="4480560" cy="320040"/>
           </a:xfrm>
           <a:prstGeom prst="rect">
             <a:avLst/>
@@ -9423,21 +11962,73 @@
               </a:defRPr>
             </a:pPr>
             <a:r>
-              <a:t>A new investor enrolled in our Funder Education Series with zero investing experience. After completing the program, they made their first angel investments through Sengo's curated deal flow pipeline.</a:t>
-            </a:r>
-          </a:p>
-        </p:txBody>
-      </p:sp>
-      <p:sp>
-        <p:nvSpPr>
-          <p:cNvPr id="13" name="Rounded Rectangle 12"/>
+              <a:t>Founder: Rama Afullo  |  Grant: $3,000 Standard Grant</a:t>
+            </a:r>
+          </a:p>
+        </p:txBody>
+      </p:sp>
+      <p:sp>
+        <p:nvSpPr>
+          <p:cNvPr id="15" name="TextBox 14"/>
+          <p:cNvSpPr txBox="1"/>
+          <p:nvPr/>
+        </p:nvSpPr>
+        <p:spPr>
+          <a:xfrm>
+            <a:off x="6675120" y="3383280"/>
+            <a:ext cx="4480560" cy="1645920"/>
+          </a:xfrm>
+          <a:prstGeom prst="rect">
+            <a:avLst/>
+          </a:prstGeom>
+          <a:noFill/>
+        </p:spPr>
+        <p:txBody>
+          <a:bodyPr wrap="square">
+            <a:spAutoFit/>
+          </a:bodyPr>
+          <a:lstStyle/>
+          <a:p>
+            <a:pPr algn="l">
+              <a:defRPr sz="1400" b="0">
+                <a:solidFill>
+                  <a:srgbClr val="F3EDE7"/>
+                </a:solidFill>
+                <a:latin typeface="Arial"/>
+              </a:defRPr>
+            </a:pPr>
+            <a:r>
+              <a:t>Impact:</a:t>
+            </a:r>
+            <a:br/>
+            <a:r>
+              <a:t>• 10 new customers acquired</a:t>
+            </a:r>
+            <a:br/>
+            <a:r>
+              <a:t>• Operational capacity expanded</a:t>
+            </a:r>
+            <a:br/>
+            <a:r>
+              <a:t>• $3M raised post-Sengo</a:t>
+            </a:r>
+            <a:br/>
+            <a:r>
+              <a:t>• 12 new hires</a:t>
+            </a:r>
+          </a:p>
+        </p:txBody>
+      </p:sp>
+      <p:sp>
+        <p:nvSpPr>
+          <p:cNvPr id="16" name="Rounded Rectangle 15"/>
           <p:cNvSpPr/>
           <p:nvPr/>
         </p:nvSpPr>
         <p:spPr>
           <a:xfrm>
-            <a:off x="5090007" y="5486400"/>
-            <a:ext cx="2011680" cy="502920"/>
+            <a:off x="6675120" y="5394960"/>
+            <a:ext cx="4114800" cy="640080"/>
           </a:xfrm>
           <a:prstGeom prst="roundRect">
             <a:avLst/>
@@ -9467,72 +12058,20 @@
           <a:bodyPr rtlCol="0" anchor="ctr"/>
           <a:lstStyle/>
           <a:p>
-            <a:pPr algn="ctr">
-              <a:defRPr sz="1400" b="1">
-                <a:solidFill>
-                  <a:srgbClr val="FFFFFF"/>
-                </a:solidFill>
-              </a:defRPr>
-            </a:pPr>
-            <a:r>
-              <a:t>Investor Activated</a:t>
-            </a:r>
-          </a:p>
-        </p:txBody>
-      </p:sp>
-      <p:sp>
-        <p:nvSpPr>
-          <p:cNvPr id="14" name="Rounded Rectangle 13"/>
-          <p:cNvSpPr/>
-          <p:nvPr/>
-        </p:nvSpPr>
-        <p:spPr>
-          <a:xfrm>
-            <a:off x="8061807" y="2286000"/>
-            <a:ext cx="3200400" cy="4023360"/>
-          </a:xfrm>
-          <a:prstGeom prst="roundRect">
-            <a:avLst/>
-          </a:prstGeom>
-          <a:solidFill>
-            <a:srgbClr val="244A47"/>
-          </a:solidFill>
-          <a:ln>
-            <a:noFill/>
-          </a:ln>
-        </p:spPr>
-        <p:style>
-          <a:lnRef idx="1">
-            <a:schemeClr val="accent1"/>
-          </a:lnRef>
-          <a:fillRef idx="3">
-            <a:schemeClr val="accent1"/>
-          </a:fillRef>
-          <a:effectRef idx="2">
-            <a:schemeClr val="accent1"/>
-          </a:effectRef>
-          <a:fontRef idx="minor">
-            <a:schemeClr val="lt1"/>
-          </a:fontRef>
-        </p:style>
-        <p:txBody>
-          <a:bodyPr rtlCol="0" anchor="ctr"/>
-          <a:lstStyle/>
-          <a:p>
             <a:pPr algn="ctr"/>
           </a:p>
         </p:txBody>
       </p:sp>
       <p:sp>
         <p:nvSpPr>
-          <p:cNvPr id="15" name="TextBox 14"/>
+          <p:cNvPr id="17" name="TextBox 16"/>
           <p:cNvSpPr txBox="1"/>
           <p:nvPr/>
         </p:nvSpPr>
         <p:spPr>
           <a:xfrm>
-            <a:off x="8290407" y="2560320"/>
-            <a:ext cx="2743200" cy="457200"/>
+            <a:off x="6766560" y="5486400"/>
+            <a:ext cx="3931920" cy="457200"/>
           </a:xfrm>
           <a:prstGeom prst="rect">
             <a:avLst/>
@@ -9545,104 +12084,16 @@
           </a:bodyPr>
           <a:lstStyle/>
           <a:p>
-            <a:pPr algn="ctr">
-              <a:defRPr sz="2000" b="1">
-                <a:solidFill>
-                  <a:srgbClr val="D57028"/>
+            <a:pPr algn="l">
+              <a:defRPr sz="1300" b="1">
+                <a:solidFill>
+                  <a:srgbClr val="FFFFFF"/>
                 </a:solidFill>
                 <a:latin typeface="Arial"/>
               </a:defRPr>
             </a:pPr>
             <a:r>
-              <a:t>Community Impact</a:t>
-            </a:r>
-          </a:p>
-        </p:txBody>
-      </p:sp>
-      <p:sp>
-        <p:nvSpPr>
-          <p:cNvPr id="16" name="TextBox 15"/>
-          <p:cNvSpPr txBox="1"/>
-          <p:nvPr/>
-        </p:nvSpPr>
-        <p:spPr>
-          <a:xfrm>
-            <a:off x="8290407" y="3200400"/>
-            <a:ext cx="2743200" cy="2011680"/>
-          </a:xfrm>
-          <a:prstGeom prst="rect">
-            <a:avLst/>
-          </a:prstGeom>
-          <a:noFill/>
-        </p:spPr>
-        <p:txBody>
-          <a:bodyPr wrap="square">
-            <a:spAutoFit/>
-          </a:bodyPr>
-          <a:lstStyle/>
-          <a:p>
-            <a:pPr algn="l">
-              <a:defRPr sz="1300" b="0">
-                <a:solidFill>
-                  <a:srgbClr val="F3EDE7"/>
-                </a:solidFill>
-                <a:latin typeface="Arial"/>
-              </a:defRPr>
-            </a:pPr>
-            <a:r>
-              <a:t>Through our grant programs and mentorship network, a cohort of underrepresented founders received non-dilutive capital and guidance, resulting in a combined 167X return on grant capital deployed.</a:t>
-            </a:r>
-          </a:p>
-        </p:txBody>
-      </p:sp>
-      <p:sp>
-        <p:nvSpPr>
-          <p:cNvPr id="17" name="Rounded Rectangle 16"/>
-          <p:cNvSpPr/>
-          <p:nvPr/>
-        </p:nvSpPr>
-        <p:spPr>
-          <a:xfrm>
-            <a:off x="8656167" y="5486400"/>
-            <a:ext cx="2011680" cy="502920"/>
-          </a:xfrm>
-          <a:prstGeom prst="roundRect">
-            <a:avLst/>
-          </a:prstGeom>
-          <a:solidFill>
-            <a:srgbClr val="D57028"/>
-          </a:solidFill>
-          <a:ln>
-            <a:noFill/>
-          </a:ln>
-        </p:spPr>
-        <p:style>
-          <a:lnRef idx="1">
-            <a:schemeClr val="accent1"/>
-          </a:lnRef>
-          <a:fillRef idx="3">
-            <a:schemeClr val="accent1"/>
-          </a:fillRef>
-          <a:effectRef idx="2">
-            <a:schemeClr val="accent1"/>
-          </a:effectRef>
-          <a:fontRef idx="minor">
-            <a:schemeClr val="lt1"/>
-          </a:fontRef>
-        </p:style>
-        <p:txBody>
-          <a:bodyPr rtlCol="0" anchor="ctr"/>
-          <a:lstStyle/>
-          <a:p>
-            <a:pPr algn="ctr">
-              <a:defRPr sz="1400" b="1">
-                <a:solidFill>
-                  <a:srgbClr val="FFFFFF"/>
-                </a:solidFill>
-              </a:defRPr>
-            </a:pPr>
-            <a:r>
-              <a:t>167X Return</a:t>
+              <a:t>Why it matters: Prepared founders convert early support into scalable outcomes.</a:t>
             </a:r>
           </a:p>
         </p:txBody>
@@ -9655,7 +12106,7 @@
 </p:sld>
 </file>
 
-<file path=ppt/slides/slide7.xml><?xml version="1.0" encoding="utf-8"?>
+<file path=ppt/slides/slide8.xml><?xml version="1.0" encoding="utf-8"?>
 <p:sld xmlns:a="http://schemas.openxmlformats.org/drawingml/2006/main" xmlns:p="http://schemas.openxmlformats.org/presentationml/2006/main" xmlns:r="http://schemas.openxmlformats.org/officeDocument/2006/relationships">
   <p:cSld>
     <p:bg>
@@ -9783,7 +12234,7 @@
               </a:defRPr>
             </a:pPr>
             <a:r>
-              <a:t>Our Model</a:t>
+              <a:t>Readiness-First Capital Infrastructure</a:t>
             </a:r>
           </a:p>
         </p:txBody>
@@ -9840,7 +12291,7 @@
         <p:spPr>
           <a:xfrm>
             <a:off x="914400" y="2286000"/>
-            <a:ext cx="5029200" cy="4114800"/>
+            <a:ext cx="5486400" cy="457200"/>
           </a:xfrm>
           <a:prstGeom prst="rect">
             <a:avLst/>
@@ -9854,7 +12305,43 @@
           <a:lstStyle/>
           <a:p>
             <a:pPr algn="l">
-              <a:defRPr sz="1600" b="0">
+              <a:defRPr sz="1800" b="1">
+                <a:solidFill>
+                  <a:srgbClr val="1B3533"/>
+                </a:solidFill>
+                <a:latin typeface="Arial"/>
+              </a:defRPr>
+            </a:pPr>
+            <a:r>
+              <a:t>Sengo is built around preparation before participation.</a:t>
+            </a:r>
+          </a:p>
+        </p:txBody>
+      </p:sp>
+      <p:sp>
+        <p:nvSpPr>
+          <p:cNvPr id="7" name="TextBox 6"/>
+          <p:cNvSpPr txBox="1"/>
+          <p:nvPr/>
+        </p:nvSpPr>
+        <p:spPr>
+          <a:xfrm>
+            <a:off x="914400" y="2926080"/>
+            <a:ext cx="5029200" cy="3200400"/>
+          </a:xfrm>
+          <a:prstGeom prst="rect">
+            <a:avLst/>
+          </a:prstGeom>
+          <a:noFill/>
+        </p:spPr>
+        <p:txBody>
+          <a:bodyPr wrap="square">
+            <a:spAutoFit/>
+          </a:bodyPr>
+          <a:lstStyle/>
+          <a:p>
+            <a:pPr algn="l">
+              <a:defRPr sz="1500" b="0">
                 <a:solidFill>
                   <a:srgbClr val="67441A"/>
                 </a:solidFill>
@@ -9862,46 +12349,40 @@
               </a:defRPr>
             </a:pPr>
             <a:r>
-              <a:t>Sengo combines education, technology, and non-dilutive capital into one integrated ecosystem.</a:t>
+              <a:t>Technology:</a:t>
+            </a:r>
+            <a:br/>
+            <a:r>
+              <a:t>  • Fundraise Readiness Score</a:t>
+            </a:r>
+            <a:br/>
+            <a:r>
+              <a:t>  • Personalized Fundraise Roadmap</a:t>
             </a:r>
             <a:br/>
             <a:br/>
             <a:r>
-              <a:t>Our model connects three key pathways:</a:t>
+              <a:t>Human Support:</a:t>
+            </a:r>
+            <a:br/>
+            <a:r>
+              <a:t>  • 1:1 advisory for founders at key inflection points</a:t>
             </a:r>
             <a:br/>
             <a:br/>
             <a:r>
-              <a:t>• Founders — Access education, resources, and funding</a:t>
+              <a:t>Community Layer:</a:t>
             </a:r>
             <a:br/>
             <a:r>
-              <a:t>  opportunities to prepare to scale.</a:t>
-            </a:r>
-            <a:br/>
-            <a:br/>
-            <a:r>
-              <a:t>• Funders — Learn how to invest in early-stage companies</a:t>
-            </a:r>
-            <a:br/>
-            <a:r>
-              <a:t>  and discover high-potential deal flow.</a:t>
-            </a:r>
-            <a:br/>
-            <a:br/>
-            <a:r>
-              <a:t>• Both — Full access to founder and funder resources</a:t>
-            </a:r>
-            <a:br/>
-            <a:r>
-              <a:t>  for those who build and invest simultaneously.</a:t>
-            </a:r>
-          </a:p>
-        </p:txBody>
-      </p:sp>
-      <p:sp>
-        <p:nvSpPr>
-          <p:cNvPr id="7" name="Oval 6"/>
+              <a:t>  • Education, events, and peer learning</a:t>
+            </a:r>
+          </a:p>
+        </p:txBody>
+      </p:sp>
+      <p:sp>
+        <p:nvSpPr>
+          <p:cNvPr id="8" name="Oval 7"/>
           <p:cNvSpPr/>
           <p:nvPr/>
         </p:nvSpPr>
@@ -9953,7 +12434,7 @@
       </p:sp>
       <p:sp>
         <p:nvSpPr>
-          <p:cNvPr id="8" name="Rounded Rectangle 7"/>
+          <p:cNvPr id="9" name="Rounded Rectangle 8"/>
           <p:cNvSpPr/>
           <p:nvPr/>
         </p:nvSpPr>
@@ -9998,14 +12479,14 @@
               </a:defRPr>
             </a:pPr>
             <a:r>
-              <a:t>Education</a:t>
-            </a:r>
-          </a:p>
-        </p:txBody>
-      </p:sp>
-      <p:sp>
-        <p:nvSpPr>
-          <p:cNvPr id="9" name="Rounded Rectangle 8"/>
+              <a:t>Technology</a:t>
+            </a:r>
+          </a:p>
+        </p:txBody>
+      </p:sp>
+      <p:sp>
+        <p:nvSpPr>
+          <p:cNvPr id="10" name="Rounded Rectangle 9"/>
           <p:cNvSpPr/>
           <p:nvPr/>
         </p:nvSpPr>
@@ -10050,14 +12531,14 @@
               </a:defRPr>
             </a:pPr>
             <a:r>
-              <a:t>Technology</a:t>
-            </a:r>
-          </a:p>
-        </p:txBody>
-      </p:sp>
-      <p:sp>
-        <p:nvSpPr>
-          <p:cNvPr id="10" name="Rounded Rectangle 9"/>
+              <a:t>Readiness</a:t>
+            </a:r>
+          </a:p>
+        </p:txBody>
+      </p:sp>
+      <p:sp>
+        <p:nvSpPr>
+          <p:cNvPr id="11" name="Rounded Rectangle 10"/>
           <p:cNvSpPr/>
           <p:nvPr/>
         </p:nvSpPr>
@@ -10102,14 +12583,14 @@
               </a:defRPr>
             </a:pPr>
             <a:r>
-              <a:t>Capital</a:t>
-            </a:r>
-          </a:p>
-        </p:txBody>
-      </p:sp>
-      <p:sp>
-        <p:nvSpPr>
-          <p:cNvPr id="11" name="Rounded Rectangle 10"/>
+              <a:t>Advisory</a:t>
+            </a:r>
+          </a:p>
+        </p:txBody>
+      </p:sp>
+      <p:sp>
+        <p:nvSpPr>
+          <p:cNvPr id="12" name="Rounded Rectangle 11"/>
           <p:cNvSpPr/>
           <p:nvPr/>
         </p:nvSpPr>
@@ -10155,6 +12636,85 @@
             </a:pPr>
             <a:r>
               <a:t>Community</a:t>
+            </a:r>
+          </a:p>
+        </p:txBody>
+      </p:sp>
+      <p:sp>
+        <p:nvSpPr>
+          <p:cNvPr id="13" name="Rounded Rectangle 12"/>
+          <p:cNvSpPr/>
+          <p:nvPr/>
+        </p:nvSpPr>
+        <p:spPr>
+          <a:xfrm>
+            <a:off x="914400" y="5852160"/>
+            <a:ext cx="10058400" cy="640080"/>
+          </a:xfrm>
+          <a:prstGeom prst="roundRect">
+            <a:avLst/>
+          </a:prstGeom>
+          <a:solidFill>
+            <a:srgbClr val="D57028"/>
+          </a:solidFill>
+          <a:ln>
+            <a:noFill/>
+          </a:ln>
+        </p:spPr>
+        <p:style>
+          <a:lnRef idx="1">
+            <a:schemeClr val="accent1"/>
+          </a:lnRef>
+          <a:fillRef idx="3">
+            <a:schemeClr val="accent1"/>
+          </a:fillRef>
+          <a:effectRef idx="2">
+            <a:schemeClr val="accent1"/>
+          </a:effectRef>
+          <a:fontRef idx="minor">
+            <a:schemeClr val="lt1"/>
+          </a:fontRef>
+        </p:style>
+        <p:txBody>
+          <a:bodyPr rtlCol="0" anchor="ctr"/>
+          <a:lstStyle/>
+          <a:p>
+            <a:pPr algn="ctr"/>
+          </a:p>
+        </p:txBody>
+      </p:sp>
+      <p:sp>
+        <p:nvSpPr>
+          <p:cNvPr id="14" name="TextBox 13"/>
+          <p:cNvSpPr txBox="1"/>
+          <p:nvPr/>
+        </p:nvSpPr>
+        <p:spPr>
+          <a:xfrm>
+            <a:off x="1188720" y="5943600"/>
+            <a:ext cx="9509760" cy="457200"/>
+          </a:xfrm>
+          <a:prstGeom prst="rect">
+            <a:avLst/>
+          </a:prstGeom>
+          <a:noFill/>
+        </p:spPr>
+        <p:txBody>
+          <a:bodyPr wrap="square">
+            <a:spAutoFit/>
+          </a:bodyPr>
+          <a:lstStyle/>
+          <a:p>
+            <a:pPr algn="ctr">
+              <a:defRPr sz="1500" b="1">
+                <a:solidFill>
+                  <a:srgbClr val="FFFFFF"/>
+                </a:solidFill>
+                <a:latin typeface="Arial"/>
+              </a:defRPr>
+            </a:pPr>
+            <a:r>
+              <a:t>Result: Better decisions, stronger outcomes, and healthier capital relationships.</a:t>
             </a:r>
           </a:p>
         </p:txBody>
@@ -10167,7 +12727,7 @@
 </p:sld>
 </file>
 
-<file path=ppt/slides/slide8.xml><?xml version="1.0" encoding="utf-8"?>
+<file path=ppt/slides/slide9.xml><?xml version="1.0" encoding="utf-8"?>
 <p:sld xmlns:a="http://schemas.openxmlformats.org/drawingml/2006/main" xmlns:p="http://schemas.openxmlformats.org/presentationml/2006/main" xmlns:r="http://schemas.openxmlformats.org/officeDocument/2006/relationships">
   <p:cSld>
     <p:bg>
@@ -10295,7 +12855,7 @@
               </a:defRPr>
             </a:pPr>
             <a:r>
-              <a:t>Theory of Change</a:t>
+              <a:t>How Readiness Drives Impact</a:t>
             </a:r>
           </a:p>
         </p:txBody>
@@ -10352,7 +12912,7 @@
         <p:spPr>
           <a:xfrm>
             <a:off x="655167" y="2377440"/>
-            <a:ext cx="1920240" cy="3291840"/>
+            <a:ext cx="1920240" cy="3657600"/>
           </a:xfrm>
           <a:prstGeom prst="roundRect">
             <a:avLst/>
@@ -10447,7 +13007,7 @@
         <p:spPr>
           <a:xfrm>
             <a:off x="746607" y="3291840"/>
-            <a:ext cx="1737360" cy="457200"/>
+            <a:ext cx="1737360" cy="640080"/>
           </a:xfrm>
           <a:prstGeom prst="rect">
             <a:avLst/>
@@ -10461,7 +13021,7 @@
           <a:lstStyle/>
           <a:p>
             <a:pPr algn="ctr">
-              <a:defRPr sz="1600" b="1">
+              <a:defRPr sz="1500" b="1">
                 <a:solidFill>
                   <a:srgbClr val="D57028"/>
                 </a:solidFill>
@@ -10469,7 +13029,7 @@
               </a:defRPr>
             </a:pPr>
             <a:r>
-              <a:t>Problem</a:t>
+              <a:t>Inputs</a:t>
             </a:r>
           </a:p>
         </p:txBody>
@@ -10482,8 +13042,8 @@
         </p:nvSpPr>
         <p:spPr>
           <a:xfrm>
-            <a:off x="746607" y="3840480"/>
-            <a:ext cx="1737360" cy="1554480"/>
+            <a:off x="746607" y="4023360"/>
+            <a:ext cx="1737360" cy="1645920"/>
           </a:xfrm>
           <a:prstGeom prst="rect">
             <a:avLst/>
@@ -10505,19 +13065,19 @@
               </a:defRPr>
             </a:pPr>
             <a:r>
-              <a:t>Wealth gap in private</a:t>
+              <a:t>Education</a:t>
             </a:r>
             <a:br/>
             <a:r>
-              <a:t>assets excludes under-</a:t>
+              <a:t>Readiness technology</a:t>
             </a:r>
             <a:br/>
             <a:r>
-              <a:t>represented founders</a:t>
+              <a:t>Community spaces</a:t>
             </a:r>
             <a:br/>
             <a:r>
-              <a:t>&amp; investors</a:t>
+              <a:t>Grant capital</a:t>
             </a:r>
           </a:p>
         </p:txBody>
@@ -10530,7 +13090,7 @@
         </p:nvSpPr>
         <p:spPr>
           <a:xfrm>
-            <a:off x="2621127" y="3566160"/>
+            <a:off x="2621127" y="3749040"/>
             <a:ext cx="228600" cy="457200"/>
           </a:xfrm>
           <a:prstGeom prst="rect">
@@ -10567,7 +13127,7 @@
         <p:spPr>
           <a:xfrm>
             <a:off x="2895447" y="2377440"/>
-            <a:ext cx="1920240" cy="3291840"/>
+            <a:ext cx="1920240" cy="3657600"/>
           </a:xfrm>
           <a:prstGeom prst="roundRect">
             <a:avLst/>
@@ -10662,7 +13222,7 @@
         <p:spPr>
           <a:xfrm>
             <a:off x="2986887" y="3291840"/>
-            <a:ext cx="1737360" cy="457200"/>
+            <a:ext cx="1737360" cy="640080"/>
           </a:xfrm>
           <a:prstGeom prst="rect">
             <a:avLst/>
@@ -10676,7 +13236,7 @@
           <a:lstStyle/>
           <a:p>
             <a:pPr algn="ctr">
-              <a:defRPr sz="1600" b="1">
+              <a:defRPr sz="1500" b="1">
                 <a:solidFill>
                   <a:srgbClr val="D57028"/>
                 </a:solidFill>
@@ -10684,7 +13244,7 @@
               </a:defRPr>
             </a:pPr>
             <a:r>
-              <a:t>Approach</a:t>
+              <a:t>Activities</a:t>
             </a:r>
           </a:p>
         </p:txBody>
@@ -10697,8 +13257,8 @@
         </p:nvSpPr>
         <p:spPr>
           <a:xfrm>
-            <a:off x="2986887" y="3840480"/>
-            <a:ext cx="1737360" cy="1554480"/>
+            <a:off x="2986887" y="4023360"/>
+            <a:ext cx="1737360" cy="1645920"/>
           </a:xfrm>
           <a:prstGeom prst="rect">
             <a:avLst/>
@@ -10720,19 +13280,19 @@
               </a:defRPr>
             </a:pPr>
             <a:r>
-              <a:t>Education + community</a:t>
+              <a:t>Assessments</a:t>
             </a:r>
             <a:br/>
             <a:r>
-              <a:t>+ technology + non-</a:t>
+              <a:t>Roadmaps</a:t>
             </a:r>
             <a:br/>
             <a:r>
-              <a:t>dilutive capital in one</a:t>
+              <a:t>Workshops</a:t>
             </a:r>
             <a:br/>
             <a:r>
-              <a:t>integrated ecosystem</a:t>
+              <a:t>Advisory support</a:t>
             </a:r>
           </a:p>
         </p:txBody>
@@ -10745,7 +13305,7 @@
         </p:nvSpPr>
         <p:spPr>
           <a:xfrm>
-            <a:off x="4861407" y="3566160"/>
+            <a:off x="4861407" y="3749040"/>
             <a:ext cx="228600" cy="457200"/>
           </a:xfrm>
           <a:prstGeom prst="rect">
@@ -10782,7 +13342,7 @@
         <p:spPr>
           <a:xfrm>
             <a:off x="5135727" y="2377440"/>
-            <a:ext cx="1920240" cy="3291840"/>
+            <a:ext cx="1920240" cy="3657600"/>
           </a:xfrm>
           <a:prstGeom prst="roundRect">
             <a:avLst/>
@@ -10877,7 +13437,7 @@
         <p:spPr>
           <a:xfrm>
             <a:off x="5227167" y="3291840"/>
-            <a:ext cx="1737360" cy="457200"/>
+            <a:ext cx="1737360" cy="640080"/>
           </a:xfrm>
           <a:prstGeom prst="rect">
             <a:avLst/>
@@ -10891,7 +13451,7 @@
           <a:lstStyle/>
           <a:p>
             <a:pPr algn="ctr">
-              <a:defRPr sz="1600" b="1">
+              <a:defRPr sz="1500" b="1">
                 <a:solidFill>
                   <a:srgbClr val="D57028"/>
                 </a:solidFill>
@@ -10912,8 +13472,8 @@
         </p:nvSpPr>
         <p:spPr>
           <a:xfrm>
-            <a:off x="5227167" y="3840480"/>
-            <a:ext cx="1737360" cy="1554480"/>
+            <a:off x="5227167" y="4023360"/>
+            <a:ext cx="1737360" cy="1645920"/>
           </a:xfrm>
           <a:prstGeom prst="rect">
             <a:avLst/>
@@ -10935,19 +13495,15 @@
               </a:defRPr>
             </a:pPr>
             <a:r>
-              <a:t>600 members, 90+</a:t>
+              <a:t>Prepared founders</a:t>
             </a:r>
             <a:br/>
             <a:r>
-              <a:t>touchpoints, workshops,</a:t>
+              <a:t>Informed funders</a:t>
             </a:r>
             <a:br/>
             <a:r>
-              <a:t>pitch events, and</a:t>
-            </a:r>
-            <a:br/>
-            <a:r>
-              <a:t>funding connections</a:t>
+              <a:t>Clear next steps</a:t>
             </a:r>
           </a:p>
         </p:txBody>
@@ -10960,7 +13516,7 @@
         </p:nvSpPr>
         <p:spPr>
           <a:xfrm>
-            <a:off x="7101687" y="3566160"/>
+            <a:off x="7101687" y="3749040"/>
             <a:ext cx="228600" cy="457200"/>
           </a:xfrm>
           <a:prstGeom prst="rect">
@@ -10997,7 +13553,7 @@
         <p:spPr>
           <a:xfrm>
             <a:off x="7376007" y="2377440"/>
-            <a:ext cx="1920240" cy="3291840"/>
+            <a:ext cx="1920240" cy="3657600"/>
           </a:xfrm>
           <a:prstGeom prst="roundRect">
             <a:avLst/>
@@ -11092,7 +13648,7 @@
         <p:spPr>
           <a:xfrm>
             <a:off x="7467447" y="3291840"/>
-            <a:ext cx="1737360" cy="457200"/>
+            <a:ext cx="1737360" cy="640080"/>
           </a:xfrm>
           <a:prstGeom prst="rect">
             <a:avLst/>
@@ -11106,7 +13662,7 @@
           <a:lstStyle/>
           <a:p>
             <a:pPr algn="ctr">
-              <a:defRPr sz="1600" b="1">
+              <a:defRPr sz="1500" b="1">
                 <a:solidFill>
                   <a:srgbClr val="D57028"/>
                 </a:solidFill>
@@ -11127,8 +13683,8 @@
         </p:nvSpPr>
         <p:spPr>
           <a:xfrm>
-            <a:off x="7467447" y="3840480"/>
-            <a:ext cx="1737360" cy="1554480"/>
+            <a:off x="7467447" y="4023360"/>
+            <a:ext cx="1737360" cy="1645920"/>
           </a:xfrm>
           <a:prstGeom prst="rect">
             <a:avLst/>
@@ -11150,19 +13706,23 @@
               </a:defRPr>
             </a:pPr>
             <a:r>
-              <a:t>$5M+ raised, 167X</a:t>
+              <a:t>Increased fundability</a:t>
             </a:r>
             <a:br/>
             <a:r>
-              <a:t>return on grants,</a:t>
+              <a:t>when appropriate</a:t>
             </a:r>
             <a:br/>
             <a:r>
-              <a:t>new investors activated,</a:t>
+              <a:t>Reduced premature</a:t>
             </a:r>
             <a:br/>
             <a:r>
-              <a:t>founder readiness</a:t>
+              <a:t>fundraising</a:t>
+            </a:r>
+            <a:br/>
+            <a:r>
+              <a:t>Stronger alignment</a:t>
             </a:r>
           </a:p>
         </p:txBody>
@@ -11175,7 +13735,7 @@
         </p:nvSpPr>
         <p:spPr>
           <a:xfrm>
-            <a:off x="9341967" y="3566160"/>
+            <a:off x="9341967" y="3749040"/>
             <a:ext cx="228600" cy="457200"/>
           </a:xfrm>
           <a:prstGeom prst="rect">
@@ -11212,7 +13772,7 @@
         <p:spPr>
           <a:xfrm>
             <a:off x="9616287" y="2377440"/>
-            <a:ext cx="1920240" cy="3291840"/>
+            <a:ext cx="1920240" cy="3657600"/>
           </a:xfrm>
           <a:prstGeom prst="roundRect">
             <a:avLst/>
@@ -11307,7 +13867,7 @@
         <p:spPr>
           <a:xfrm>
             <a:off x="9707727" y="3291840"/>
-            <a:ext cx="1737360" cy="457200"/>
+            <a:ext cx="1737360" cy="640080"/>
           </a:xfrm>
           <a:prstGeom prst="rect">
             <a:avLst/>
@@ -11321,13 +13881,17 @@
           <a:lstStyle/>
           <a:p>
             <a:pPr algn="ctr">
-              <a:defRPr sz="1600" b="1">
+              <a:defRPr sz="1500" b="1">
                 <a:solidFill>
                   <a:srgbClr val="D57028"/>
                 </a:solidFill>
                 <a:latin typeface="Arial"/>
               </a:defRPr>
             </a:pPr>
+            <a:r>
+              <a:t>Long-Term</a:t>
+            </a:r>
+            <a:br/>
             <a:r>
               <a:t>Impact</a:t>
             </a:r>
@@ -11342,8 +13906,8 @@
         </p:nvSpPr>
         <p:spPr>
           <a:xfrm>
-            <a:off x="9707727" y="3840480"/>
-            <a:ext cx="1737360" cy="1554480"/>
+            <a:off x="9707727" y="4023360"/>
+            <a:ext cx="1737360" cy="1645920"/>
           </a:xfrm>
           <a:prstGeom prst="rect">
             <a:avLst/>
@@ -11365,823 +13929,15 @@
               </a:defRPr>
             </a:pPr>
             <a:r>
-              <a:t>A more equitable</a:t>
+              <a:t>Communities that</a:t>
             </a:r>
             <a:br/>
             <a:r>
-              <a:t>entrepreneurial ecosystem</a:t>
+              <a:t>understand capital</a:t>
             </a:r>
             <a:br/>
             <a:r>
-              <a:t>where access to capital</a:t>
-            </a:r>
-            <a:br/>
-            <a:r>
-              <a:t>is democratized</a:t>
-            </a:r>
-          </a:p>
-        </p:txBody>
-      </p:sp>
-    </p:spTree>
-  </p:cSld>
-  <p:clrMapOvr>
-    <a:masterClrMapping/>
-  </p:clrMapOvr>
-</p:sld>
-</file>
-
-<file path=ppt/slides/slide9.xml><?xml version="1.0" encoding="utf-8"?>
-<p:sld xmlns:a="http://schemas.openxmlformats.org/drawingml/2006/main" xmlns:p="http://schemas.openxmlformats.org/presentationml/2006/main" xmlns:r="http://schemas.openxmlformats.org/officeDocument/2006/relationships">
-  <p:cSld>
-    <p:bg>
-      <p:bgPr>
-        <a:solidFill>
-          <a:srgbClr val="F3EDE7"/>
-        </a:solidFill>
-        <a:effectLst/>
-      </p:bgPr>
-    </p:bg>
-    <p:spTree>
-      <p:nvGrpSpPr>
-        <p:cNvPr id="1" name=""/>
-        <p:cNvGrpSpPr/>
-        <p:nvPr/>
-      </p:nvGrpSpPr>
-      <p:grpSpPr/>
-      <p:sp>
-        <p:nvSpPr>
-          <p:cNvPr id="2" name="Rectangle 1"/>
-          <p:cNvSpPr/>
-          <p:nvPr/>
-        </p:nvSpPr>
-        <p:spPr>
-          <a:xfrm>
-            <a:off x="0" y="0"/>
-            <a:ext cx="12191695" cy="63500"/>
-          </a:xfrm>
-          <a:prstGeom prst="rect">
-            <a:avLst/>
-          </a:prstGeom>
-          <a:solidFill>
-            <a:srgbClr val="D57028"/>
-          </a:solidFill>
-          <a:ln>
-            <a:noFill/>
-          </a:ln>
-        </p:spPr>
-        <p:style>
-          <a:lnRef idx="1">
-            <a:schemeClr val="accent1"/>
-          </a:lnRef>
-          <a:fillRef idx="3">
-            <a:schemeClr val="accent1"/>
-          </a:fillRef>
-          <a:effectRef idx="2">
-            <a:schemeClr val="accent1"/>
-          </a:effectRef>
-          <a:fontRef idx="minor">
-            <a:schemeClr val="lt1"/>
-          </a:fontRef>
-        </p:style>
-        <p:txBody>
-          <a:bodyPr rtlCol="0" anchor="ctr"/>
-          <a:lstStyle/>
-          <a:p>
-            <a:pPr algn="ctr"/>
-          </a:p>
-        </p:txBody>
-      </p:sp>
-      <p:sp>
-        <p:nvSpPr>
-          <p:cNvPr id="3" name="TextBox 2"/>
-          <p:cNvSpPr txBox="1"/>
-          <p:nvPr/>
-        </p:nvSpPr>
-        <p:spPr>
-          <a:xfrm>
-            <a:off x="914400" y="457200"/>
-            <a:ext cx="10058400" cy="457200"/>
-          </a:xfrm>
-          <a:prstGeom prst="rect">
-            <a:avLst/>
-          </a:prstGeom>
-          <a:noFill/>
-        </p:spPr>
-        <p:txBody>
-          <a:bodyPr wrap="square">
-            <a:spAutoFit/>
-          </a:bodyPr>
-          <a:lstStyle/>
-          <a:p>
-            <a:pPr algn="ctr">
-              <a:defRPr sz="1300" b="1">
-                <a:solidFill>
-                  <a:srgbClr val="D57028"/>
-                </a:solidFill>
-                <a:latin typeface="Arial"/>
-              </a:defRPr>
-            </a:pPr>
-            <a:r>
-              <a:t>WHAT WE DELIVER</a:t>
-            </a:r>
-          </a:p>
-        </p:txBody>
-      </p:sp>
-      <p:sp>
-        <p:nvSpPr>
-          <p:cNvPr id="4" name="TextBox 3"/>
-          <p:cNvSpPr txBox="1"/>
-          <p:nvPr/>
-        </p:nvSpPr>
-        <p:spPr>
-          <a:xfrm>
-            <a:off x="914400" y="914400"/>
-            <a:ext cx="10058400" cy="914400"/>
-          </a:xfrm>
-          <a:prstGeom prst="rect">
-            <a:avLst/>
-          </a:prstGeom>
-          <a:noFill/>
-        </p:spPr>
-        <p:txBody>
-          <a:bodyPr wrap="square">
-            <a:spAutoFit/>
-          </a:bodyPr>
-          <a:lstStyle/>
-          <a:p>
-            <a:pPr algn="ctr">
-              <a:defRPr sz="4000" b="1">
-                <a:solidFill>
-                  <a:srgbClr val="1B3533"/>
-                </a:solidFill>
-                <a:latin typeface="Arial"/>
-              </a:defRPr>
-            </a:pPr>
-            <a:r>
-              <a:t>Core Programs</a:t>
-            </a:r>
-          </a:p>
-        </p:txBody>
-      </p:sp>
-      <p:sp>
-        <p:nvSpPr>
-          <p:cNvPr id="5" name="Rectangle 4"/>
-          <p:cNvSpPr/>
-          <p:nvPr/>
-        </p:nvSpPr>
-        <p:spPr>
-          <a:xfrm>
-            <a:off x="5029200" y="1828800"/>
-            <a:ext cx="2103120" cy="50800"/>
-          </a:xfrm>
-          <a:prstGeom prst="rect">
-            <a:avLst/>
-          </a:prstGeom>
-          <a:solidFill>
-            <a:srgbClr val="D57028"/>
-          </a:solidFill>
-          <a:ln>
-            <a:noFill/>
-          </a:ln>
-        </p:spPr>
-        <p:style>
-          <a:lnRef idx="1">
-            <a:schemeClr val="accent1"/>
-          </a:lnRef>
-          <a:fillRef idx="3">
-            <a:schemeClr val="accent1"/>
-          </a:fillRef>
-          <a:effectRef idx="2">
-            <a:schemeClr val="accent1"/>
-          </a:effectRef>
-          <a:fontRef idx="minor">
-            <a:schemeClr val="lt1"/>
-          </a:fontRef>
-        </p:style>
-        <p:txBody>
-          <a:bodyPr rtlCol="0" anchor="ctr"/>
-          <a:lstStyle/>
-          <a:p>
-            <a:pPr algn="ctr"/>
-          </a:p>
-        </p:txBody>
-      </p:sp>
-      <p:sp>
-        <p:nvSpPr>
-          <p:cNvPr id="6" name="Rounded Rectangle 5"/>
-          <p:cNvSpPr/>
-          <p:nvPr/>
-        </p:nvSpPr>
-        <p:spPr>
-          <a:xfrm>
-            <a:off x="1371600" y="2286000"/>
-            <a:ext cx="5029200" cy="1371600"/>
-          </a:xfrm>
-          <a:prstGeom prst="roundRect">
-            <a:avLst/>
-          </a:prstGeom>
-          <a:solidFill>
-            <a:srgbClr val="1B3533"/>
-          </a:solidFill>
-          <a:ln>
-            <a:noFill/>
-          </a:ln>
-        </p:spPr>
-        <p:style>
-          <a:lnRef idx="1">
-            <a:schemeClr val="accent1"/>
-          </a:lnRef>
-          <a:fillRef idx="3">
-            <a:schemeClr val="accent1"/>
-          </a:fillRef>
-          <a:effectRef idx="2">
-            <a:schemeClr val="accent1"/>
-          </a:effectRef>
-          <a:fontRef idx="minor">
-            <a:schemeClr val="lt1"/>
-          </a:fontRef>
-        </p:style>
-        <p:txBody>
-          <a:bodyPr rtlCol="0" anchor="ctr"/>
-          <a:lstStyle/>
-          <a:p>
-            <a:pPr algn="ctr"/>
-          </a:p>
-        </p:txBody>
-      </p:sp>
-      <p:sp>
-        <p:nvSpPr>
-          <p:cNvPr id="7" name="TextBox 6"/>
-          <p:cNvSpPr txBox="1"/>
-          <p:nvPr/>
-        </p:nvSpPr>
-        <p:spPr>
-          <a:xfrm>
-            <a:off x="1645920" y="2423160"/>
-            <a:ext cx="457200" cy="457200"/>
-          </a:xfrm>
-          <a:prstGeom prst="rect">
-            <a:avLst/>
-          </a:prstGeom>
-          <a:noFill/>
-        </p:spPr>
-        <p:txBody>
-          <a:bodyPr wrap="square">
-            <a:spAutoFit/>
-          </a:bodyPr>
-          <a:lstStyle/>
-          <a:p>
-            <a:pPr algn="l">
-              <a:defRPr sz="2800" b="1">
-                <a:solidFill>
-                  <a:srgbClr val="D57028"/>
-                </a:solidFill>
-                <a:latin typeface="Arial"/>
-              </a:defRPr>
-            </a:pPr>
-            <a:r>
-              <a:t>01</a:t>
-            </a:r>
-          </a:p>
-        </p:txBody>
-      </p:sp>
-      <p:sp>
-        <p:nvSpPr>
-          <p:cNvPr id="8" name="TextBox 7"/>
-          <p:cNvSpPr txBox="1"/>
-          <p:nvPr/>
-        </p:nvSpPr>
-        <p:spPr>
-          <a:xfrm>
-            <a:off x="2286000" y="2423160"/>
-            <a:ext cx="2286000" cy="365760"/>
-          </a:xfrm>
-          <a:prstGeom prst="rect">
-            <a:avLst/>
-          </a:prstGeom>
-          <a:noFill/>
-        </p:spPr>
-        <p:txBody>
-          <a:bodyPr wrap="square">
-            <a:spAutoFit/>
-          </a:bodyPr>
-          <a:lstStyle/>
-          <a:p>
-            <a:pPr algn="l">
-              <a:defRPr sz="1800" b="1">
-                <a:solidFill>
-                  <a:srgbClr val="FFFFFF"/>
-                </a:solidFill>
-                <a:latin typeface="Arial"/>
-              </a:defRPr>
-            </a:pPr>
-            <a:r>
-              <a:t>Founder Enrollment</a:t>
-            </a:r>
-          </a:p>
-        </p:txBody>
-      </p:sp>
-      <p:sp>
-        <p:nvSpPr>
-          <p:cNvPr id="9" name="TextBox 8"/>
-          <p:cNvSpPr txBox="1"/>
-          <p:nvPr/>
-        </p:nvSpPr>
-        <p:spPr>
-          <a:xfrm>
-            <a:off x="2286000" y="2788920"/>
-            <a:ext cx="3840480" cy="731520"/>
-          </a:xfrm>
-          <a:prstGeom prst="rect">
-            <a:avLst/>
-          </a:prstGeom>
-          <a:noFill/>
-        </p:spPr>
-        <p:txBody>
-          <a:bodyPr wrap="square">
-            <a:spAutoFit/>
-          </a:bodyPr>
-          <a:lstStyle/>
-          <a:p>
-            <a:pPr algn="l">
-              <a:defRPr sz="1300" b="0">
-                <a:solidFill>
-                  <a:srgbClr val="F3EDE7"/>
-                </a:solidFill>
-                <a:latin typeface="Arial"/>
-              </a:defRPr>
-            </a:pPr>
-            <a:r>
-              <a:t>Comprehensive program preparing founders to scale — pitch</a:t>
-            </a:r>
-            <a:br/>
-            <a:r>
-              <a:t>prep, financial modeling, and investor readiness.</a:t>
-            </a:r>
-          </a:p>
-        </p:txBody>
-      </p:sp>
-      <p:sp>
-        <p:nvSpPr>
-          <p:cNvPr id="10" name="Rounded Rectangle 9"/>
-          <p:cNvSpPr/>
-          <p:nvPr/>
-        </p:nvSpPr>
-        <p:spPr>
-          <a:xfrm>
-            <a:off x="5790895" y="3886200"/>
-            <a:ext cx="5029200" cy="1371600"/>
-          </a:xfrm>
-          <a:prstGeom prst="roundRect">
-            <a:avLst/>
-          </a:prstGeom>
-          <a:solidFill>
-            <a:srgbClr val="1B3533"/>
-          </a:solidFill>
-          <a:ln>
-            <a:noFill/>
-          </a:ln>
-        </p:spPr>
-        <p:style>
-          <a:lnRef idx="1">
-            <a:schemeClr val="accent1"/>
-          </a:lnRef>
-          <a:fillRef idx="3">
-            <a:schemeClr val="accent1"/>
-          </a:fillRef>
-          <a:effectRef idx="2">
-            <a:schemeClr val="accent1"/>
-          </a:effectRef>
-          <a:fontRef idx="minor">
-            <a:schemeClr val="lt1"/>
-          </a:fontRef>
-        </p:style>
-        <p:txBody>
-          <a:bodyPr rtlCol="0" anchor="ctr"/>
-          <a:lstStyle/>
-          <a:p>
-            <a:pPr algn="ctr"/>
-          </a:p>
-        </p:txBody>
-      </p:sp>
-      <p:sp>
-        <p:nvSpPr>
-          <p:cNvPr id="11" name="TextBox 10"/>
-          <p:cNvSpPr txBox="1"/>
-          <p:nvPr/>
-        </p:nvSpPr>
-        <p:spPr>
-          <a:xfrm>
-            <a:off x="6065215" y="4023360"/>
-            <a:ext cx="457200" cy="457200"/>
-          </a:xfrm>
-          <a:prstGeom prst="rect">
-            <a:avLst/>
-          </a:prstGeom>
-          <a:noFill/>
-        </p:spPr>
-        <p:txBody>
-          <a:bodyPr wrap="square">
-            <a:spAutoFit/>
-          </a:bodyPr>
-          <a:lstStyle/>
-          <a:p>
-            <a:pPr algn="l">
-              <a:defRPr sz="2800" b="1">
-                <a:solidFill>
-                  <a:srgbClr val="D57028"/>
-                </a:solidFill>
-                <a:latin typeface="Arial"/>
-              </a:defRPr>
-            </a:pPr>
-            <a:r>
-              <a:t>02</a:t>
-            </a:r>
-          </a:p>
-        </p:txBody>
-      </p:sp>
-      <p:sp>
-        <p:nvSpPr>
-          <p:cNvPr id="12" name="TextBox 11"/>
-          <p:cNvSpPr txBox="1"/>
-          <p:nvPr/>
-        </p:nvSpPr>
-        <p:spPr>
-          <a:xfrm>
-            <a:off x="6705295" y="4023360"/>
-            <a:ext cx="2286000" cy="365760"/>
-          </a:xfrm>
-          <a:prstGeom prst="rect">
-            <a:avLst/>
-          </a:prstGeom>
-          <a:noFill/>
-        </p:spPr>
-        <p:txBody>
-          <a:bodyPr wrap="square">
-            <a:spAutoFit/>
-          </a:bodyPr>
-          <a:lstStyle/>
-          <a:p>
-            <a:pPr algn="l">
-              <a:defRPr sz="1800" b="1">
-                <a:solidFill>
-                  <a:srgbClr val="FFFFFF"/>
-                </a:solidFill>
-                <a:latin typeface="Arial"/>
-              </a:defRPr>
-            </a:pPr>
-            <a:r>
-              <a:t>Funder Education</a:t>
-            </a:r>
-          </a:p>
-        </p:txBody>
-      </p:sp>
-      <p:sp>
-        <p:nvSpPr>
-          <p:cNvPr id="13" name="TextBox 12"/>
-          <p:cNvSpPr txBox="1"/>
-          <p:nvPr/>
-        </p:nvSpPr>
-        <p:spPr>
-          <a:xfrm>
-            <a:off x="6705295" y="4389120"/>
-            <a:ext cx="3840480" cy="731520"/>
-          </a:xfrm>
-          <a:prstGeom prst="rect">
-            <a:avLst/>
-          </a:prstGeom>
-          <a:noFill/>
-        </p:spPr>
-        <p:txBody>
-          <a:bodyPr wrap="square">
-            <a:spAutoFit/>
-          </a:bodyPr>
-          <a:lstStyle/>
-          <a:p>
-            <a:pPr algn="l">
-              <a:defRPr sz="1300" b="0">
-                <a:solidFill>
-                  <a:srgbClr val="F3EDE7"/>
-                </a:solidFill>
-                <a:latin typeface="Arial"/>
-              </a:defRPr>
-            </a:pPr>
-            <a:r>
-              <a:t>Teaching new investors how to evaluate deals, understand</a:t>
-            </a:r>
-            <a:br/>
-            <a:r>
-              <a:t>term sheets, and build diversified portfolios.</a:t>
-            </a:r>
-          </a:p>
-        </p:txBody>
-      </p:sp>
-      <p:sp>
-        <p:nvSpPr>
-          <p:cNvPr id="14" name="Rounded Rectangle 13"/>
-          <p:cNvSpPr/>
-          <p:nvPr/>
-        </p:nvSpPr>
-        <p:spPr>
-          <a:xfrm>
-            <a:off x="1371600" y="5486400"/>
-            <a:ext cx="5029200" cy="1371600"/>
-          </a:xfrm>
-          <a:prstGeom prst="roundRect">
-            <a:avLst/>
-          </a:prstGeom>
-          <a:solidFill>
-            <a:srgbClr val="1B3533"/>
-          </a:solidFill>
-          <a:ln>
-            <a:noFill/>
-          </a:ln>
-        </p:spPr>
-        <p:style>
-          <a:lnRef idx="1">
-            <a:schemeClr val="accent1"/>
-          </a:lnRef>
-          <a:fillRef idx="3">
-            <a:schemeClr val="accent1"/>
-          </a:fillRef>
-          <a:effectRef idx="2">
-            <a:schemeClr val="accent1"/>
-          </a:effectRef>
-          <a:fontRef idx="minor">
-            <a:schemeClr val="lt1"/>
-          </a:fontRef>
-        </p:style>
-        <p:txBody>
-          <a:bodyPr rtlCol="0" anchor="ctr"/>
-          <a:lstStyle/>
-          <a:p>
-            <a:pPr algn="ctr"/>
-          </a:p>
-        </p:txBody>
-      </p:sp>
-      <p:sp>
-        <p:nvSpPr>
-          <p:cNvPr id="15" name="TextBox 14"/>
-          <p:cNvSpPr txBox="1"/>
-          <p:nvPr/>
-        </p:nvSpPr>
-        <p:spPr>
-          <a:xfrm>
-            <a:off x="1645920" y="5623560"/>
-            <a:ext cx="457200" cy="457200"/>
-          </a:xfrm>
-          <a:prstGeom prst="rect">
-            <a:avLst/>
-          </a:prstGeom>
-          <a:noFill/>
-        </p:spPr>
-        <p:txBody>
-          <a:bodyPr wrap="square">
-            <a:spAutoFit/>
-          </a:bodyPr>
-          <a:lstStyle/>
-          <a:p>
-            <a:pPr algn="l">
-              <a:defRPr sz="2800" b="1">
-                <a:solidFill>
-                  <a:srgbClr val="D57028"/>
-                </a:solidFill>
-                <a:latin typeface="Arial"/>
-              </a:defRPr>
-            </a:pPr>
-            <a:r>
-              <a:t>03</a:t>
-            </a:r>
-          </a:p>
-        </p:txBody>
-      </p:sp>
-      <p:sp>
-        <p:nvSpPr>
-          <p:cNvPr id="16" name="TextBox 15"/>
-          <p:cNvSpPr txBox="1"/>
-          <p:nvPr/>
-        </p:nvSpPr>
-        <p:spPr>
-          <a:xfrm>
-            <a:off x="2286000" y="5623560"/>
-            <a:ext cx="2286000" cy="365760"/>
-          </a:xfrm>
-          <a:prstGeom prst="rect">
-            <a:avLst/>
-          </a:prstGeom>
-          <a:noFill/>
-        </p:spPr>
-        <p:txBody>
-          <a:bodyPr wrap="square">
-            <a:spAutoFit/>
-          </a:bodyPr>
-          <a:lstStyle/>
-          <a:p>
-            <a:pPr algn="l">
-              <a:defRPr sz="1800" b="1">
-                <a:solidFill>
-                  <a:srgbClr val="FFFFFF"/>
-                </a:solidFill>
-                <a:latin typeface="Arial"/>
-              </a:defRPr>
-            </a:pPr>
-            <a:r>
-              <a:t>All-Access Program</a:t>
-            </a:r>
-          </a:p>
-        </p:txBody>
-      </p:sp>
-      <p:sp>
-        <p:nvSpPr>
-          <p:cNvPr id="17" name="TextBox 16"/>
-          <p:cNvSpPr txBox="1"/>
-          <p:nvPr/>
-        </p:nvSpPr>
-        <p:spPr>
-          <a:xfrm>
-            <a:off x="2286000" y="5989320"/>
-            <a:ext cx="3840480" cy="731520"/>
-          </a:xfrm>
-          <a:prstGeom prst="rect">
-            <a:avLst/>
-          </a:prstGeom>
-          <a:noFill/>
-        </p:spPr>
-        <p:txBody>
-          <a:bodyPr wrap="square">
-            <a:spAutoFit/>
-          </a:bodyPr>
-          <a:lstStyle/>
-          <a:p>
-            <a:pPr algn="l">
-              <a:defRPr sz="1300" b="0">
-                <a:solidFill>
-                  <a:srgbClr val="F3EDE7"/>
-                </a:solidFill>
-                <a:latin typeface="Arial"/>
-              </a:defRPr>
-            </a:pPr>
-            <a:r>
-              <a:t>For those who build and invest — full access to both</a:t>
-            </a:r>
-            <a:br/>
-            <a:r>
-              <a:t>founder and funder resources and events.</a:t>
-            </a:r>
-          </a:p>
-        </p:txBody>
-      </p:sp>
-      <p:sp>
-        <p:nvSpPr>
-          <p:cNvPr id="18" name="Rounded Rectangle 17"/>
-          <p:cNvSpPr/>
-          <p:nvPr/>
-        </p:nvSpPr>
-        <p:spPr>
-          <a:xfrm>
-            <a:off x="5790895" y="7086600"/>
-            <a:ext cx="5029200" cy="1371600"/>
-          </a:xfrm>
-          <a:prstGeom prst="roundRect">
-            <a:avLst/>
-          </a:prstGeom>
-          <a:solidFill>
-            <a:srgbClr val="1B3533"/>
-          </a:solidFill>
-          <a:ln>
-            <a:noFill/>
-          </a:ln>
-        </p:spPr>
-        <p:style>
-          <a:lnRef idx="1">
-            <a:schemeClr val="accent1"/>
-          </a:lnRef>
-          <a:fillRef idx="3">
-            <a:schemeClr val="accent1"/>
-          </a:fillRef>
-          <a:effectRef idx="2">
-            <a:schemeClr val="accent1"/>
-          </a:effectRef>
-          <a:fontRef idx="minor">
-            <a:schemeClr val="lt1"/>
-          </a:fontRef>
-        </p:style>
-        <p:txBody>
-          <a:bodyPr rtlCol="0" anchor="ctr"/>
-          <a:lstStyle/>
-          <a:p>
-            <a:pPr algn="ctr"/>
-          </a:p>
-        </p:txBody>
-      </p:sp>
-      <p:sp>
-        <p:nvSpPr>
-          <p:cNvPr id="19" name="TextBox 18"/>
-          <p:cNvSpPr txBox="1"/>
-          <p:nvPr/>
-        </p:nvSpPr>
-        <p:spPr>
-          <a:xfrm>
-            <a:off x="6065215" y="7223760"/>
-            <a:ext cx="457200" cy="457200"/>
-          </a:xfrm>
-          <a:prstGeom prst="rect">
-            <a:avLst/>
-          </a:prstGeom>
-          <a:noFill/>
-        </p:spPr>
-        <p:txBody>
-          <a:bodyPr wrap="square">
-            <a:spAutoFit/>
-          </a:bodyPr>
-          <a:lstStyle/>
-          <a:p>
-            <a:pPr algn="l">
-              <a:defRPr sz="2800" b="1">
-                <a:solidFill>
-                  <a:srgbClr val="D57028"/>
-                </a:solidFill>
-                <a:latin typeface="Arial"/>
-              </a:defRPr>
-            </a:pPr>
-            <a:r>
-              <a:t>04</a:t>
-            </a:r>
-          </a:p>
-        </p:txBody>
-      </p:sp>
-      <p:sp>
-        <p:nvSpPr>
-          <p:cNvPr id="20" name="TextBox 19"/>
-          <p:cNvSpPr txBox="1"/>
-          <p:nvPr/>
-        </p:nvSpPr>
-        <p:spPr>
-          <a:xfrm>
-            <a:off x="6705295" y="7223760"/>
-            <a:ext cx="2286000" cy="365760"/>
-          </a:xfrm>
-          <a:prstGeom prst="rect">
-            <a:avLst/>
-          </a:prstGeom>
-          <a:noFill/>
-        </p:spPr>
-        <p:txBody>
-          <a:bodyPr wrap="square">
-            <a:spAutoFit/>
-          </a:bodyPr>
-          <a:lstStyle/>
-          <a:p>
-            <a:pPr algn="l">
-              <a:defRPr sz="1800" b="1">
-                <a:solidFill>
-                  <a:srgbClr val="FFFFFF"/>
-                </a:solidFill>
-                <a:latin typeface="Arial"/>
-              </a:defRPr>
-            </a:pPr>
-            <a:r>
-              <a:t>Curated Deal Flow</a:t>
-            </a:r>
-          </a:p>
-        </p:txBody>
-      </p:sp>
-      <p:sp>
-        <p:nvSpPr>
-          <p:cNvPr id="21" name="TextBox 20"/>
-          <p:cNvSpPr txBox="1"/>
-          <p:nvPr/>
-        </p:nvSpPr>
-        <p:spPr>
-          <a:xfrm>
-            <a:off x="6705295" y="7589520"/>
-            <a:ext cx="3840480" cy="731520"/>
-          </a:xfrm>
-          <a:prstGeom prst="rect">
-            <a:avLst/>
-          </a:prstGeom>
-          <a:noFill/>
-        </p:spPr>
-        <p:txBody>
-          <a:bodyPr wrap="square">
-            <a:spAutoFit/>
-          </a:bodyPr>
-          <a:lstStyle/>
-          <a:p>
-            <a:pPr algn="l">
-              <a:defRPr sz="1300" b="0">
-                <a:solidFill>
-                  <a:srgbClr val="F3EDE7"/>
-                </a:solidFill>
-                <a:latin typeface="Arial"/>
-              </a:defRPr>
-            </a:pPr>
-            <a:r>
-              <a:t>Vetted investment opportunities connecting funders with</a:t>
-            </a:r>
-            <a:br/>
-            <a:r>
-              <a:t>high-potential startups in our network.</a:t>
+              <a:t>before seeking it</a:t>
             </a:r>
           </a:p>
         </p:txBody>
